--- a/slides/week01/week01.pptx
+++ b/slides/week01/week01.pptx
@@ -4,42 +4,45 @@
   <p:sldMasterIdLst>
     <p:sldMasterId id="2147483648" r:id="rId1"/>
   </p:sldMasterIdLst>
+  <p:notesMasterIdLst>
+    <p:notesMasterId r:id="rId35"/>
+  </p:notesMasterIdLst>
   <p:sldIdLst>
-    <p:sldId id="256" r:id="rId7"/>
-    <p:sldId id="257" r:id="rId8"/>
-    <p:sldId id="258" r:id="rId9"/>
-    <p:sldId id="259" r:id="rId10"/>
-    <p:sldId id="260" r:id="rId11"/>
-    <p:sldId id="261" r:id="rId12"/>
-    <p:sldId id="262" r:id="rId13"/>
-    <p:sldId id="263" r:id="rId14"/>
-    <p:sldId id="264" r:id="rId15"/>
-    <p:sldId id="265" r:id="rId16"/>
-    <p:sldId id="266" r:id="rId17"/>
-    <p:sldId id="267" r:id="rId18"/>
-    <p:sldId id="268" r:id="rId19"/>
-    <p:sldId id="269" r:id="rId20"/>
-    <p:sldId id="270" r:id="rId21"/>
-    <p:sldId id="271" r:id="rId22"/>
-    <p:sldId id="272" r:id="rId23"/>
-    <p:sldId id="273" r:id="rId24"/>
-    <p:sldId id="274" r:id="rId25"/>
-    <p:sldId id="275" r:id="rId26"/>
-    <p:sldId id="276" r:id="rId27"/>
-    <p:sldId id="277" r:id="rId28"/>
-    <p:sldId id="278" r:id="rId29"/>
-    <p:sldId id="279" r:id="rId30"/>
-    <p:sldId id="280" r:id="rId31"/>
-    <p:sldId id="281" r:id="rId32"/>
-    <p:sldId id="282" r:id="rId33"/>
-    <p:sldId id="283" r:id="rId34"/>
-    <p:sldId id="284" r:id="rId35"/>
-    <p:sldId id="285" r:id="rId36"/>
-    <p:sldId id="286" r:id="rId37"/>
-    <p:sldId id="287" r:id="rId38"/>
-    <p:sldId id="288" r:id="rId39"/>
+    <p:sldId id="256" r:id="rId2"/>
+    <p:sldId id="257" r:id="rId3"/>
+    <p:sldId id="258" r:id="rId4"/>
+    <p:sldId id="259" r:id="rId5"/>
+    <p:sldId id="260" r:id="rId6"/>
+    <p:sldId id="261" r:id="rId7"/>
+    <p:sldId id="262" r:id="rId8"/>
+    <p:sldId id="263" r:id="rId9"/>
+    <p:sldId id="264" r:id="rId10"/>
+    <p:sldId id="265" r:id="rId11"/>
+    <p:sldId id="266" r:id="rId12"/>
+    <p:sldId id="267" r:id="rId13"/>
+    <p:sldId id="268" r:id="rId14"/>
+    <p:sldId id="269" r:id="rId15"/>
+    <p:sldId id="270" r:id="rId16"/>
+    <p:sldId id="271" r:id="rId17"/>
+    <p:sldId id="272" r:id="rId18"/>
+    <p:sldId id="273" r:id="rId19"/>
+    <p:sldId id="274" r:id="rId20"/>
+    <p:sldId id="275" r:id="rId21"/>
+    <p:sldId id="276" r:id="rId22"/>
+    <p:sldId id="277" r:id="rId23"/>
+    <p:sldId id="278" r:id="rId24"/>
+    <p:sldId id="279" r:id="rId25"/>
+    <p:sldId id="280" r:id="rId26"/>
+    <p:sldId id="281" r:id="rId27"/>
+    <p:sldId id="282" r:id="rId28"/>
+    <p:sldId id="283" r:id="rId29"/>
+    <p:sldId id="284" r:id="rId30"/>
+    <p:sldId id="285" r:id="rId31"/>
+    <p:sldId id="286" r:id="rId32"/>
+    <p:sldId id="287" r:id="rId33"/>
+    <p:sldId id="288" r:id="rId34"/>
   </p:sldIdLst>
-  <p:sldSz cx="12191695" cy="6858000" type="screen4x3"/>
+  <p:sldSz cx="12192000" cy="6858000"/>
   <p:notesSz cx="6858000" cy="9144000"/>
   <p:defaultTextStyle>
     <a:defPPr>
@@ -136,11 +139,27 @@
       </a:defRPr>
     </a:lvl9pPr>
   </p:defaultTextStyle>
+  <p:extLst>
+    <p:ext uri="{EFAFB233-063F-42B5-8137-9DF3F51BA10A}">
+      <p15:sldGuideLst xmlns:p15="http://schemas.microsoft.com/office/powerpoint/2012/main">
+        <p15:guide id="1" orient="horz" pos="2160">
+          <p15:clr>
+            <a:srgbClr val="A4A3A4"/>
+          </p15:clr>
+        </p15:guide>
+        <p15:guide id="2" pos="2880">
+          <p15:clr>
+            <a:srgbClr val="A4A3A4"/>
+          </p15:clr>
+        </p15:guide>
+      </p15:sldGuideLst>
+    </p:ext>
+  </p:extLst>
 </p:presentation>
 </file>
 
 <file path=ppt/notesMasters/notesMaster1.xml><?xml version="1.0" encoding="utf-8"?>
-<p:notesMaster xmlns:a="http://schemas.openxmlformats.org/drawingml/2006/main" xmlns:p="http://schemas.openxmlformats.org/presentationml/2006/main" xmlns:r="http://schemas.openxmlformats.org/officeDocument/2006/relationships">
+<p:notesMaster xmlns:a="http://schemas.openxmlformats.org/drawingml/2006/main" xmlns:r="http://schemas.openxmlformats.org/officeDocument/2006/relationships" xmlns:p="http://schemas.openxmlformats.org/presentationml/2006/main">
   <p:cSld>
     <p:bg>
       <p:bgRef idx="1001">
@@ -163,7 +182,7 @@
       </p:grpSpPr>
       <p:sp>
         <p:nvSpPr>
-          <p:cNvPr id="2" name="Header Placeholder 1"/>
+          <p:cNvPr id="2" name="머리글 개체 틀 1"/>
           <p:cNvSpPr>
             <a:spLocks noGrp="1"/>
           </p:cNvSpPr>
@@ -174,7 +193,7 @@
         <p:spPr>
           <a:xfrm>
             <a:off x="0" y="0"/>
-            <a:ext cx="2971800" cy="457200"/>
+            <a:ext cx="2971800" cy="458788"/>
           </a:xfrm>
           <a:prstGeom prst="rect">
             <a:avLst/>
@@ -188,13 +207,13 @@
             </a:lvl1pPr>
           </a:lstStyle>
           <a:p>
-            <a:endParaRPr lang="en-US"/>
-          </a:p>
-        </p:txBody>
-      </p:sp>
-      <p:sp>
-        <p:nvSpPr>
-          <p:cNvPr id="3" name="Date Placeholder 2"/>
+            <a:endParaRPr kumimoji="1" lang="ko-KR" altLang="en-US"/>
+          </a:p>
+        </p:txBody>
+      </p:sp>
+      <p:sp>
+        <p:nvSpPr>
+          <p:cNvPr id="3" name="날짜 개체 틀 2"/>
           <p:cNvSpPr>
             <a:spLocks noGrp="1"/>
           </p:cNvSpPr>
@@ -205,7 +224,7 @@
         <p:spPr>
           <a:xfrm>
             <a:off x="3884613" y="0"/>
-            <a:ext cx="2971800" cy="457200"/>
+            <a:ext cx="2971800" cy="458788"/>
           </a:xfrm>
           <a:prstGeom prst="rect">
             <a:avLst/>
@@ -219,17 +238,17 @@
             </a:lvl1pPr>
           </a:lstStyle>
           <a:p>
-            <a:fld id="{0F89C1C7-3DCD-1040-A9CF-14679D8B5DDD}" type="datetimeFigureOut">
-              <a:rPr lang="en-US" smtClean="0"/>
-              <a:t>10/17/16</a:t>
+            <a:fld id="{E30DD1E2-6822-AA45-A5F3-C6F4F496D65D}" type="datetimeFigureOut">
+              <a:rPr kumimoji="1" lang="ko-KR" altLang="en-US" smtClean="0"/>
+              <a:t>2026. 9. 8.</a:t>
             </a:fld>
-            <a:endParaRPr lang="en-US"/>
-          </a:p>
-        </p:txBody>
-      </p:sp>
-      <p:sp>
-        <p:nvSpPr>
-          <p:cNvPr id="4" name="Slide Image Placeholder 3"/>
+            <a:endParaRPr kumimoji="1" lang="ko-KR" altLang="en-US"/>
+          </a:p>
+        </p:txBody>
+      </p:sp>
+      <p:sp>
+        <p:nvSpPr>
+          <p:cNvPr id="4" name="슬라이드 이미지 개체 틀 3"/>
           <p:cNvSpPr>
             <a:spLocks noGrp="1" noRot="1" noChangeAspect="1"/>
           </p:cNvSpPr>
@@ -239,8 +258,8 @@
         </p:nvSpPr>
         <p:spPr>
           <a:xfrm>
-            <a:off x="1143000" y="685800"/>
-            <a:ext cx="4572000" cy="3429000"/>
+            <a:off x="685800" y="1143000"/>
+            <a:ext cx="5486400" cy="3086100"/>
           </a:xfrm>
           <a:prstGeom prst="rect">
             <a:avLst/>
@@ -256,13 +275,13 @@
           <a:bodyPr vert="horz" lIns="91440" tIns="45720" rIns="91440" bIns="45720" rtlCol="0" anchor="ctr"/>
           <a:lstStyle/>
           <a:p>
-            <a:endParaRPr lang="en-US"/>
-          </a:p>
-        </p:txBody>
-      </p:sp>
-      <p:sp>
-        <p:nvSpPr>
-          <p:cNvPr id="5" name="Notes Placeholder 4"/>
+            <a:endParaRPr lang="ko-KR" altLang="en-US"/>
+          </a:p>
+        </p:txBody>
+      </p:sp>
+      <p:sp>
+        <p:nvSpPr>
+          <p:cNvPr id="5" name="슬라이드 노트 개체 틀 4"/>
           <p:cNvSpPr>
             <a:spLocks noGrp="1"/>
           </p:cNvSpPr>
@@ -272,8 +291,8 @@
         </p:nvSpPr>
         <p:spPr>
           <a:xfrm>
-            <a:off x="685800" y="4343400"/>
-            <a:ext cx="5486400" cy="4114800"/>
+            <a:off x="685800" y="4400550"/>
+            <a:ext cx="5486400" cy="3600450"/>
           </a:xfrm>
           <a:prstGeom prst="rect">
             <a:avLst/>
@@ -285,44 +304,43 @@
           <a:p>
             <a:pPr lvl="0"/>
             <a:r>
-              <a:rPr lang="en-US" smtClean="0"/>
-              <a:t>Click to edit Master text styles</a:t>
+              <a:rPr kumimoji="1" lang="ko-KR" altLang="en-US"/>
+              <a:t>마스터 텍스트 스타일을 편집하려면 클릭</a:t>
             </a:r>
           </a:p>
           <a:p>
             <a:pPr lvl="1"/>
             <a:r>
-              <a:rPr lang="en-US" smtClean="0"/>
-              <a:t>Second level</a:t>
+              <a:rPr kumimoji="1" lang="ko-KR" altLang="en-US"/>
+              <a:t>두 번째 수준</a:t>
             </a:r>
           </a:p>
           <a:p>
             <a:pPr lvl="2"/>
             <a:r>
-              <a:rPr lang="en-US" smtClean="0"/>
-              <a:t>Third level</a:t>
+              <a:rPr kumimoji="1" lang="ko-KR" altLang="en-US"/>
+              <a:t>세 번째 수준</a:t>
             </a:r>
           </a:p>
           <a:p>
             <a:pPr lvl="3"/>
             <a:r>
-              <a:rPr lang="en-US" smtClean="0"/>
-              <a:t>Fourth level</a:t>
+              <a:rPr kumimoji="1" lang="ko-KR" altLang="en-US"/>
+              <a:t>네 번째 수준</a:t>
             </a:r>
           </a:p>
           <a:p>
             <a:pPr lvl="4"/>
             <a:r>
-              <a:rPr lang="en-US" smtClean="0"/>
-              <a:t>Fifth level</a:t>
-            </a:r>
-            <a:endParaRPr lang="en-US"/>
-          </a:p>
-        </p:txBody>
-      </p:sp>
-      <p:sp>
-        <p:nvSpPr>
-          <p:cNvPr id="6" name="Footer Placeholder 5"/>
+              <a:rPr kumimoji="1" lang="ko-KR" altLang="en-US"/>
+              <a:t>다섯 번째 수준</a:t>
+            </a:r>
+          </a:p>
+        </p:txBody>
+      </p:sp>
+      <p:sp>
+        <p:nvSpPr>
+          <p:cNvPr id="6" name="바닥글 개체 틀 5"/>
           <p:cNvSpPr>
             <a:spLocks noGrp="1"/>
           </p:cNvSpPr>
@@ -333,7 +351,7 @@
         <p:spPr>
           <a:xfrm>
             <a:off x="0" y="8685213"/>
-            <a:ext cx="2971800" cy="457200"/>
+            <a:ext cx="2971800" cy="458787"/>
           </a:xfrm>
           <a:prstGeom prst="rect">
             <a:avLst/>
@@ -347,13 +365,13 @@
             </a:lvl1pPr>
           </a:lstStyle>
           <a:p>
-            <a:endParaRPr lang="en-US"/>
-          </a:p>
-        </p:txBody>
-      </p:sp>
-      <p:sp>
-        <p:nvSpPr>
-          <p:cNvPr id="7" name="Slide Number Placeholder 6"/>
+            <a:endParaRPr kumimoji="1" lang="ko-KR" altLang="en-US"/>
+          </a:p>
+        </p:txBody>
+      </p:sp>
+      <p:sp>
+        <p:nvSpPr>
+          <p:cNvPr id="7" name="슬라이드 번호 개체 틀 6"/>
           <p:cNvSpPr>
             <a:spLocks noGrp="1"/>
           </p:cNvSpPr>
@@ -364,7 +382,7 @@
         <p:spPr>
           <a:xfrm>
             <a:off x="3884613" y="8685213"/>
-            <a:ext cx="2971800" cy="457200"/>
+            <a:ext cx="2971800" cy="458787"/>
           </a:xfrm>
           <a:prstGeom prst="rect">
             <a:avLst/>
@@ -378,24 +396,24 @@
             </a:lvl1pPr>
           </a:lstStyle>
           <a:p>
-            <a:fld id="{BB5E49A5-4136-284D-997B-48E1D791AD67}" type="slidenum">
-              <a:rPr lang="en-US" smtClean="0"/>
+            <a:fld id="{D1A2F25A-7135-AA4B-8AAC-07E04DC119A0}" type="slidenum">
+              <a:rPr kumimoji="1" lang="ko-KR" altLang="en-US" smtClean="0"/>
               <a:t>‹#›</a:t>
             </a:fld>
-            <a:endParaRPr lang="en-US"/>
+            <a:endParaRPr kumimoji="1" lang="ko-KR" altLang="en-US"/>
           </a:p>
         </p:txBody>
       </p:sp>
     </p:spTree>
     <p:extLst>
       <p:ext uri="{BB962C8B-B14F-4D97-AF65-F5344CB8AC3E}">
-        <p14:creationId xmlns:p14="http://schemas.microsoft.com/office/powerpoint/2010/main" val="2623252185"/>
+        <p14:creationId xmlns:p14="http://schemas.microsoft.com/office/powerpoint/2010/main" val="2101382902"/>
       </p:ext>
     </p:extLst>
   </p:cSld>
   <p:clrMap bg1="lt1" tx1="dk1" bg2="lt2" tx2="dk2" accent1="accent1" accent2="accent2" accent3="accent3" accent4="accent4" accent5="accent5" accent6="accent6" hlink="hlink" folHlink="folHlink"/>
   <p:notesStyle>
-    <a:lvl1pPr marL="0" algn="l" defTabSz="457200" rtl="0" eaLnBrk="1" latinLnBrk="0" hangingPunct="1">
+    <a:lvl1pPr marL="0" algn="l" defTabSz="914400" rtl="0" eaLnBrk="1" latinLnBrk="1" hangingPunct="1">
       <a:defRPr sz="1200" kern="1200">
         <a:solidFill>
           <a:schemeClr val="tx1"/>
@@ -405,7 +423,7 @@
         <a:cs typeface="+mn-cs"/>
       </a:defRPr>
     </a:lvl1pPr>
-    <a:lvl2pPr marL="457200" algn="l" defTabSz="457200" rtl="0" eaLnBrk="1" latinLnBrk="0" hangingPunct="1">
+    <a:lvl2pPr marL="457200" algn="l" defTabSz="914400" rtl="0" eaLnBrk="1" latinLnBrk="1" hangingPunct="1">
       <a:defRPr sz="1200" kern="1200">
         <a:solidFill>
           <a:schemeClr val="tx1"/>
@@ -415,7 +433,7 @@
         <a:cs typeface="+mn-cs"/>
       </a:defRPr>
     </a:lvl2pPr>
-    <a:lvl3pPr marL="914400" algn="l" defTabSz="457200" rtl="0" eaLnBrk="1" latinLnBrk="0" hangingPunct="1">
+    <a:lvl3pPr marL="914400" algn="l" defTabSz="914400" rtl="0" eaLnBrk="1" latinLnBrk="1" hangingPunct="1">
       <a:defRPr sz="1200" kern="1200">
         <a:solidFill>
           <a:schemeClr val="tx1"/>
@@ -425,7 +443,7 @@
         <a:cs typeface="+mn-cs"/>
       </a:defRPr>
     </a:lvl3pPr>
-    <a:lvl4pPr marL="1371600" algn="l" defTabSz="457200" rtl="0" eaLnBrk="1" latinLnBrk="0" hangingPunct="1">
+    <a:lvl4pPr marL="1371600" algn="l" defTabSz="914400" rtl="0" eaLnBrk="1" latinLnBrk="1" hangingPunct="1">
       <a:defRPr sz="1200" kern="1200">
         <a:solidFill>
           <a:schemeClr val="tx1"/>
@@ -435,7 +453,7 @@
         <a:cs typeface="+mn-cs"/>
       </a:defRPr>
     </a:lvl4pPr>
-    <a:lvl5pPr marL="1828800" algn="l" defTabSz="457200" rtl="0" eaLnBrk="1" latinLnBrk="0" hangingPunct="1">
+    <a:lvl5pPr marL="1828800" algn="l" defTabSz="914400" rtl="0" eaLnBrk="1" latinLnBrk="1" hangingPunct="1">
       <a:defRPr sz="1200" kern="1200">
         <a:solidFill>
           <a:schemeClr val="tx1"/>
@@ -445,7 +463,7 @@
         <a:cs typeface="+mn-cs"/>
       </a:defRPr>
     </a:lvl5pPr>
-    <a:lvl6pPr marL="2286000" algn="l" defTabSz="457200" rtl="0" eaLnBrk="1" latinLnBrk="0" hangingPunct="1">
+    <a:lvl6pPr marL="2286000" algn="l" defTabSz="914400" rtl="0" eaLnBrk="1" latinLnBrk="1" hangingPunct="1">
       <a:defRPr sz="1200" kern="1200">
         <a:solidFill>
           <a:schemeClr val="tx1"/>
@@ -455,7 +473,7 @@
         <a:cs typeface="+mn-cs"/>
       </a:defRPr>
     </a:lvl6pPr>
-    <a:lvl7pPr marL="2743200" algn="l" defTabSz="457200" rtl="0" eaLnBrk="1" latinLnBrk="0" hangingPunct="1">
+    <a:lvl7pPr marL="2743200" algn="l" defTabSz="914400" rtl="0" eaLnBrk="1" latinLnBrk="1" hangingPunct="1">
       <a:defRPr sz="1200" kern="1200">
         <a:solidFill>
           <a:schemeClr val="tx1"/>
@@ -465,7 +483,7 @@
         <a:cs typeface="+mn-cs"/>
       </a:defRPr>
     </a:lvl7pPr>
-    <a:lvl8pPr marL="3200400" algn="l" defTabSz="457200" rtl="0" eaLnBrk="1" latinLnBrk="0" hangingPunct="1">
+    <a:lvl8pPr marL="3200400" algn="l" defTabSz="914400" rtl="0" eaLnBrk="1" latinLnBrk="1" hangingPunct="1">
       <a:defRPr sz="1200" kern="1200">
         <a:solidFill>
           <a:schemeClr val="tx1"/>
@@ -475,7 +493,7 @@
         <a:cs typeface="+mn-cs"/>
       </a:defRPr>
     </a:lvl8pPr>
-    <a:lvl9pPr marL="3657600" algn="l" defTabSz="457200" rtl="0" eaLnBrk="1" latinLnBrk="0" hangingPunct="1">
+    <a:lvl9pPr marL="3657600" algn="l" defTabSz="914400" rtl="0" eaLnBrk="1" latinLnBrk="1" hangingPunct="1">
       <a:defRPr sz="1200" kern="1200">
         <a:solidFill>
           <a:schemeClr val="tx1"/>
@@ -490,7 +508,7 @@
 </file>
 
 <file path=ppt/notesSlides/notesSlide1.xml><?xml version="1.0" encoding="utf-8"?>
-<p:notes xmlns:a="http://schemas.openxmlformats.org/drawingml/2006/main" xmlns:p="http://schemas.openxmlformats.org/presentationml/2006/main" xmlns:r="http://schemas.openxmlformats.org/officeDocument/2006/relationships">
+<p:notes xmlns:a="http://schemas.openxmlformats.org/drawingml/2006/main" xmlns:r="http://schemas.openxmlformats.org/officeDocument/2006/relationships" xmlns:p="http://schemas.openxmlformats.org/presentationml/2006/main">
   <p:cSld>
     <p:spTree>
       <p:nvGrpSpPr>
@@ -510,7 +528,7 @@
         <p:nvSpPr>
           <p:cNvPr id="2" name="Slide Image Placeholder 1"/>
           <p:cNvSpPr>
-            <a:spLocks noGrp="1"/>
+            <a:spLocks noGrp="1" noRot="1" noChangeAspect="1"/>
           </p:cNvSpPr>
           <p:nvPr>
             <p:ph type="sldImg" idx="2"/>
@@ -525,7 +543,7 @@
             <a:spLocks noGrp="1"/>
           </p:cNvSpPr>
           <p:nvPr>
-            <p:ph type="body" idx="3" sz="quarter"/>
+            <p:ph type="body" sz="quarter" idx="3"/>
           </p:nvPr>
         </p:nvSpPr>
         <p:spPr/>
@@ -546,7 +564,7 @@
             <a:spLocks noGrp="1"/>
           </p:cNvSpPr>
           <p:nvPr>
-            <p:ph type="sldNum" idx="5" sz="quarter"/>
+            <p:ph type="sldNum" sz="quarter" idx="5"/>
           </p:nvPr>
         </p:nvSpPr>
         <p:spPr/>
@@ -560,7 +578,7 @@
 </file>
 
 <file path=ppt/slideLayouts/slideLayout1.xml><?xml version="1.0" encoding="utf-8"?>
-<p:sldLayout xmlns:a="http://schemas.openxmlformats.org/drawingml/2006/main" xmlns:r="http://schemas.openxmlformats.org/officeDocument/2006/relationships" xmlns:p="http://schemas.openxmlformats.org/presentationml/2006/main" type="title" preserve="1" showMasterSp="0">
+<p:sldLayout xmlns:a="http://schemas.openxmlformats.org/drawingml/2006/main" xmlns:r="http://schemas.openxmlformats.org/officeDocument/2006/relationships" xmlns:p="http://schemas.openxmlformats.org/presentationml/2006/main" showMasterSp="0" type="title" preserve="1">
   <p:cSld name="Title Slide">
     <p:spTree>
       <p:nvGrpSpPr>
@@ -593,7 +611,7 @@
           </a:xfrm>
         </p:spPr>
         <p:txBody>
-          <a:bodyPr anchor="b" wrap="square" lIns="91440" tIns="91440" rIns="91440" bIns="91440">
+          <a:bodyPr wrap="square" lIns="91440" tIns="91440" rIns="91440" bIns="91440" anchor="b">
             <a:normAutofit/>
           </a:bodyPr>
           <a:lstStyle>
@@ -602,7 +620,7 @@
                 <a:spcPts val="0"/>
               </a:spcBef>
               <a:buNone/>
-              <a:defRPr sz="3400" kern="1200" b="1">
+              <a:defRPr sz="3400" b="1" kern="1200">
                 <a:solidFill>
                   <a:schemeClr val="tx2"/>
                 </a:solidFill>
@@ -614,10 +632,9 @@
           </a:lstStyle>
           <a:p>
             <a:r>
-              <a:rPr lang="en-US" smtClean="0"/>
+              <a:rPr lang="en-US"/>
               <a:t>Click to edit Master title style</a:t>
             </a:r>
-            <a:endParaRPr lang="en-US"/>
           </a:p>
         </p:txBody>
       </p:sp>
@@ -638,7 +655,7 @@
           </a:xfrm>
         </p:spPr>
         <p:txBody>
-          <a:bodyPr anchor="t" wrap="square" lIns="91440" tIns="91440" rIns="91440" bIns="91440">
+          <a:bodyPr wrap="square" lIns="91440" tIns="91440" rIns="91440" bIns="91440" anchor="t">
             <a:normAutofit/>
           </a:bodyPr>
           <a:lstStyle>
@@ -659,10 +676,9 @@
           </a:lstStyle>
           <a:p>
             <a:r>
-              <a:rPr lang="en-US" smtClean="0"/>
+              <a:rPr lang="en-US"/>
               <a:t>Click to edit Master subtitle style</a:t>
             </a:r>
-            <a:endParaRPr lang="en-US"/>
           </a:p>
         </p:txBody>
       </p:sp>
@@ -738,10 +754,9 @@
           <a:lstStyle/>
           <a:p>
             <a:r>
-              <a:rPr lang="en-US" smtClean="0"/>
+              <a:rPr lang="en-US"/>
               <a:t>Click to edit Master title style</a:t>
             </a:r>
-            <a:endParaRPr lang="en-US"/>
           </a:p>
         </p:txBody>
       </p:sp>
@@ -762,45 +777,44 @@
           </a:xfrm>
         </p:spPr>
         <p:txBody>
-          <a:bodyPr anchor="t" wrap="square" lIns="91440" tIns="91440" rIns="91440" bIns="91440">
+          <a:bodyPr wrap="square" lIns="91440" tIns="91440" rIns="91440" bIns="91440" anchor="t">
             <a:normAutofit/>
           </a:bodyPr>
           <a:lstStyle/>
           <a:p>
             <a:pPr lvl="0"/>
             <a:r>
-              <a:rPr lang="en-US" smtClean="0"/>
+              <a:rPr lang="en-US"/>
               <a:t>Click to edit Master text styles</a:t>
             </a:r>
           </a:p>
           <a:p>
             <a:pPr lvl="1"/>
             <a:r>
-              <a:rPr lang="en-US" smtClean="0"/>
+              <a:rPr lang="en-US"/>
               <a:t>Second level</a:t>
             </a:r>
           </a:p>
           <a:p>
             <a:pPr lvl="2"/>
             <a:r>
-              <a:rPr lang="en-US" smtClean="0"/>
+              <a:rPr lang="en-US"/>
               <a:t>Third level</a:t>
             </a:r>
           </a:p>
           <a:p>
             <a:pPr lvl="3"/>
             <a:r>
-              <a:rPr lang="en-US" smtClean="0"/>
+              <a:rPr lang="en-US"/>
               <a:t>Fourth level</a:t>
             </a:r>
           </a:p>
           <a:p>
             <a:pPr lvl="4"/>
             <a:r>
-              <a:rPr lang="en-US" smtClean="0"/>
+              <a:rPr lang="en-US"/>
               <a:t>Fifth level</a:t>
             </a:r>
-            <a:endParaRPr lang="en-US"/>
           </a:p>
         </p:txBody>
       </p:sp>
@@ -870,7 +884,7 @@
 </file>
 
 <file path=ppt/slideLayouts/slideLayout3.xml><?xml version="1.0" encoding="utf-8"?>
-<p:sldLayout xmlns:a="http://schemas.openxmlformats.org/drawingml/2006/main" xmlns:r="http://schemas.openxmlformats.org/officeDocument/2006/relationships" xmlns:p="http://schemas.openxmlformats.org/presentationml/2006/main" type="secHead" preserve="1" showMasterSp="0">
+<p:sldLayout xmlns:a="http://schemas.openxmlformats.org/drawingml/2006/main" xmlns:r="http://schemas.openxmlformats.org/officeDocument/2006/relationships" xmlns:p="http://schemas.openxmlformats.org/presentationml/2006/main" showMasterSp="0" type="secHead" preserve="1">
   <p:cSld name="Section Header">
     <p:spTree>
       <p:nvGrpSpPr>
@@ -903,7 +917,7 @@
           </a:xfrm>
         </p:spPr>
         <p:txBody>
-          <a:bodyPr anchor="b" wrap="square" lIns="91440" tIns="91440" rIns="91440" bIns="91440">
+          <a:bodyPr wrap="square" lIns="91440" tIns="91440" rIns="91440" bIns="91440" anchor="b">
             <a:normAutofit/>
           </a:bodyPr>
           <a:lstStyle>
@@ -912,7 +926,7 @@
                 <a:spcPts val="0"/>
               </a:spcBef>
               <a:buNone/>
-              <a:defRPr sz="3200" kern="1200" b="1">
+              <a:defRPr sz="3200" b="1" kern="1200">
                 <a:solidFill>
                   <a:schemeClr val="tx2"/>
                 </a:solidFill>
@@ -924,10 +938,9 @@
           </a:lstStyle>
           <a:p>
             <a:r>
-              <a:rPr lang="en-US" smtClean="0"/>
+              <a:rPr lang="en-US"/>
               <a:t>Click to edit Master title style</a:t>
             </a:r>
-            <a:endParaRPr lang="en-US"/>
           </a:p>
         </p:txBody>
       </p:sp>
@@ -948,7 +961,7 @@
           </a:xfrm>
         </p:spPr>
         <p:txBody>
-          <a:bodyPr anchor="t" wrap="square" lIns="91440" tIns="91440" rIns="91440" bIns="91440">
+          <a:bodyPr wrap="square" lIns="91440" tIns="91440" rIns="91440" bIns="91440" anchor="t">
             <a:normAutofit/>
           </a:bodyPr>
           <a:lstStyle>
@@ -970,7 +983,7 @@
           <a:p>
             <a:pPr lvl="0"/>
             <a:r>
-              <a:rPr lang="en-US" smtClean="0"/>
+              <a:rPr lang="en-US"/>
               <a:t>Click to edit Master text styles</a:t>
             </a:r>
           </a:p>
@@ -1100,10 +1113,9 @@
           <a:lstStyle/>
           <a:p>
             <a:r>
-              <a:rPr lang="en-US" smtClean="0"/>
+              <a:rPr lang="en-US"/>
               <a:t>Click to edit Master title style</a:t>
             </a:r>
-            <a:endParaRPr lang="en-US"/>
           </a:p>
         </p:txBody>
       </p:sp>
@@ -1124,45 +1136,44 @@
           </a:xfrm>
         </p:spPr>
         <p:txBody>
-          <a:bodyPr anchor="t" wrap="square" lIns="91440" tIns="91440" rIns="91440" bIns="91440">
+          <a:bodyPr wrap="square" lIns="91440" tIns="91440" rIns="91440" bIns="91440" anchor="t">
             <a:normAutofit/>
           </a:bodyPr>
           <a:lstStyle/>
           <a:p>
             <a:pPr lvl="0"/>
             <a:r>
-              <a:rPr lang="en-US" smtClean="0"/>
+              <a:rPr lang="en-US"/>
               <a:t>Click to edit Master text styles</a:t>
             </a:r>
           </a:p>
           <a:p>
             <a:pPr lvl="1"/>
             <a:r>
-              <a:rPr lang="en-US" smtClean="0"/>
+              <a:rPr lang="en-US"/>
               <a:t>Second level</a:t>
             </a:r>
           </a:p>
           <a:p>
             <a:pPr lvl="2"/>
             <a:r>
-              <a:rPr lang="en-US" smtClean="0"/>
+              <a:rPr lang="en-US"/>
               <a:t>Third level</a:t>
             </a:r>
           </a:p>
           <a:p>
             <a:pPr lvl="3"/>
             <a:r>
-              <a:rPr lang="en-US" smtClean="0"/>
+              <a:rPr lang="en-US"/>
               <a:t>Fourth level</a:t>
             </a:r>
           </a:p>
           <a:p>
             <a:pPr lvl="4"/>
             <a:r>
-              <a:rPr lang="en-US" smtClean="0"/>
+              <a:rPr lang="en-US"/>
               <a:t>Fifth level</a:t>
             </a:r>
-            <a:endParaRPr lang="en-US"/>
           </a:p>
         </p:txBody>
       </p:sp>
@@ -1183,45 +1194,44 @@
           </a:xfrm>
         </p:spPr>
         <p:txBody>
-          <a:bodyPr anchor="t" wrap="square" lIns="91440" tIns="91440" rIns="91440" bIns="91440">
+          <a:bodyPr wrap="square" lIns="91440" tIns="91440" rIns="91440" bIns="91440" anchor="t">
             <a:normAutofit/>
           </a:bodyPr>
           <a:lstStyle/>
           <a:p>
             <a:pPr lvl="0"/>
             <a:r>
-              <a:rPr lang="en-US" smtClean="0"/>
+              <a:rPr lang="en-US"/>
               <a:t>Click to edit Master text styles</a:t>
             </a:r>
           </a:p>
           <a:p>
             <a:pPr lvl="1"/>
             <a:r>
-              <a:rPr lang="en-US" smtClean="0"/>
+              <a:rPr lang="en-US"/>
               <a:t>Second level</a:t>
             </a:r>
           </a:p>
           <a:p>
             <a:pPr lvl="2"/>
             <a:r>
-              <a:rPr lang="en-US" smtClean="0"/>
+              <a:rPr lang="en-US"/>
               <a:t>Third level</a:t>
             </a:r>
           </a:p>
           <a:p>
             <a:pPr lvl="3"/>
             <a:r>
-              <a:rPr lang="en-US" smtClean="0"/>
+              <a:rPr lang="en-US"/>
               <a:t>Fourth level</a:t>
             </a:r>
           </a:p>
           <a:p>
             <a:pPr lvl="4"/>
             <a:r>
-              <a:rPr lang="en-US" smtClean="0"/>
+              <a:rPr lang="en-US"/>
               <a:t>Fifth level</a:t>
             </a:r>
-            <a:endParaRPr lang="en-US"/>
           </a:p>
         </p:txBody>
       </p:sp>
@@ -1290,7 +1300,7 @@
 </p:sldLayout>
 </file>
 
-<file path=ppt/slideLayouts/slideLayout6.xml><?xml version="1.0" encoding="utf-8"?>
+<file path=ppt/slideLayouts/slideLayout5.xml><?xml version="1.0" encoding="utf-8"?>
 <p:sldLayout xmlns:a="http://schemas.openxmlformats.org/drawingml/2006/main" xmlns:r="http://schemas.openxmlformats.org/officeDocument/2006/relationships" xmlns:p="http://schemas.openxmlformats.org/presentationml/2006/main" type="titleOnly" preserve="1">
   <p:cSld name="Title Only">
     <p:spTree>
@@ -1328,10 +1338,9 @@
           <a:lstStyle/>
           <a:p>
             <a:r>
-              <a:rPr lang="en-US" smtClean="0"/>
+              <a:rPr lang="en-US"/>
               <a:t>Click to edit Master title style</a:t>
             </a:r>
-            <a:endParaRPr lang="en-US"/>
           </a:p>
         </p:txBody>
       </p:sp>
@@ -1400,7 +1409,7 @@
 </p:sldLayout>
 </file>
 
-<file path=ppt/slideLayouts/slideLayout7.xml><?xml version="1.0" encoding="utf-8"?>
+<file path=ppt/slideLayouts/slideLayout6.xml><?xml version="1.0" encoding="utf-8"?>
 <p:sldLayout xmlns:a="http://schemas.openxmlformats.org/drawingml/2006/main" xmlns:r="http://schemas.openxmlformats.org/officeDocument/2006/relationships" xmlns:p="http://schemas.openxmlformats.org/presentationml/2006/main" type="blank" preserve="1">
   <p:cSld name="Blank">
     <p:spTree>
@@ -1482,7 +1491,7 @@
 </p:sldLayout>
 </file>
 
-<file path=ppt/slideLayouts/slideLayout8.xml><?xml version="1.0" encoding="utf-8"?>
+<file path=ppt/slideLayouts/slideLayout7.xml><?xml version="1.0" encoding="utf-8"?>
 <p:sldLayout xmlns:a="http://schemas.openxmlformats.org/drawingml/2006/main" xmlns:r="http://schemas.openxmlformats.org/officeDocument/2006/relationships" xmlns:p="http://schemas.openxmlformats.org/presentationml/2006/main" type="objTx" preserve="1">
   <p:cSld name="Content and Figure">
     <p:spTree>
@@ -1524,10 +1533,9 @@
           </a:lstStyle>
           <a:p>
             <a:r>
-              <a:rPr lang="en-US" smtClean="0"/>
+              <a:rPr lang="en-US"/>
               <a:t>Click to edit Master title style</a:t>
             </a:r>
-            <a:endParaRPr lang="en-US"/>
           </a:p>
         </p:txBody>
       </p:sp>
@@ -1548,45 +1556,44 @@
           </a:xfrm>
         </p:spPr>
         <p:txBody>
-          <a:bodyPr anchor="t" wrap="square" lIns="91440" tIns="91440" rIns="91440" bIns="91440">
+          <a:bodyPr wrap="square" lIns="91440" tIns="91440" rIns="91440" bIns="91440" anchor="t">
             <a:normAutofit/>
           </a:bodyPr>
           <a:lstStyle/>
           <a:p>
             <a:pPr lvl="0"/>
             <a:r>
-              <a:rPr lang="en-US" smtClean="0"/>
+              <a:rPr lang="en-US"/>
               <a:t>Click to edit Master text styles</a:t>
             </a:r>
           </a:p>
           <a:p>
             <a:pPr lvl="1"/>
             <a:r>
-              <a:rPr lang="en-US" smtClean="0"/>
+              <a:rPr lang="en-US"/>
               <a:t>Second level</a:t>
             </a:r>
           </a:p>
           <a:p>
             <a:pPr lvl="2"/>
             <a:r>
-              <a:rPr lang="en-US" smtClean="0"/>
+              <a:rPr lang="en-US"/>
               <a:t>Third level</a:t>
             </a:r>
           </a:p>
           <a:p>
             <a:pPr lvl="3"/>
             <a:r>
-              <a:rPr lang="en-US" smtClean="0"/>
+              <a:rPr lang="en-US"/>
               <a:t>Fourth level</a:t>
             </a:r>
           </a:p>
           <a:p>
             <a:pPr lvl="4"/>
             <a:r>
-              <a:rPr lang="en-US" smtClean="0"/>
+              <a:rPr lang="en-US"/>
               <a:t>Fifth level</a:t>
             </a:r>
-            <a:endParaRPr lang="en-US"/>
           </a:p>
         </p:txBody>
       </p:sp>
@@ -1697,16 +1704,15 @@
           </a:prstGeom>
         </p:spPr>
         <p:txBody>
-          <a:bodyPr vert="horz" lIns="91440" tIns="91440" rIns="91440" bIns="91440" rtlCol="0" anchor="b" wrap="square">
+          <a:bodyPr vert="horz" wrap="square" lIns="91440" tIns="91440" rIns="91440" bIns="91440" rtlCol="0" anchor="b">
             <a:normAutofit/>
           </a:bodyPr>
           <a:lstStyle/>
           <a:p>
             <a:r>
-              <a:rPr lang="en-US" smtClean="0"/>
+              <a:rPr lang="en-US"/>
               <a:t>Click to edit Master title style</a:t>
             </a:r>
-            <a:endParaRPr lang="en-US"/>
           </a:p>
         </p:txBody>
       </p:sp>
@@ -1730,45 +1736,44 @@
           </a:prstGeom>
         </p:spPr>
         <p:txBody>
-          <a:bodyPr vert="horz" lIns="91440" tIns="91440" rIns="91440" bIns="91440" rtlCol="0" anchor="t" wrap="square">
+          <a:bodyPr vert="horz" wrap="square" lIns="91440" tIns="91440" rIns="91440" bIns="91440" rtlCol="0" anchor="t">
             <a:normAutofit/>
           </a:bodyPr>
           <a:lstStyle/>
           <a:p>
             <a:pPr lvl="0"/>
             <a:r>
-              <a:rPr lang="en-US" smtClean="0"/>
+              <a:rPr lang="en-US"/>
               <a:t>Click to edit Master text styles</a:t>
             </a:r>
           </a:p>
           <a:p>
             <a:pPr lvl="1"/>
             <a:r>
-              <a:rPr lang="en-US" smtClean="0"/>
+              <a:rPr lang="en-US"/>
               <a:t>Second level</a:t>
             </a:r>
           </a:p>
           <a:p>
             <a:pPr lvl="2"/>
             <a:r>
-              <a:rPr lang="en-US" smtClean="0"/>
+              <a:rPr lang="en-US"/>
               <a:t>Third level</a:t>
             </a:r>
           </a:p>
           <a:p>
             <a:pPr lvl="3"/>
             <a:r>
-              <a:rPr lang="en-US" smtClean="0"/>
+              <a:rPr lang="en-US"/>
               <a:t>Fourth level</a:t>
             </a:r>
           </a:p>
           <a:p>
             <a:pPr lvl="4"/>
             <a:r>
-              <a:rPr lang="en-US" smtClean="0"/>
+              <a:rPr lang="en-US"/>
               <a:t>Fifth level</a:t>
             </a:r>
-            <a:endParaRPr lang="en-US"/>
           </a:p>
         </p:txBody>
       </p:sp>
@@ -1792,7 +1797,7 @@
           </a:prstGeom>
         </p:spPr>
         <p:txBody>
-          <a:bodyPr vert="horz" lIns="91440" tIns="91440" rIns="91440" bIns="91440" rtlCol="0" anchor="ctr" wrap="square"/>
+          <a:bodyPr vert="horz" wrap="square" lIns="91440" tIns="91440" rIns="91440" bIns="91440" rtlCol="0" anchor="ctr"/>
           <a:lstStyle>
             <a:lvl1pPr marL="0" indent="0" algn="l" defTabSz="457200" rtl="0" eaLnBrk="1" latinLnBrk="0" hangingPunct="1">
               <a:spcBef>
@@ -1834,7 +1839,7 @@
           </a:prstGeom>
         </p:spPr>
         <p:txBody>
-          <a:bodyPr vert="horz" lIns="91440" tIns="91440" rIns="91440" bIns="91440" rtlCol="0" anchor="ctr" wrap="square"/>
+          <a:bodyPr vert="horz" wrap="square" lIns="91440" tIns="91440" rIns="91440" bIns="91440" rtlCol="0" anchor="ctr"/>
           <a:lstStyle>
             <a:lvl1pPr marL="0" indent="0" algn="r" defTabSz="457200" rtl="0" eaLnBrk="1" latinLnBrk="0" hangingPunct="1">
               <a:spcBef>
@@ -1894,9 +1899,9 @@
     <p:sldLayoutId id="2147483650" r:id="rId2"/>
     <p:sldLayoutId id="2147483651" r:id="rId3"/>
     <p:sldLayoutId id="2147483652" r:id="rId4"/>
-    <p:sldLayoutId id="2147483654" r:id="rId6"/>
-    <p:sldLayoutId id="2147483655" r:id="rId7"/>
-    <p:sldLayoutId id="2147483656" r:id="rId8"/>
+    <p:sldLayoutId id="2147483654" r:id="rId5"/>
+    <p:sldLayoutId id="2147483655" r:id="rId6"/>
+    <p:sldLayoutId id="2147483656" r:id="rId7"/>
   </p:sldLayoutIdLst>
   <p:txStyles>
     <p:titleStyle>
@@ -1905,7 +1910,7 @@
           <a:spcPts val="0"/>
         </a:spcBef>
         <a:buNone/>
-        <a:defRPr sz="2800" kern="1200" b="1">
+        <a:defRPr sz="2800" b="1" kern="1200">
           <a:solidFill>
             <a:schemeClr val="tx2"/>
           </a:solidFill>
@@ -1976,96 +1981,6 @@
           <a:cs typeface="+mn-cs"/>
         </a:defRPr>
       </a:lvl9pPr>
-      <a:lvl1pPr marL="256032" indent="-256032" algn="l" defTabSz="457200" rtl="0" eaLnBrk="1" latinLnBrk="0" hangingPunct="1">
-        <a:spcBef>
-          <a:spcPts val="800"/>
-        </a:spcBef>
-        <a:buClr>
-          <a:schemeClr val="accent1"/>
-        </a:buClr>
-        <a:buFont typeface="Arial"/>
-        <a:buChar char="•"/>
-        <a:defRPr sz="1800" kern="1200">
-          <a:solidFill>
-            <a:schemeClr val="tx1"/>
-          </a:solidFill>
-          <a:latin typeface="+mn-lt"/>
-          <a:ea typeface="+mn-ea"/>
-          <a:cs typeface="+mn-cs"/>
-        </a:defRPr>
-      </a:lvl1pPr>
-      <a:lvl2pPr marL="530352" indent="-274320" algn="l" defTabSz="457200" rtl="0" eaLnBrk="1" latinLnBrk="0" hangingPunct="1">
-        <a:spcBef>
-          <a:spcPts val="400"/>
-        </a:spcBef>
-        <a:buClr>
-          <a:schemeClr val="accent1"/>
-        </a:buClr>
-        <a:buFont typeface="Arial"/>
-        <a:buChar char="–"/>
-        <a:defRPr sz="1600" kern="1200">
-          <a:solidFill>
-            <a:schemeClr val="tx1"/>
-          </a:solidFill>
-          <a:latin typeface="+mn-lt"/>
-          <a:ea typeface="+mn-ea"/>
-          <a:cs typeface="+mn-cs"/>
-        </a:defRPr>
-      </a:lvl2pPr>
-      <a:lvl3pPr marL="786384" indent="-256032" algn="l" defTabSz="457200" rtl="0" eaLnBrk="1" latinLnBrk="0" hangingPunct="1">
-        <a:spcBef>
-          <a:spcPts val="300"/>
-        </a:spcBef>
-        <a:buClr>
-          <a:schemeClr val="accent1"/>
-        </a:buClr>
-        <a:buFont typeface="Arial"/>
-        <a:buChar char="·"/>
-        <a:defRPr sz="1400" kern="1200">
-          <a:solidFill>
-            <a:schemeClr val="tx1"/>
-          </a:solidFill>
-          <a:latin typeface="+mn-lt"/>
-          <a:ea typeface="+mn-ea"/>
-          <a:cs typeface="+mn-cs"/>
-        </a:defRPr>
-      </a:lvl3pPr>
-      <a:lvl4pPr marL="1042415" indent="-256031" algn="l" defTabSz="457200" rtl="0" eaLnBrk="1" latinLnBrk="0" hangingPunct="1">
-        <a:spcBef>
-          <a:spcPts val="200"/>
-        </a:spcBef>
-        <a:buClr>
-          <a:schemeClr val="accent1"/>
-        </a:buClr>
-        <a:buFont typeface="Arial"/>
-        <a:buChar char="·"/>
-        <a:defRPr sz="1300" kern="1200">
-          <a:solidFill>
-            <a:schemeClr val="tx1"/>
-          </a:solidFill>
-          <a:latin typeface="+mn-lt"/>
-          <a:ea typeface="+mn-ea"/>
-          <a:cs typeface="+mn-cs"/>
-        </a:defRPr>
-      </a:lvl4pPr>
-      <a:lvl5pPr marL="1298448" indent="-256033" algn="l" defTabSz="457200" rtl="0" eaLnBrk="1" latinLnBrk="0" hangingPunct="1">
-        <a:spcBef>
-          <a:spcPts val="200"/>
-        </a:spcBef>
-        <a:buClr>
-          <a:schemeClr val="accent1"/>
-        </a:buClr>
-        <a:buFont typeface="Arial"/>
-        <a:buChar char="·"/>
-        <a:defRPr sz="1200" kern="1200">
-          <a:solidFill>
-            <a:schemeClr val="tx1"/>
-          </a:solidFill>
-          <a:latin typeface="+mn-lt"/>
-          <a:ea typeface="+mn-ea"/>
-          <a:cs typeface="+mn-cs"/>
-        </a:defRPr>
-      </a:lvl5pPr>
     </p:bodyStyle>
     <p:otherStyle>
       <a:defPPr>
@@ -2167,7 +2082,7 @@
 </file>
 
 <file path=ppt/slides/slide1.xml><?xml version="1.0" encoding="utf-8"?>
-<p:sld xmlns:a="http://schemas.openxmlformats.org/drawingml/2006/main" xmlns:p="http://schemas.openxmlformats.org/presentationml/2006/main" xmlns:r="http://schemas.openxmlformats.org/officeDocument/2006/relationships">
+<p:sld xmlns:a="http://schemas.openxmlformats.org/drawingml/2006/main" xmlns:r="http://schemas.openxmlformats.org/officeDocument/2006/relationships" xmlns:p="http://schemas.openxmlformats.org/presentationml/2006/main">
   <p:cSld name="md:cover|f7b9234496">
     <p:spTree>
       <p:nvGrpSpPr>
@@ -2175,7 +2090,14 @@
         <p:cNvGrpSpPr/>
         <p:nvPr/>
       </p:nvGrpSpPr>
-      <p:grpSpPr/>
+      <p:grpSpPr>
+        <a:xfrm>
+          <a:off x="0" y="0"/>
+          <a:ext cx="0" cy="0"/>
+          <a:chOff x="0" y="0"/>
+          <a:chExt cx="0" cy="0"/>
+        </a:xfrm>
+      </p:grpSpPr>
       <p:sp>
         <p:nvSpPr>
           <p:cNvPr id="2" name="Title 1"/>
@@ -2192,8 +2114,61 @@
           <a:lstStyle/>
           <a:p>
             <a:r>
-              <a:t>1주차 — 왜 시뮬레이션인가, 환경 준비와 첫 시뮬레이션</a:t>
-            </a:r>
+              <a:rPr dirty="0"/>
+              <a:t>1주차 — </a:t>
+            </a:r>
+            <a:r>
+              <a:rPr dirty="0" err="1"/>
+              <a:t>왜</a:t>
+            </a:r>
+            <a:r>
+              <a:rPr dirty="0"/>
+              <a:t> </a:t>
+            </a:r>
+            <a:r>
+              <a:rPr dirty="0" err="1"/>
+              <a:t>시뮬레이션인가</a:t>
+            </a:r>
+            <a:r>
+              <a:rPr dirty="0"/>
+              <a:t>, </a:t>
+            </a:r>
+            <a:br>
+              <a:rPr lang="en-US" dirty="0"/>
+            </a:br>
+            <a:r>
+              <a:rPr lang="ko-KR" altLang="en-US" dirty="0"/>
+              <a:t>                                                     </a:t>
+            </a:r>
+            <a:r>
+              <a:rPr dirty="0" err="1"/>
+              <a:t>환경</a:t>
+            </a:r>
+            <a:r>
+              <a:rPr dirty="0"/>
+              <a:t> </a:t>
+            </a:r>
+            <a:r>
+              <a:rPr dirty="0" err="1"/>
+              <a:t>준비와</a:t>
+            </a:r>
+            <a:r>
+              <a:rPr dirty="0"/>
+              <a:t> </a:t>
+            </a:r>
+            <a:r>
+              <a:rPr dirty="0" err="1"/>
+              <a:t>첫</a:t>
+            </a:r>
+            <a:r>
+              <a:rPr dirty="0"/>
+              <a:t> </a:t>
+            </a:r>
+            <a:r>
+              <a:rPr dirty="0" err="1"/>
+              <a:t>시뮬레이션</a:t>
+            </a:r>
+            <a:endParaRPr dirty="0"/>
           </a:p>
         </p:txBody>
       </p:sp>
@@ -2237,7 +2212,7 @@
 </file>
 
 <file path=ppt/slides/slide10.xml><?xml version="1.0" encoding="utf-8"?>
-<p:sld xmlns:a="http://schemas.openxmlformats.org/drawingml/2006/main" xmlns:p="http://schemas.openxmlformats.org/presentationml/2006/main" xmlns:r="http://schemas.openxmlformats.org/officeDocument/2006/relationships">
+<p:sld xmlns:a="http://schemas.openxmlformats.org/drawingml/2006/main" xmlns:r="http://schemas.openxmlformats.org/officeDocument/2006/relationships" xmlns:p="http://schemas.openxmlformats.org/presentationml/2006/main">
   <p:cSld name="md:1.2-5#1|652296a3dd">
     <p:spTree>
       <p:nvGrpSpPr>
@@ -2245,7 +2220,14 @@
         <p:cNvGrpSpPr/>
         <p:nvPr/>
       </p:nvGrpSpPr>
-      <p:grpSpPr/>
+      <p:grpSpPr>
+        <a:xfrm>
+          <a:off x="0" y="0"/>
+          <a:ext cx="0" cy="0"/>
+          <a:chOff x="0" y="0"/>
+          <a:chExt cx="0" cy="0"/>
+        </a:xfrm>
+      </p:grpSpPr>
       <p:sp>
         <p:nvSpPr>
           <p:cNvPr id="2" name="Title 1"/>
@@ -2282,21 +2264,365 @@
           <a:bodyPr/>
           <a:lstStyle/>
           <a:p>
-            <a:pPr/>
-            <a:r>
-              <a:t>SUMO(독일 DLR)는 같은 미시 시뮬레이터지만 오픈소스입니다. TraCI 인터페이스로 시뮬레이션이 도는 중에 파이썬에서 차량을 직접 제어할 수 있습니다.</a:t>
-            </a:r>
-          </a:p>
-          <a:p>
-            <a:pPr/>
-            <a:r>
-              <a:t>우리가 하려는 일에 가장 가깝습니다. 다만 기본 단위는 여전히 '차로 위의 차량'입니다.</a:t>
-            </a:r>
-          </a:p>
-          <a:p>
-            <a:pPr/>
-            <a:r>
-              <a:t>배차 규칙을 바꿔 가며 대기시간을 비교하려는 우리에게, 차로 변경 모형까지 계산하는 비용은 필요가 없습니다.</a:t>
+            <a:r>
+              <a:rPr dirty="0"/>
+              <a:t>SUMO(</a:t>
+            </a:r>
+            <a:r>
+              <a:rPr dirty="0" err="1"/>
+              <a:t>독일</a:t>
+            </a:r>
+            <a:r>
+              <a:rPr dirty="0"/>
+              <a:t> DLR)</a:t>
+            </a:r>
+            <a:r>
+              <a:rPr dirty="0" err="1"/>
+              <a:t>는</a:t>
+            </a:r>
+            <a:r>
+              <a:rPr dirty="0"/>
+              <a:t> </a:t>
+            </a:r>
+            <a:r>
+              <a:rPr dirty="0" err="1"/>
+              <a:t>같은</a:t>
+            </a:r>
+            <a:r>
+              <a:rPr dirty="0"/>
+              <a:t> </a:t>
+            </a:r>
+            <a:r>
+              <a:rPr dirty="0" err="1"/>
+              <a:t>미시</a:t>
+            </a:r>
+            <a:r>
+              <a:rPr dirty="0"/>
+              <a:t> </a:t>
+            </a:r>
+            <a:r>
+              <a:rPr dirty="0" err="1"/>
+              <a:t>시뮬레이터지만</a:t>
+            </a:r>
+            <a:r>
+              <a:rPr dirty="0"/>
+              <a:t> </a:t>
+            </a:r>
+            <a:r>
+              <a:rPr dirty="0" err="1"/>
+              <a:t>오픈소스입니다</a:t>
+            </a:r>
+            <a:r>
+              <a:rPr dirty="0"/>
+              <a:t>. </a:t>
+            </a:r>
+            <a:r>
+              <a:rPr dirty="0" err="1"/>
+              <a:t>TraCI</a:t>
+            </a:r>
+            <a:r>
+              <a:rPr dirty="0"/>
+              <a:t> </a:t>
+            </a:r>
+            <a:r>
+              <a:rPr dirty="0" err="1"/>
+              <a:t>인터페이스로</a:t>
+            </a:r>
+            <a:r>
+              <a:rPr dirty="0"/>
+              <a:t> </a:t>
+            </a:r>
+            <a:r>
+              <a:rPr dirty="0" err="1"/>
+              <a:t>시뮬레이션이</a:t>
+            </a:r>
+            <a:r>
+              <a:rPr dirty="0"/>
+              <a:t> </a:t>
+            </a:r>
+            <a:r>
+              <a:rPr dirty="0" err="1"/>
+              <a:t>도는</a:t>
+            </a:r>
+            <a:r>
+              <a:rPr dirty="0"/>
+              <a:t> </a:t>
+            </a:r>
+            <a:r>
+              <a:rPr dirty="0" err="1"/>
+              <a:t>중에</a:t>
+            </a:r>
+            <a:r>
+              <a:rPr dirty="0"/>
+              <a:t> </a:t>
+            </a:r>
+            <a:r>
+              <a:rPr dirty="0" err="1"/>
+              <a:t>파이썬에서</a:t>
+            </a:r>
+            <a:r>
+              <a:rPr dirty="0"/>
+              <a:t> </a:t>
+            </a:r>
+            <a:r>
+              <a:rPr dirty="0" err="1"/>
+              <a:t>차량을</a:t>
+            </a:r>
+            <a:r>
+              <a:rPr dirty="0"/>
+              <a:t> </a:t>
+            </a:r>
+            <a:r>
+              <a:rPr dirty="0" err="1"/>
+              <a:t>직접</a:t>
+            </a:r>
+            <a:r>
+              <a:rPr dirty="0"/>
+              <a:t> </a:t>
+            </a:r>
+            <a:r>
+              <a:rPr dirty="0" err="1"/>
+              <a:t>제어할</a:t>
+            </a:r>
+            <a:r>
+              <a:rPr dirty="0"/>
+              <a:t> </a:t>
+            </a:r>
+            <a:r>
+              <a:rPr dirty="0" err="1"/>
+              <a:t>수</a:t>
+            </a:r>
+            <a:r>
+              <a:rPr dirty="0"/>
+              <a:t> </a:t>
+            </a:r>
+            <a:r>
+              <a:rPr dirty="0" err="1"/>
+              <a:t>있습니다</a:t>
+            </a:r>
+            <a:r>
+              <a:rPr dirty="0"/>
+              <a:t>.</a:t>
+            </a:r>
+            <a:endParaRPr lang="en-US" dirty="0"/>
+          </a:p>
+          <a:p>
+            <a:endParaRPr dirty="0"/>
+          </a:p>
+          <a:p>
+            <a:r>
+              <a:rPr dirty="0" err="1"/>
+              <a:t>우리가</a:t>
+            </a:r>
+            <a:r>
+              <a:rPr dirty="0"/>
+              <a:t> </a:t>
+            </a:r>
+            <a:r>
+              <a:rPr dirty="0" err="1"/>
+              <a:t>하려는</a:t>
+            </a:r>
+            <a:r>
+              <a:rPr dirty="0"/>
+              <a:t> </a:t>
+            </a:r>
+            <a:r>
+              <a:rPr dirty="0" err="1"/>
+              <a:t>일에</a:t>
+            </a:r>
+            <a:r>
+              <a:rPr dirty="0"/>
+              <a:t> </a:t>
+            </a:r>
+            <a:r>
+              <a:rPr dirty="0" err="1"/>
+              <a:t>가장</a:t>
+            </a:r>
+            <a:r>
+              <a:rPr dirty="0"/>
+              <a:t> </a:t>
+            </a:r>
+            <a:r>
+              <a:rPr dirty="0" err="1"/>
+              <a:t>가깝습니다</a:t>
+            </a:r>
+            <a:r>
+              <a:rPr dirty="0"/>
+              <a:t>. </a:t>
+            </a:r>
+            <a:r>
+              <a:rPr dirty="0" err="1"/>
+              <a:t>다만</a:t>
+            </a:r>
+            <a:r>
+              <a:rPr dirty="0"/>
+              <a:t> </a:t>
+            </a:r>
+            <a:r>
+              <a:rPr dirty="0" err="1"/>
+              <a:t>기본</a:t>
+            </a:r>
+            <a:r>
+              <a:rPr dirty="0"/>
+              <a:t> </a:t>
+            </a:r>
+            <a:r>
+              <a:rPr dirty="0" err="1"/>
+              <a:t>단위는</a:t>
+            </a:r>
+            <a:r>
+              <a:rPr dirty="0"/>
+              <a:t> </a:t>
+            </a:r>
+            <a:r>
+              <a:rPr dirty="0" err="1"/>
+              <a:t>여전히</a:t>
+            </a:r>
+            <a:r>
+              <a:rPr dirty="0"/>
+              <a:t> '</a:t>
+            </a:r>
+            <a:r>
+              <a:rPr dirty="0" err="1"/>
+              <a:t>차로</a:t>
+            </a:r>
+            <a:r>
+              <a:rPr dirty="0"/>
+              <a:t> </a:t>
+            </a:r>
+            <a:r>
+              <a:rPr dirty="0" err="1"/>
+              <a:t>위의</a:t>
+            </a:r>
+            <a:r>
+              <a:rPr dirty="0"/>
+              <a:t> </a:t>
+            </a:r>
+            <a:r>
+              <a:rPr dirty="0" err="1"/>
+              <a:t>차량'입니다</a:t>
+            </a:r>
+            <a:r>
+              <a:rPr dirty="0"/>
+              <a:t>.</a:t>
+            </a:r>
+            <a:endParaRPr lang="en-US" dirty="0"/>
+          </a:p>
+          <a:p>
+            <a:endParaRPr dirty="0"/>
+          </a:p>
+          <a:p>
+            <a:r>
+              <a:rPr dirty="0" err="1"/>
+              <a:t>배차</a:t>
+            </a:r>
+            <a:r>
+              <a:rPr dirty="0"/>
+              <a:t> </a:t>
+            </a:r>
+            <a:r>
+              <a:rPr dirty="0" err="1"/>
+              <a:t>규칙을</a:t>
+            </a:r>
+            <a:r>
+              <a:rPr dirty="0"/>
+              <a:t> </a:t>
+            </a:r>
+            <a:r>
+              <a:rPr dirty="0" err="1"/>
+              <a:t>바꿔</a:t>
+            </a:r>
+            <a:r>
+              <a:rPr dirty="0"/>
+              <a:t> </a:t>
+            </a:r>
+            <a:r>
+              <a:rPr dirty="0" err="1"/>
+              <a:t>가며</a:t>
+            </a:r>
+            <a:r>
+              <a:rPr dirty="0"/>
+              <a:t> </a:t>
+            </a:r>
+            <a:r>
+              <a:rPr dirty="0" err="1"/>
+              <a:t>대기시간을</a:t>
+            </a:r>
+            <a:r>
+              <a:rPr dirty="0"/>
+              <a:t> </a:t>
+            </a:r>
+            <a:r>
+              <a:rPr dirty="0" err="1"/>
+              <a:t>비교하려는</a:t>
+            </a:r>
+            <a:r>
+              <a:rPr dirty="0"/>
+              <a:t> </a:t>
+            </a:r>
+            <a:r>
+              <a:rPr dirty="0" err="1"/>
+              <a:t>우리에게</a:t>
+            </a:r>
+            <a:r>
+              <a:rPr dirty="0"/>
+              <a:t>, </a:t>
+            </a:r>
+            <a:r>
+              <a:rPr dirty="0" err="1"/>
+              <a:t>차로</a:t>
+            </a:r>
+            <a:r>
+              <a:rPr dirty="0"/>
+              <a:t> </a:t>
+            </a:r>
+            <a:r>
+              <a:rPr dirty="0" err="1"/>
+              <a:t>변경</a:t>
+            </a:r>
+            <a:r>
+              <a:rPr dirty="0"/>
+              <a:t> </a:t>
+            </a:r>
+            <a:r>
+              <a:rPr dirty="0" err="1"/>
+              <a:t>모형까지</a:t>
+            </a:r>
+            <a:r>
+              <a:rPr dirty="0"/>
+              <a:t> </a:t>
+            </a:r>
+            <a:r>
+              <a:rPr dirty="0" err="1"/>
+              <a:t>계산하는</a:t>
+            </a:r>
+            <a:r>
+              <a:rPr dirty="0"/>
+              <a:t> </a:t>
+            </a:r>
+            <a:r>
+              <a:rPr dirty="0" err="1"/>
+              <a:t>비용은</a:t>
+            </a:r>
+            <a:r>
+              <a:rPr dirty="0"/>
+              <a:t> </a:t>
+            </a:r>
+            <a:r>
+              <a:rPr dirty="0" err="1"/>
+              <a:t>필요가</a:t>
+            </a:r>
+            <a:r>
+              <a:rPr dirty="0"/>
+              <a:t> </a:t>
+            </a:r>
+            <a:r>
+              <a:rPr dirty="0" err="1"/>
+              <a:t>없습니다</a:t>
+            </a:r>
+            <a:r>
+              <a:rPr dirty="0"/>
+              <a:t>.</a:t>
             </a:r>
           </a:p>
         </p:txBody>
@@ -2349,7 +2675,7 @@
           <a:p>
             <a:fld id="{C1FF6DA9-008F-8B48-92A6-B652298478BF}" type="slidenum">
               <a:rPr lang="en-US" smtClean="0"/>
-              <a:t>‹#›</a:t>
+              <a:t>10</a:t>
             </a:fld>
             <a:endParaRPr lang="en-US"/>
           </a:p>
@@ -2397,7 +2723,7 @@
 </file>
 
 <file path=ppt/slides/slide11.xml><?xml version="1.0" encoding="utf-8"?>
-<p:sld xmlns:a="http://schemas.openxmlformats.org/drawingml/2006/main" xmlns:p="http://schemas.openxmlformats.org/presentationml/2006/main" xmlns:r="http://schemas.openxmlformats.org/officeDocument/2006/relationships">
+<p:sld xmlns:a="http://schemas.openxmlformats.org/drawingml/2006/main" xmlns:r="http://schemas.openxmlformats.org/officeDocument/2006/relationships" xmlns:p="http://schemas.openxmlformats.org/presentationml/2006/main">
   <p:cSld name="md:1.2-6#1|a8c2f7e348">
     <p:spTree>
       <p:nvGrpSpPr>
@@ -2405,7 +2731,14 @@
         <p:cNvGrpSpPr/>
         <p:nvPr/>
       </p:nvGrpSpPr>
-      <p:grpSpPr/>
+      <p:grpSpPr>
+        <a:xfrm>
+          <a:off x="0" y="0"/>
+          <a:ext cx="0" cy="0"/>
+          <a:chOff x="0" y="0"/>
+          <a:chExt cx="0" cy="0"/>
+        </a:xfrm>
+      </p:grpSpPr>
       <p:sp>
         <p:nvSpPr>
           <p:cNvPr id="2" name="Title 1"/>
@@ -2475,7 +2808,7 @@
           <a:p>
             <a:fld id="{C1FF6DA9-008F-8B48-92A6-B652298478BF}" type="slidenum">
               <a:rPr lang="en-US" smtClean="0"/>
-              <a:t>‹#›</a:t>
+              <a:t>11</a:t>
             </a:fld>
             <a:endParaRPr lang="en-US"/>
           </a:p>
@@ -2572,16 +2905,46 @@
                 <a:tableStyleId>{5940675A-B579-460E-94D1-54222C63F5DA}</a:tableStyleId>
               </a:tblPr>
               <a:tblGrid>
-                <a:gridCol w="2435477"/>
-                <a:gridCol w="2216940"/>
-                <a:gridCol w="1578325"/>
-                <a:gridCol w="1291798"/>
-                <a:gridCol w="3571872"/>
+                <a:gridCol w="2435477">
+                  <a:extLst>
+                    <a:ext uri="{9D8B030D-6E8A-4147-A177-3AD203B41FA5}">
+                      <a16:colId xmlns:a16="http://schemas.microsoft.com/office/drawing/2014/main" val="20000"/>
+                    </a:ext>
+                  </a:extLst>
+                </a:gridCol>
+                <a:gridCol w="2216940">
+                  <a:extLst>
+                    <a:ext uri="{9D8B030D-6E8A-4147-A177-3AD203B41FA5}">
+                      <a16:colId xmlns:a16="http://schemas.microsoft.com/office/drawing/2014/main" val="20001"/>
+                    </a:ext>
+                  </a:extLst>
+                </a:gridCol>
+                <a:gridCol w="1578325">
+                  <a:extLst>
+                    <a:ext uri="{9D8B030D-6E8A-4147-A177-3AD203B41FA5}">
+                      <a16:colId xmlns:a16="http://schemas.microsoft.com/office/drawing/2014/main" val="20002"/>
+                    </a:ext>
+                  </a:extLst>
+                </a:gridCol>
+                <a:gridCol w="1291798">
+                  <a:extLst>
+                    <a:ext uri="{9D8B030D-6E8A-4147-A177-3AD203B41FA5}">
+                      <a16:colId xmlns:a16="http://schemas.microsoft.com/office/drawing/2014/main" val="20003"/>
+                    </a:ext>
+                  </a:extLst>
+                </a:gridCol>
+                <a:gridCol w="3571872">
+                  <a:extLst>
+                    <a:ext uri="{9D8B030D-6E8A-4147-A177-3AD203B41FA5}">
+                      <a16:colId xmlns:a16="http://schemas.microsoft.com/office/drawing/2014/main" val="20004"/>
+                    </a:ext>
+                  </a:extLst>
+                </a:gridCol>
               </a:tblGrid>
               <a:tr h="300228">
                 <a:tc>
                   <a:txBody>
-                    <a:bodyPr wrap="square"/>
+                    <a:bodyPr/>
                     <a:lstStyle/>
                     <a:p>
                       <a:pPr algn="ctr"/>
@@ -2599,7 +2962,7 @@
                 </a:tc>
                 <a:tc>
                   <a:txBody>
-                    <a:bodyPr wrap="square"/>
+                    <a:bodyPr/>
                     <a:lstStyle/>
                     <a:p>
                       <a:pPr algn="ctr"/>
@@ -2617,7 +2980,7 @@
                 </a:tc>
                 <a:tc>
                   <a:txBody>
-                    <a:bodyPr wrap="square"/>
+                    <a:bodyPr/>
                     <a:lstStyle/>
                     <a:p>
                       <a:pPr algn="ctr"/>
@@ -2635,7 +2998,7 @@
                 </a:tc>
                 <a:tc>
                   <a:txBody>
-                    <a:bodyPr wrap="square"/>
+                    <a:bodyPr/>
                     <a:lstStyle/>
                     <a:p>
                       <a:pPr algn="ctr"/>
@@ -2653,7 +3016,7 @@
                 </a:tc>
                 <a:tc>
                   <a:txBody>
-                    <a:bodyPr wrap="square"/>
+                    <a:bodyPr/>
                     <a:lstStyle/>
                     <a:p>
                       <a:pPr algn="ctr"/>
@@ -2669,11 +3032,16 @@
                     </a:solidFill>
                   </a:tcPr>
                 </a:tc>
+                <a:extLst>
+                  <a:ext uri="{0D108BD9-81ED-4DB2-BD59-A6C34878D82A}">
+                    <a16:rowId xmlns:a16="http://schemas.microsoft.com/office/drawing/2014/main" val="10000"/>
+                  </a:ext>
+                </a:extLst>
               </a:tr>
               <a:tr h="300228">
                 <a:tc>
                   <a:txBody>
-                    <a:bodyPr wrap="square"/>
+                    <a:bodyPr/>
                     <a:lstStyle/>
                     <a:p>
                       <a:r>
@@ -2686,7 +3054,7 @@
                 </a:tc>
                 <a:tc>
                   <a:txBody>
-                    <a:bodyPr wrap="square"/>
+                    <a:bodyPr/>
                     <a:lstStyle/>
                     <a:p>
                       <a:r>
@@ -2699,7 +3067,7 @@
                 </a:tc>
                 <a:tc>
                   <a:txBody>
-                    <a:bodyPr wrap="square"/>
+                    <a:bodyPr/>
                     <a:lstStyle/>
                     <a:p>
                       <a:r>
@@ -2712,7 +3080,7 @@
                 </a:tc>
                 <a:tc>
                   <a:txBody>
-                    <a:bodyPr wrap="square"/>
+                    <a:bodyPr/>
                     <a:lstStyle/>
                     <a:p>
                       <a:r>
@@ -2725,7 +3093,7 @@
                 </a:tc>
                 <a:tc>
                   <a:txBody>
-                    <a:bodyPr wrap="square"/>
+                    <a:bodyPr/>
                     <a:lstStyle/>
                     <a:p>
                       <a:r>
@@ -2736,11 +3104,16 @@
                   </a:txBody>
                   <a:tcPr marL="54864" marR="54864" marT="27432" marB="27432"/>
                 </a:tc>
+                <a:extLst>
+                  <a:ext uri="{0D108BD9-81ED-4DB2-BD59-A6C34878D82A}">
+                    <a16:rowId xmlns:a16="http://schemas.microsoft.com/office/drawing/2014/main" val="10001"/>
+                  </a:ext>
+                </a:extLst>
               </a:tr>
               <a:tr h="300228">
                 <a:tc>
                   <a:txBody>
-                    <a:bodyPr wrap="square"/>
+                    <a:bodyPr/>
                     <a:lstStyle/>
                     <a:p>
                       <a:r>
@@ -2753,7 +3126,7 @@
                 </a:tc>
                 <a:tc>
                   <a:txBody>
-                    <a:bodyPr wrap="square"/>
+                    <a:bodyPr/>
                     <a:lstStyle/>
                     <a:p>
                       <a:r>
@@ -2766,7 +3139,7 @@
                 </a:tc>
                 <a:tc>
                   <a:txBody>
-                    <a:bodyPr wrap="square"/>
+                    <a:bodyPr/>
                     <a:lstStyle/>
                     <a:p>
                       <a:r>
@@ -2779,7 +3152,7 @@
                 </a:tc>
                 <a:tc>
                   <a:txBody>
-                    <a:bodyPr wrap="square"/>
+                    <a:bodyPr/>
                     <a:lstStyle/>
                     <a:p>
                       <a:r>
@@ -2792,7 +3165,7 @@
                 </a:tc>
                 <a:tc>
                   <a:txBody>
-                    <a:bodyPr wrap="square"/>
+                    <a:bodyPr/>
                     <a:lstStyle/>
                     <a:p>
                       <a:r>
@@ -2803,11 +3176,16 @@
                   </a:txBody>
                   <a:tcPr marL="54864" marR="54864" marT="27432" marB="27432"/>
                 </a:tc>
+                <a:extLst>
+                  <a:ext uri="{0D108BD9-81ED-4DB2-BD59-A6C34878D82A}">
+                    <a16:rowId xmlns:a16="http://schemas.microsoft.com/office/drawing/2014/main" val="10002"/>
+                  </a:ext>
+                </a:extLst>
               </a:tr>
               <a:tr h="300228">
                 <a:tc>
                   <a:txBody>
-                    <a:bodyPr wrap="square"/>
+                    <a:bodyPr/>
                     <a:lstStyle/>
                     <a:p>
                       <a:r>
@@ -2820,7 +3198,7 @@
                 </a:tc>
                 <a:tc>
                   <a:txBody>
-                    <a:bodyPr wrap="square"/>
+                    <a:bodyPr/>
                     <a:lstStyle/>
                     <a:p>
                       <a:r>
@@ -2833,7 +3211,7 @@
                 </a:tc>
                 <a:tc>
                   <a:txBody>
-                    <a:bodyPr wrap="square"/>
+                    <a:bodyPr/>
                     <a:lstStyle/>
                     <a:p>
                       <a:r>
@@ -2846,7 +3224,7 @@
                 </a:tc>
                 <a:tc>
                   <a:txBody>
-                    <a:bodyPr wrap="square"/>
+                    <a:bodyPr/>
                     <a:lstStyle/>
                     <a:p>
                       <a:r>
@@ -2859,7 +3237,7 @@
                 </a:tc>
                 <a:tc>
                   <a:txBody>
-                    <a:bodyPr wrap="square"/>
+                    <a:bodyPr/>
                     <a:lstStyle/>
                     <a:p>
                       <a:r>
@@ -2870,6 +3248,11 @@
                   </a:txBody>
                   <a:tcPr marL="54864" marR="54864" marT="27432" marB="27432"/>
                 </a:tc>
+                <a:extLst>
+                  <a:ext uri="{0D108BD9-81ED-4DB2-BD59-A6C34878D82A}">
+                    <a16:rowId xmlns:a16="http://schemas.microsoft.com/office/drawing/2014/main" val="10003"/>
+                  </a:ext>
+                </a:extLst>
               </a:tr>
             </a:tbl>
           </a:graphicData>
@@ -2884,7 +3267,7 @@
 </file>
 
 <file path=ppt/slides/slide12.xml><?xml version="1.0" encoding="utf-8"?>
-<p:sld xmlns:a="http://schemas.openxmlformats.org/drawingml/2006/main" xmlns:p="http://schemas.openxmlformats.org/presentationml/2006/main" xmlns:r="http://schemas.openxmlformats.org/officeDocument/2006/relationships">
+<p:sld xmlns:a="http://schemas.openxmlformats.org/drawingml/2006/main" xmlns:r="http://schemas.openxmlformats.org/officeDocument/2006/relationships" xmlns:p="http://schemas.openxmlformats.org/presentationml/2006/main">
   <p:cSld name="md:1.2-7#1|69150d2d6d">
     <p:spTree>
       <p:nvGrpSpPr>
@@ -2892,7 +3275,14 @@
         <p:cNvGrpSpPr/>
         <p:nvPr/>
       </p:nvGrpSpPr>
-      <p:grpSpPr/>
+      <p:grpSpPr>
+        <a:xfrm>
+          <a:off x="0" y="0"/>
+          <a:ext cx="0" cy="0"/>
+          <a:chOff x="0" y="0"/>
+          <a:chExt cx="0" cy="0"/>
+        </a:xfrm>
+      </p:grpSpPr>
       <p:sp>
         <p:nvSpPr>
           <p:cNvPr id="2" name="Title 1"/>
@@ -2929,25 +3319,21 @@
           <a:bodyPr/>
           <a:lstStyle/>
           <a:p>
-            <a:pPr/>
             <a:r>
               <a:t>해상도: '차량이 차로 위 어디에 있는가'가 아니라 '차량이 몇 시 몇 분에 어느 노드에 있는가'면 충분합니다.</a:t>
             </a:r>
           </a:p>
           <a:p>
-            <a:pPr/>
             <a:r>
               <a:t>공간 범위: 교차로가 아니라 도시 전체여야 합니다.</a:t>
             </a:r>
           </a:p>
           <a:p>
-            <a:pPr/>
             <a:r>
               <a:t>반복: 수강생이 각자 값을 바꿔 가며 다시 돌릴 수 있어야 합니다.</a:t>
             </a:r>
           </a:p>
           <a:p>
-            <a:pPr/>
             <a:r>
               <a:t>직접 만든다고 하면 큰일처럼 들리지만, 재료는 이미 다 공개되어 있습니다.</a:t>
             </a:r>
@@ -2959,7 +3345,6 @@
             </a:r>
           </a:p>
           <a:p>
-            <a:pPr/>
             <a:r>
               <a:t>우리가 새로 쓰는 것은 이 부품들을 시간 축 위에서 돌리는 수백 줄짜리 코드뿐입니다.</a:t>
             </a:r>
@@ -3014,7 +3399,7 @@
           <a:p>
             <a:fld id="{C1FF6DA9-008F-8B48-92A6-B652298478BF}" type="slidenum">
               <a:rPr lang="en-US" smtClean="0"/>
-              <a:t>‹#›</a:t>
+              <a:t>12</a:t>
             </a:fld>
             <a:endParaRPr lang="en-US"/>
           </a:p>
@@ -3062,7 +3447,7 @@
 </file>
 
 <file path=ppt/slides/slide13.xml><?xml version="1.0" encoding="utf-8"?>
-<p:sld xmlns:a="http://schemas.openxmlformats.org/drawingml/2006/main" xmlns:p="http://schemas.openxmlformats.org/presentationml/2006/main" xmlns:r="http://schemas.openxmlformats.org/officeDocument/2006/relationships">
+<p:sld xmlns:a="http://schemas.openxmlformats.org/drawingml/2006/main" xmlns:r="http://schemas.openxmlformats.org/officeDocument/2006/relationships" xmlns:p="http://schemas.openxmlformats.org/presentationml/2006/main">
   <p:cSld name="md:1.3#1|519e02c3cc">
     <p:spTree>
       <p:nvGrpSpPr>
@@ -3070,7 +3455,14 @@
         <p:cNvGrpSpPr/>
         <p:nvPr/>
       </p:nvGrpSpPr>
-      <p:grpSpPr/>
+      <p:grpSpPr>
+        <a:xfrm>
+          <a:off x="0" y="0"/>
+          <a:ext cx="0" cy="0"/>
+          <a:chOff x="0" y="0"/>
+          <a:chExt cx="0" cy="0"/>
+        </a:xfrm>
+      </p:grpSpPr>
       <p:sp>
         <p:nvSpPr>
           <p:cNvPr id="2" name="Title 1"/>
@@ -3140,7 +3532,7 @@
           <a:p>
             <a:fld id="{C1FF6DA9-008F-8B48-92A6-B652298478BF}" type="slidenum">
               <a:rPr lang="en-US" smtClean="0"/>
-              <a:t>‹#›</a:t>
+              <a:t>13</a:t>
             </a:fld>
             <a:endParaRPr lang="en-US"/>
           </a:p>
@@ -3255,7 +3647,7 @@
           </a:fontRef>
         </p:style>
         <p:txBody>
-          <a:bodyPr rtlCol="0" anchor="t" wrap="square" lIns="182880" rIns="182880" tIns="137160" bIns="137160"/>
+          <a:bodyPr wrap="square" lIns="182880" tIns="137160" rIns="182880" bIns="137160" rtlCol="0" anchor="t"/>
           <a:lstStyle/>
           <a:p>
             <a:pPr algn="l"/>
@@ -3271,15 +3663,12 @@
           </a:p>
           <a:p>
             <a:pPr algn="l"/>
-            <a:r>
-              <a:rPr sz="1200">
-                <a:solidFill>
-                  <a:srgbClr val="1F2937"/>
-                </a:solidFill>
-                <a:latin typeface="Consolas"/>
-              </a:rPr>
-              <a:t/>
-            </a:r>
+            <a:endParaRPr sz="1200">
+              <a:solidFill>
+                <a:srgbClr val="1F2937"/>
+              </a:solidFill>
+              <a:latin typeface="Consolas"/>
+            </a:endParaRPr>
           </a:p>
           <a:p>
             <a:pPr algn="l"/>
@@ -3403,7 +3792,7 @@
 </file>
 
 <file path=ppt/slides/slide14.xml><?xml version="1.0" encoding="utf-8"?>
-<p:sld xmlns:a="http://schemas.openxmlformats.org/drawingml/2006/main" xmlns:p="http://schemas.openxmlformats.org/presentationml/2006/main" xmlns:r="http://schemas.openxmlformats.org/officeDocument/2006/relationships">
+<p:sld xmlns:a="http://schemas.openxmlformats.org/drawingml/2006/main" xmlns:r="http://schemas.openxmlformats.org/officeDocument/2006/relationships" xmlns:p="http://schemas.openxmlformats.org/presentationml/2006/main">
   <p:cSld name="md:1.3-2#1|670e907a9a">
     <p:spTree>
       <p:nvGrpSpPr>
@@ -3411,7 +3800,14 @@
         <p:cNvGrpSpPr/>
         <p:nvPr/>
       </p:nvGrpSpPr>
-      <p:grpSpPr/>
+      <p:grpSpPr>
+        <a:xfrm>
+          <a:off x="0" y="0"/>
+          <a:ext cx="0" cy="0"/>
+          <a:chOff x="0" y="0"/>
+          <a:chExt cx="0" cy="0"/>
+        </a:xfrm>
+      </p:grpSpPr>
       <p:sp>
         <p:nvSpPr>
           <p:cNvPr id="2" name="Title 1"/>
@@ -3481,7 +3877,7 @@
           <a:p>
             <a:fld id="{C1FF6DA9-008F-8B48-92A6-B652298478BF}" type="slidenum">
               <a:rPr lang="en-US" smtClean="0"/>
-              <a:t>‹#›</a:t>
+              <a:t>14</a:t>
             </a:fld>
             <a:endParaRPr lang="en-US"/>
           </a:p>
@@ -3557,7 +3953,7 @@
           </a:fontRef>
         </p:style>
         <p:txBody>
-          <a:bodyPr rtlCol="0" anchor="t" wrap="square" lIns="182880" rIns="182880" tIns="137160" bIns="137160"/>
+          <a:bodyPr wrap="square" lIns="182880" tIns="137160" rIns="182880" bIns="137160" rtlCol="0" anchor="t"/>
           <a:lstStyle/>
           <a:p>
             <a:pPr algn="l"/>
@@ -3673,7 +4069,7 @@
 </file>
 
 <file path=ppt/slides/slide15.xml><?xml version="1.0" encoding="utf-8"?>
-<p:sld xmlns:a="http://schemas.openxmlformats.org/drawingml/2006/main" xmlns:p="http://schemas.openxmlformats.org/presentationml/2006/main" xmlns:r="http://schemas.openxmlformats.org/officeDocument/2006/relationships">
+<p:sld xmlns:a="http://schemas.openxmlformats.org/drawingml/2006/main" xmlns:r="http://schemas.openxmlformats.org/officeDocument/2006/relationships" xmlns:p="http://schemas.openxmlformats.org/presentationml/2006/main">
   <p:cSld name="md:1.3-3#1|6b4e50da94">
     <p:spTree>
       <p:nvGrpSpPr>
@@ -3681,7 +4077,14 @@
         <p:cNvGrpSpPr/>
         <p:nvPr/>
       </p:nvGrpSpPr>
-      <p:grpSpPr/>
+      <p:grpSpPr>
+        <a:xfrm>
+          <a:off x="0" y="0"/>
+          <a:ext cx="0" cy="0"/>
+          <a:chOff x="0" y="0"/>
+          <a:chExt cx="0" cy="0"/>
+        </a:xfrm>
+      </p:grpSpPr>
       <p:sp>
         <p:nvSpPr>
           <p:cNvPr id="2" name="Title 1"/>
@@ -3751,7 +4154,7 @@
           <a:p>
             <a:fld id="{C1FF6DA9-008F-8B48-92A6-B652298478BF}" type="slidenum">
               <a:rPr lang="en-US" smtClean="0"/>
-              <a:t>‹#›</a:t>
+              <a:t>15</a:t>
             </a:fld>
             <a:endParaRPr lang="en-US"/>
           </a:p>
@@ -3827,7 +4230,7 @@
           </a:fontRef>
         </p:style>
         <p:txBody>
-          <a:bodyPr rtlCol="0" anchor="t" wrap="square" lIns="182880" rIns="182880" tIns="137160" bIns="137160"/>
+          <a:bodyPr wrap="square" lIns="182880" tIns="137160" rIns="182880" bIns="137160" rtlCol="0" anchor="t"/>
           <a:lstStyle/>
           <a:p>
             <a:pPr algn="l"/>
@@ -3943,7 +4346,7 @@
 </file>
 
 <file path=ppt/slides/slide16.xml><?xml version="1.0" encoding="utf-8"?>
-<p:sld xmlns:a="http://schemas.openxmlformats.org/drawingml/2006/main" xmlns:p="http://schemas.openxmlformats.org/presentationml/2006/main" xmlns:r="http://schemas.openxmlformats.org/officeDocument/2006/relationships">
+<p:sld xmlns:a="http://schemas.openxmlformats.org/drawingml/2006/main" xmlns:r="http://schemas.openxmlformats.org/officeDocument/2006/relationships" xmlns:p="http://schemas.openxmlformats.org/presentationml/2006/main">
   <p:cSld name="md:1.3-4#1|8bdb7e321f">
     <p:spTree>
       <p:nvGrpSpPr>
@@ -3951,7 +4354,14 @@
         <p:cNvGrpSpPr/>
         <p:nvPr/>
       </p:nvGrpSpPr>
-      <p:grpSpPr/>
+      <p:grpSpPr>
+        <a:xfrm>
+          <a:off x="0" y="0"/>
+          <a:ext cx="0" cy="0"/>
+          <a:chOff x="0" y="0"/>
+          <a:chExt cx="0" cy="0"/>
+        </a:xfrm>
+      </p:grpSpPr>
       <p:sp>
         <p:nvSpPr>
           <p:cNvPr id="2" name="Title 1"/>
@@ -3988,25 +4398,21 @@
           <a:bodyPr/>
           <a:lstStyle/>
           <a:p>
-            <a:pPr/>
             <a:r>
               <a:t>40대로도 41분 기다린 사람이 더 늘지 않는다면, 나머지 40대는 다른 지역에 두는 편이 낫습니다.</a:t>
             </a:r>
           </a:p>
           <a:p>
-            <a:pPr/>
             <a:r>
               <a:t>이 질문에 답하려면 같은 저녁을 40대로 다시 살아야 합니다. 실제 운영에서는 불가능하고, 시뮬레이터에서는 인자 하나를 바꾸면 됩니다.</a:t>
             </a:r>
           </a:p>
           <a:p>
-            <a:pPr/>
             <a:r>
               <a:t>학기 내내 이 질문을 답할 수 있는 상태로 갑니다. 11장에서 직접 짠 루프로 답합니다.</a:t>
             </a:r>
           </a:p>
           <a:p>
-            <a:pPr/>
             <a:r>
               <a:t>교재 녹화본에는 80대짜리 결과만 들어 있습니다. 40대로 바꿔 돌리려면 DTUMOS 서버가 필요합니다 (부록 B).</a:t>
             </a:r>
@@ -4061,7 +4467,7 @@
           <a:p>
             <a:fld id="{C1FF6DA9-008F-8B48-92A6-B652298478BF}" type="slidenum">
               <a:rPr lang="en-US" smtClean="0"/>
-              <a:t>‹#›</a:t>
+              <a:t>16</a:t>
             </a:fld>
             <a:endParaRPr lang="en-US"/>
           </a:p>
@@ -4109,7 +4515,7 @@
 </file>
 
 <file path=ppt/slides/slide17.xml><?xml version="1.0" encoding="utf-8"?>
-<p:sld xmlns:a="http://schemas.openxmlformats.org/drawingml/2006/main" xmlns:p="http://schemas.openxmlformats.org/presentationml/2006/main" xmlns:r="http://schemas.openxmlformats.org/officeDocument/2006/relationships">
+<p:sld xmlns:a="http://schemas.openxmlformats.org/drawingml/2006/main" xmlns:r="http://schemas.openxmlformats.org/officeDocument/2006/relationships" xmlns:p="http://schemas.openxmlformats.org/presentationml/2006/main">
   <p:cSld name="md:1.4#1|59b5eeac28">
     <p:spTree>
       <p:nvGrpSpPr>
@@ -4117,7 +4523,14 @@
         <p:cNvGrpSpPr/>
         <p:nvPr/>
       </p:nvGrpSpPr>
-      <p:grpSpPr/>
+      <p:grpSpPr>
+        <a:xfrm>
+          <a:off x="0" y="0"/>
+          <a:ext cx="0" cy="0"/>
+          <a:chOff x="0" y="0"/>
+          <a:chExt cx="0" cy="0"/>
+        </a:xfrm>
+      </p:grpSpPr>
       <p:sp>
         <p:nvSpPr>
           <p:cNvPr id="2" name="Title 1"/>
@@ -4159,7 +4572,6 @@
           <a:bodyPr/>
           <a:lstStyle/>
           <a:p>
-            <a:pPr/>
             <a:r>
               <a:t>우리가 만들 시뮬레이터는 네 부분으로 나뉩니다. 데이터를 넣어 모델을 보정하고, 그 위에서 서비스를 운영한 뒤, 결과를 지표와 그림으로 냅니다.</a:t>
             </a:r>
@@ -4214,7 +4626,7 @@
           <a:p>
             <a:fld id="{C1FF6DA9-008F-8B48-92A6-B652298478BF}" type="slidenum">
               <a:rPr lang="en-US" smtClean="0"/>
-              <a:t>‹#›</a:t>
+              <a:t>17</a:t>
             </a:fld>
             <a:endParaRPr lang="en-US"/>
           </a:p>
@@ -4286,7 +4698,7 @@
 </file>
 
 <file path=ppt/slides/slide18.xml><?xml version="1.0" encoding="utf-8"?>
-<p:sld xmlns:a="http://schemas.openxmlformats.org/drawingml/2006/main" xmlns:p="http://schemas.openxmlformats.org/presentationml/2006/main" xmlns:r="http://schemas.openxmlformats.org/officeDocument/2006/relationships">
+<p:sld xmlns:a="http://schemas.openxmlformats.org/drawingml/2006/main" xmlns:r="http://schemas.openxmlformats.org/officeDocument/2006/relationships" xmlns:p="http://schemas.openxmlformats.org/presentationml/2006/main">
   <p:cSld name="md:1.4-2#1|3461c1a20b">
     <p:spTree>
       <p:nvGrpSpPr>
@@ -4294,7 +4706,14 @@
         <p:cNvGrpSpPr/>
         <p:nvPr/>
       </p:nvGrpSpPr>
-      <p:grpSpPr/>
+      <p:grpSpPr>
+        <a:xfrm>
+          <a:off x="0" y="0"/>
+          <a:ext cx="0" cy="0"/>
+          <a:chOff x="0" y="0"/>
+          <a:chExt cx="0" cy="0"/>
+        </a:xfrm>
+      </p:grpSpPr>
       <p:sp>
         <p:nvSpPr>
           <p:cNvPr id="2" name="Title 1"/>
@@ -4364,7 +4783,7 @@
           <a:p>
             <a:fld id="{C1FF6DA9-008F-8B48-92A6-B652298478BF}" type="slidenum">
               <a:rPr lang="en-US" smtClean="0"/>
-              <a:t>‹#›</a:t>
+              <a:t>18</a:t>
             </a:fld>
             <a:endParaRPr lang="en-US"/>
           </a:p>
@@ -4422,14 +4841,32 @@
                 <a:tableStyleId>{5940675A-B579-460E-94D1-54222C63F5DA}</a:tableStyleId>
               </a:tblPr>
               <a:tblGrid>
-                <a:gridCol w="3154839"/>
-                <a:gridCol w="6380725"/>
-                <a:gridCol w="1558850"/>
+                <a:gridCol w="3154839">
+                  <a:extLst>
+                    <a:ext uri="{9D8B030D-6E8A-4147-A177-3AD203B41FA5}">
+                      <a16:colId xmlns:a16="http://schemas.microsoft.com/office/drawing/2014/main" val="20000"/>
+                    </a:ext>
+                  </a:extLst>
+                </a:gridCol>
+                <a:gridCol w="6380725">
+                  <a:extLst>
+                    <a:ext uri="{9D8B030D-6E8A-4147-A177-3AD203B41FA5}">
+                      <a16:colId xmlns:a16="http://schemas.microsoft.com/office/drawing/2014/main" val="20001"/>
+                    </a:ext>
+                  </a:extLst>
+                </a:gridCol>
+                <a:gridCol w="1558850">
+                  <a:extLst>
+                    <a:ext uri="{9D8B030D-6E8A-4147-A177-3AD203B41FA5}">
+                      <a16:colId xmlns:a16="http://schemas.microsoft.com/office/drawing/2014/main" val="20002"/>
+                    </a:ext>
+                  </a:extLst>
+                </a:gridCol>
               </a:tblGrid>
               <a:tr h="331978">
                 <a:tc>
                   <a:txBody>
-                    <a:bodyPr wrap="square"/>
+                    <a:bodyPr/>
                     <a:lstStyle/>
                     <a:p>
                       <a:pPr algn="ctr"/>
@@ -4447,7 +4884,7 @@
                 </a:tc>
                 <a:tc>
                   <a:txBody>
-                    <a:bodyPr wrap="square"/>
+                    <a:bodyPr/>
                     <a:lstStyle/>
                     <a:p>
                       <a:pPr algn="ctr"/>
@@ -4465,7 +4902,7 @@
                 </a:tc>
                 <a:tc>
                   <a:txBody>
-                    <a:bodyPr wrap="square"/>
+                    <a:bodyPr/>
                     <a:lstStyle/>
                     <a:p>
                       <a:pPr algn="ctr"/>
@@ -4481,11 +4918,16 @@
                     </a:solidFill>
                   </a:tcPr>
                 </a:tc>
+                <a:extLst>
+                  <a:ext uri="{0D108BD9-81ED-4DB2-BD59-A6C34878D82A}">
+                    <a16:rowId xmlns:a16="http://schemas.microsoft.com/office/drawing/2014/main" val="10000"/>
+                  </a:ext>
+                </a:extLst>
               </a:tr>
               <a:tr h="331978">
                 <a:tc>
                   <a:txBody>
-                    <a:bodyPr wrap="square"/>
+                    <a:bodyPr/>
                     <a:lstStyle/>
                     <a:p>
                       <a:r>
@@ -4498,7 +4940,7 @@
                 </a:tc>
                 <a:tc>
                   <a:txBody>
-                    <a:bodyPr wrap="square"/>
+                    <a:bodyPr/>
                     <a:lstStyle/>
                     <a:p>
                       <a:r>
@@ -4511,7 +4953,7 @@
                 </a:tc>
                 <a:tc>
                   <a:txBody>
-                    <a:bodyPr wrap="square"/>
+                    <a:bodyPr/>
                     <a:lstStyle/>
                     <a:p>
                       <a:r>
@@ -4522,11 +4964,16 @@
                   </a:txBody>
                   <a:tcPr marL="54864" marR="54864" marT="27432" marB="27432"/>
                 </a:tc>
+                <a:extLst>
+                  <a:ext uri="{0D108BD9-81ED-4DB2-BD59-A6C34878D82A}">
+                    <a16:rowId xmlns:a16="http://schemas.microsoft.com/office/drawing/2014/main" val="10001"/>
+                  </a:ext>
+                </a:extLst>
               </a:tr>
               <a:tr h="331978">
                 <a:tc>
                   <a:txBody>
-                    <a:bodyPr wrap="square"/>
+                    <a:bodyPr/>
                     <a:lstStyle/>
                     <a:p>
                       <a:r>
@@ -4539,7 +4986,7 @@
                 </a:tc>
                 <a:tc>
                   <a:txBody>
-                    <a:bodyPr wrap="square"/>
+                    <a:bodyPr/>
                     <a:lstStyle/>
                     <a:p>
                       <a:r>
@@ -4552,7 +4999,7 @@
                 </a:tc>
                 <a:tc>
                   <a:txBody>
-                    <a:bodyPr wrap="square"/>
+                    <a:bodyPr/>
                     <a:lstStyle/>
                     <a:p>
                       <a:r>
@@ -4563,11 +5010,16 @@
                   </a:txBody>
                   <a:tcPr marL="54864" marR="54864" marT="27432" marB="27432"/>
                 </a:tc>
+                <a:extLst>
+                  <a:ext uri="{0D108BD9-81ED-4DB2-BD59-A6C34878D82A}">
+                    <a16:rowId xmlns:a16="http://schemas.microsoft.com/office/drawing/2014/main" val="10002"/>
+                  </a:ext>
+                </a:extLst>
               </a:tr>
               <a:tr h="331978">
                 <a:tc>
                   <a:txBody>
-                    <a:bodyPr wrap="square"/>
+                    <a:bodyPr/>
                     <a:lstStyle/>
                     <a:p>
                       <a:r>
@@ -4580,7 +5032,7 @@
                 </a:tc>
                 <a:tc>
                   <a:txBody>
-                    <a:bodyPr wrap="square"/>
+                    <a:bodyPr/>
                     <a:lstStyle/>
                     <a:p>
                       <a:r>
@@ -4593,7 +5045,7 @@
                 </a:tc>
                 <a:tc>
                   <a:txBody>
-                    <a:bodyPr wrap="square"/>
+                    <a:bodyPr/>
                     <a:lstStyle/>
                     <a:p>
                       <a:r>
@@ -4604,11 +5056,16 @@
                   </a:txBody>
                   <a:tcPr marL="54864" marR="54864" marT="27432" marB="27432"/>
                 </a:tc>
+                <a:extLst>
+                  <a:ext uri="{0D108BD9-81ED-4DB2-BD59-A6C34878D82A}">
+                    <a16:rowId xmlns:a16="http://schemas.microsoft.com/office/drawing/2014/main" val="10003"/>
+                  </a:ext>
+                </a:extLst>
               </a:tr>
               <a:tr h="331978">
                 <a:tc>
                   <a:txBody>
-                    <a:bodyPr wrap="square"/>
+                    <a:bodyPr/>
                     <a:lstStyle/>
                     <a:p>
                       <a:r>
@@ -4621,7 +5078,7 @@
                 </a:tc>
                 <a:tc>
                   <a:txBody>
-                    <a:bodyPr wrap="square"/>
+                    <a:bodyPr/>
                     <a:lstStyle/>
                     <a:p>
                       <a:r>
@@ -4634,7 +5091,7 @@
                 </a:tc>
                 <a:tc>
                   <a:txBody>
-                    <a:bodyPr wrap="square"/>
+                    <a:bodyPr/>
                     <a:lstStyle/>
                     <a:p>
                       <a:r>
@@ -4645,11 +5102,16 @@
                   </a:txBody>
                   <a:tcPr marL="54864" marR="54864" marT="27432" marB="27432"/>
                 </a:tc>
+                <a:extLst>
+                  <a:ext uri="{0D108BD9-81ED-4DB2-BD59-A6C34878D82A}">
+                    <a16:rowId xmlns:a16="http://schemas.microsoft.com/office/drawing/2014/main" val="10004"/>
+                  </a:ext>
+                </a:extLst>
               </a:tr>
               <a:tr h="331978">
                 <a:tc>
                   <a:txBody>
-                    <a:bodyPr wrap="square"/>
+                    <a:bodyPr/>
                     <a:lstStyle/>
                     <a:p>
                       <a:r>
@@ -4662,7 +5124,7 @@
                 </a:tc>
                 <a:tc>
                   <a:txBody>
-                    <a:bodyPr wrap="square"/>
+                    <a:bodyPr/>
                     <a:lstStyle/>
                     <a:p>
                       <a:r>
@@ -4675,7 +5137,7 @@
                 </a:tc>
                 <a:tc>
                   <a:txBody>
-                    <a:bodyPr wrap="square"/>
+                    <a:bodyPr/>
                     <a:lstStyle/>
                     <a:p>
                       <a:r>
@@ -4686,11 +5148,16 @@
                   </a:txBody>
                   <a:tcPr marL="54864" marR="54864" marT="27432" marB="27432"/>
                 </a:tc>
+                <a:extLst>
+                  <a:ext uri="{0D108BD9-81ED-4DB2-BD59-A6C34878D82A}">
+                    <a16:rowId xmlns:a16="http://schemas.microsoft.com/office/drawing/2014/main" val="10005"/>
+                  </a:ext>
+                </a:extLst>
               </a:tr>
               <a:tr h="331978">
                 <a:tc>
                   <a:txBody>
-                    <a:bodyPr wrap="square"/>
+                    <a:bodyPr/>
                     <a:lstStyle/>
                     <a:p>
                       <a:r>
@@ -4703,7 +5170,7 @@
                 </a:tc>
                 <a:tc>
                   <a:txBody>
-                    <a:bodyPr wrap="square"/>
+                    <a:bodyPr/>
                     <a:lstStyle/>
                     <a:p>
                       <a:r>
@@ -4716,7 +5183,7 @@
                 </a:tc>
                 <a:tc>
                   <a:txBody>
-                    <a:bodyPr wrap="square"/>
+                    <a:bodyPr/>
                     <a:lstStyle/>
                     <a:p>
                       <a:r>
@@ -4727,6 +5194,11 @@
                   </a:txBody>
                   <a:tcPr marL="54864" marR="54864" marT="27432" marB="27432"/>
                 </a:tc>
+                <a:extLst>
+                  <a:ext uri="{0D108BD9-81ED-4DB2-BD59-A6C34878D82A}">
+                    <a16:rowId xmlns:a16="http://schemas.microsoft.com/office/drawing/2014/main" val="10006"/>
+                  </a:ext>
+                </a:extLst>
               </a:tr>
             </a:tbl>
           </a:graphicData>
@@ -4780,7 +5252,7 @@
 </file>
 
 <file path=ppt/slides/slide19.xml><?xml version="1.0" encoding="utf-8"?>
-<p:sld xmlns:a="http://schemas.openxmlformats.org/drawingml/2006/main" xmlns:p="http://schemas.openxmlformats.org/presentationml/2006/main" xmlns:r="http://schemas.openxmlformats.org/officeDocument/2006/relationships">
+<p:sld xmlns:a="http://schemas.openxmlformats.org/drawingml/2006/main" xmlns:r="http://schemas.openxmlformats.org/officeDocument/2006/relationships" xmlns:p="http://schemas.openxmlformats.org/presentationml/2006/main">
   <p:cSld name="md:1.4-3#1|681364b004">
     <p:spTree>
       <p:nvGrpSpPr>
@@ -4788,7 +5260,14 @@
         <p:cNvGrpSpPr/>
         <p:nvPr/>
       </p:nvGrpSpPr>
-      <p:grpSpPr/>
+      <p:grpSpPr>
+        <a:xfrm>
+          <a:off x="0" y="0"/>
+          <a:ext cx="0" cy="0"/>
+          <a:chOff x="0" y="0"/>
+          <a:chExt cx="0" cy="0"/>
+        </a:xfrm>
+      </p:grpSpPr>
       <p:sp>
         <p:nvSpPr>
           <p:cNvPr id="2" name="Title 1"/>
@@ -4825,25 +5304,21 @@
           <a:bodyPr/>
           <a:lstStyle/>
           <a:p>
-            <a:pPr/>
             <a:r>
               <a:t>배차 알고리즘은 "어느 차가 가장 빨리 도착하는가"를 알아야 합니다. 그 값이 곧 ETA(도착 예정 시간)입니다.</a:t>
             </a:r>
           </a:p>
           <a:p>
-            <a:pPr/>
             <a:r>
               <a:t>직선거리로 어림하면 강을 건너야 하는 차를 가깝다고 잘못 고릅니다.</a:t>
             </a:r>
           </a:p>
           <a:p>
-            <a:pPr/>
             <a:r>
               <a:t>3장에서 도로망 위 최단경로로, 9장에서 실제 통행 기록으로 학습한 모델로 이 값을 구합니다.</a:t>
             </a:r>
           </a:p>
           <a:p>
-            <a:pPr/>
             <a:r>
               <a:rPr>
                 <a:latin typeface="Consolas"/>
@@ -4904,7 +5379,7 @@
           <a:p>
             <a:fld id="{C1FF6DA9-008F-8B48-92A6-B652298478BF}" type="slidenum">
               <a:rPr lang="en-US" smtClean="0"/>
-              <a:t>‹#›</a:t>
+              <a:t>19</a:t>
             </a:fld>
             <a:endParaRPr lang="en-US"/>
           </a:p>
@@ -4952,7 +5427,7 @@
 </file>
 
 <file path=ppt/slides/slide2.xml><?xml version="1.0" encoding="utf-8"?>
-<p:sld xmlns:a="http://schemas.openxmlformats.org/drawingml/2006/main" xmlns:p="http://schemas.openxmlformats.org/presentationml/2006/main" xmlns:r="http://schemas.openxmlformats.org/officeDocument/2006/relationships">
+<p:sld xmlns:a="http://schemas.openxmlformats.org/drawingml/2006/main" xmlns:r="http://schemas.openxmlformats.org/officeDocument/2006/relationships" xmlns:p="http://schemas.openxmlformats.org/presentationml/2006/main">
   <p:cSld name="md:오늘의-질문#1|bef1c8402f">
     <p:spTree>
       <p:nvGrpSpPr>
@@ -4960,7 +5435,14 @@
         <p:cNvGrpSpPr/>
         <p:nvPr/>
       </p:nvGrpSpPr>
-      <p:grpSpPr/>
+      <p:grpSpPr>
+        <a:xfrm>
+          <a:off x="0" y="0"/>
+          <a:ext cx="0" cy="0"/>
+          <a:chOff x="0" y="0"/>
+          <a:chExt cx="0" cy="0"/>
+        </a:xfrm>
+      </p:grpSpPr>
       <p:sp>
         <p:nvSpPr>
           <p:cNvPr id="2" name="Title 1"/>
@@ -4997,40 +5479,384 @@
           <a:bodyPr/>
           <a:lstStyle/>
           <a:p>
-            <a:pPr/>
-            <a:r>
-              <a:t>하남시가 심야에 수요응답형 버스를 20대 넣으려 합니다. 정해야 할 것이 세 가지입니다.</a:t>
+            <a:r>
+              <a:rPr dirty="0" err="1"/>
+              <a:t>하남시가</a:t>
+            </a:r>
+            <a:r>
+              <a:rPr dirty="0"/>
+              <a:t> </a:t>
+            </a:r>
+            <a:r>
+              <a:rPr dirty="0" err="1"/>
+              <a:t>심야에</a:t>
+            </a:r>
+            <a:r>
+              <a:rPr dirty="0"/>
+              <a:t> </a:t>
+            </a:r>
+            <a:r>
+              <a:rPr dirty="0" err="1"/>
+              <a:t>수요응답형</a:t>
+            </a:r>
+            <a:r>
+              <a:rPr dirty="0"/>
+              <a:t> </a:t>
+            </a:r>
+            <a:r>
+              <a:rPr dirty="0" err="1"/>
+              <a:t>버스를</a:t>
+            </a:r>
+            <a:r>
+              <a:rPr dirty="0"/>
+              <a:t> 20대 </a:t>
+            </a:r>
+            <a:r>
+              <a:rPr dirty="0" err="1"/>
+              <a:t>넣으려</a:t>
+            </a:r>
+            <a:r>
+              <a:rPr dirty="0"/>
+              <a:t> </a:t>
+            </a:r>
+            <a:r>
+              <a:rPr dirty="0" err="1"/>
+              <a:t>합니다</a:t>
+            </a:r>
+            <a:r>
+              <a:rPr dirty="0"/>
+              <a:t>. </a:t>
+            </a:r>
+            <a:r>
+              <a:rPr dirty="0" err="1"/>
+              <a:t>정해야</a:t>
+            </a:r>
+            <a:r>
+              <a:rPr dirty="0"/>
+              <a:t> </a:t>
+            </a:r>
+            <a:r>
+              <a:rPr dirty="0" err="1"/>
+              <a:t>할</a:t>
+            </a:r>
+            <a:r>
+              <a:rPr dirty="0"/>
+              <a:t> </a:t>
+            </a:r>
+            <a:r>
+              <a:rPr dirty="0" err="1"/>
+              <a:t>것이</a:t>
+            </a:r>
+            <a:r>
+              <a:rPr dirty="0"/>
+              <a:t> </a:t>
+            </a:r>
+            <a:r>
+              <a:rPr dirty="0" err="1"/>
+              <a:t>세</a:t>
+            </a:r>
+            <a:r>
+              <a:rPr dirty="0"/>
+              <a:t> </a:t>
+            </a:r>
+            <a:r>
+              <a:rPr dirty="0" err="1"/>
+              <a:t>가지입니다</a:t>
+            </a:r>
+            <a:r>
+              <a:rPr dirty="0"/>
+              <a:t>.</a:t>
             </a:r>
           </a:p>
           <a:p>
             <a:pPr lvl="1"/>
-            <a:r>
-              <a:t>차량을 어느 차고지에 몇 대씩 둘 것인가</a:t>
-            </a:r>
+            <a:endParaRPr lang="en-US" dirty="0"/>
           </a:p>
           <a:p>
             <a:pPr lvl="1"/>
             <a:r>
-              <a:t>호출이 여러 건 겹쳤을 때 누구부터 태울 것인가</a:t>
-            </a:r>
+              <a:rPr lang="en-US" altLang="ko-KR" dirty="0"/>
+              <a:t>1.</a:t>
+            </a:r>
+            <a:r>
+              <a:rPr lang="ko-KR" altLang="en-US" dirty="0"/>
+              <a:t> </a:t>
+            </a:r>
+            <a:r>
+              <a:rPr dirty="0" err="1"/>
+              <a:t>차량을</a:t>
+            </a:r>
+            <a:r>
+              <a:rPr dirty="0"/>
+              <a:t> </a:t>
+            </a:r>
+            <a:r>
+              <a:rPr dirty="0" err="1"/>
+              <a:t>어느</a:t>
+            </a:r>
+            <a:r>
+              <a:rPr dirty="0"/>
+              <a:t> </a:t>
+            </a:r>
+            <a:r>
+              <a:rPr dirty="0" err="1"/>
+              <a:t>차고지에</a:t>
+            </a:r>
+            <a:r>
+              <a:rPr dirty="0"/>
+              <a:t> </a:t>
+            </a:r>
+            <a:r>
+              <a:rPr dirty="0" err="1"/>
+              <a:t>몇</a:t>
+            </a:r>
+            <a:r>
+              <a:rPr dirty="0"/>
+              <a:t> </a:t>
+            </a:r>
+            <a:r>
+              <a:rPr dirty="0" err="1"/>
+              <a:t>대씩</a:t>
+            </a:r>
+            <a:r>
+              <a:rPr dirty="0"/>
+              <a:t> </a:t>
+            </a:r>
+            <a:r>
+              <a:rPr dirty="0" err="1"/>
+              <a:t>둘</a:t>
+            </a:r>
+            <a:r>
+              <a:rPr dirty="0"/>
+              <a:t> </a:t>
+            </a:r>
+            <a:r>
+              <a:rPr dirty="0" err="1"/>
+              <a:t>것인가</a:t>
+            </a:r>
+            <a:r>
+              <a:rPr lang="ko-KR" altLang="en-US" dirty="0"/>
+              <a:t> </a:t>
+            </a:r>
+            <a:r>
+              <a:rPr lang="en-US" altLang="ko-KR" dirty="0"/>
+              <a:t>(</a:t>
+            </a:r>
+            <a:r>
+              <a:rPr lang="ko-KR" altLang="en-US" dirty="0"/>
+              <a:t>교통 시스템 사전계획</a:t>
+            </a:r>
+            <a:r>
+              <a:rPr lang="en-US" altLang="ko-KR" dirty="0"/>
+              <a:t>)</a:t>
+            </a:r>
+            <a:r>
+              <a:rPr lang="ko-KR" altLang="en-US" dirty="0"/>
+              <a:t> </a:t>
+            </a:r>
+            <a:endParaRPr dirty="0"/>
           </a:p>
           <a:p>
             <a:pPr lvl="1"/>
             <a:r>
-              <a:t>그래서 승객이 평균 몇 분을 기다리게 되는가</a:t>
-            </a:r>
-          </a:p>
-          <a:p>
-            <a:pPr/>
-            <a:r>
-              <a:t>세 번째 질문에 답하지 못하면 앞의 두 개도 정할 수 없습니다.</a:t>
-            </a:r>
-          </a:p>
-          <a:p>
-            <a:pPr/>
-            <a:r>
-              <a:t>오늘은 그 답을 어떻게 얻는지에 관한 시간입니다.</a:t>
-            </a:r>
+              <a:rPr lang="en-US" altLang="ko-KR" dirty="0"/>
+              <a:t>2.</a:t>
+            </a:r>
+            <a:r>
+              <a:rPr lang="ko-KR" altLang="en-US" dirty="0"/>
+              <a:t> </a:t>
+            </a:r>
+            <a:r>
+              <a:rPr dirty="0" err="1"/>
+              <a:t>호출이</a:t>
+            </a:r>
+            <a:r>
+              <a:rPr dirty="0"/>
+              <a:t> </a:t>
+            </a:r>
+            <a:r>
+              <a:rPr dirty="0" err="1"/>
+              <a:t>여러</a:t>
+            </a:r>
+            <a:r>
+              <a:rPr dirty="0"/>
+              <a:t> </a:t>
+            </a:r>
+            <a:r>
+              <a:rPr dirty="0" err="1"/>
+              <a:t>건</a:t>
+            </a:r>
+            <a:r>
+              <a:rPr dirty="0"/>
+              <a:t> </a:t>
+            </a:r>
+            <a:r>
+              <a:rPr dirty="0" err="1"/>
+              <a:t>겹쳤을</a:t>
+            </a:r>
+            <a:r>
+              <a:rPr dirty="0"/>
+              <a:t> </a:t>
+            </a:r>
+            <a:r>
+              <a:rPr dirty="0" err="1"/>
+              <a:t>때</a:t>
+            </a:r>
+            <a:r>
+              <a:rPr dirty="0"/>
+              <a:t> </a:t>
+            </a:r>
+            <a:r>
+              <a:rPr dirty="0" err="1"/>
+              <a:t>누구부터</a:t>
+            </a:r>
+            <a:r>
+              <a:rPr dirty="0"/>
+              <a:t> </a:t>
+            </a:r>
+            <a:r>
+              <a:rPr dirty="0" err="1"/>
+              <a:t>태울</a:t>
+            </a:r>
+            <a:r>
+              <a:rPr dirty="0"/>
+              <a:t> </a:t>
+            </a:r>
+            <a:r>
+              <a:rPr dirty="0" err="1"/>
+              <a:t>것인가</a:t>
+            </a:r>
+            <a:r>
+              <a:rPr lang="ko-KR" altLang="en-US" dirty="0"/>
+              <a:t> </a:t>
+            </a:r>
+            <a:r>
+              <a:rPr lang="en-US" altLang="ko-KR" dirty="0"/>
+              <a:t>(</a:t>
+            </a:r>
+            <a:r>
+              <a:rPr lang="ko-KR" altLang="en-US" dirty="0"/>
+              <a:t>배차알고리즘</a:t>
+            </a:r>
+            <a:r>
+              <a:rPr lang="en-US" altLang="ko-KR" dirty="0"/>
+              <a:t>)</a:t>
+            </a:r>
+            <a:endParaRPr dirty="0"/>
+          </a:p>
+          <a:p>
+            <a:pPr lvl="1"/>
+            <a:r>
+              <a:rPr lang="en-US" altLang="ko-KR" dirty="0"/>
+              <a:t>3.</a:t>
+            </a:r>
+            <a:r>
+              <a:rPr lang="ko-KR" altLang="en-US" dirty="0"/>
+              <a:t> </a:t>
+            </a:r>
+            <a:r>
+              <a:rPr dirty="0" err="1"/>
+              <a:t>그래서</a:t>
+            </a:r>
+            <a:r>
+              <a:rPr dirty="0"/>
+              <a:t> </a:t>
+            </a:r>
+            <a:r>
+              <a:rPr dirty="0" err="1"/>
+              <a:t>승객이</a:t>
+            </a:r>
+            <a:r>
+              <a:rPr dirty="0"/>
+              <a:t> </a:t>
+            </a:r>
+            <a:r>
+              <a:rPr dirty="0" err="1"/>
+              <a:t>평균</a:t>
+            </a:r>
+            <a:r>
+              <a:rPr dirty="0"/>
+              <a:t> </a:t>
+            </a:r>
+            <a:r>
+              <a:rPr dirty="0" err="1"/>
+              <a:t>몇</a:t>
+            </a:r>
+            <a:r>
+              <a:rPr dirty="0"/>
+              <a:t> </a:t>
+            </a:r>
+            <a:r>
+              <a:rPr dirty="0" err="1"/>
+              <a:t>분을</a:t>
+            </a:r>
+            <a:r>
+              <a:rPr dirty="0"/>
+              <a:t> </a:t>
+            </a:r>
+            <a:r>
+              <a:rPr dirty="0" err="1"/>
+              <a:t>기다리게</a:t>
+            </a:r>
+            <a:r>
+              <a:rPr dirty="0"/>
+              <a:t> </a:t>
+            </a:r>
+            <a:r>
+              <a:rPr dirty="0" err="1"/>
+              <a:t>되는가</a:t>
+            </a:r>
+            <a:r>
+              <a:rPr lang="ko-KR" altLang="en-US" dirty="0"/>
+              <a:t> </a:t>
+            </a:r>
+            <a:r>
+              <a:rPr lang="en-US" altLang="ko-KR" dirty="0"/>
+              <a:t>(</a:t>
+            </a:r>
+            <a:r>
+              <a:rPr lang="ko-KR" altLang="en-US" dirty="0"/>
+              <a:t>서비스 수준 평가</a:t>
+            </a:r>
+            <a:r>
+              <a:rPr lang="en-US" altLang="ko-KR" dirty="0"/>
+              <a:t>)</a:t>
+            </a:r>
+            <a:endParaRPr dirty="0"/>
+          </a:p>
+          <a:p>
+            <a:endParaRPr lang="en-US" dirty="0"/>
+          </a:p>
+          <a:p>
+            <a:r>
+              <a:rPr lang="ko-KR" altLang="en-US" dirty="0" err="1"/>
+              <a:t>시뮬레션을</a:t>
+            </a:r>
+            <a:r>
+              <a:rPr lang="ko-KR" altLang="en-US" dirty="0"/>
+              <a:t> 활용하면 위의 질문에 대한 다양한 답</a:t>
+            </a:r>
+            <a:r>
+              <a:rPr lang="en-US" altLang="ko-KR" dirty="0"/>
+              <a:t>(</a:t>
+            </a:r>
+            <a:r>
+              <a:rPr lang="ko-KR" altLang="en-US" dirty="0"/>
+              <a:t>시나리오</a:t>
+            </a:r>
+            <a:r>
+              <a:rPr lang="en-US" altLang="ko-KR" dirty="0"/>
+              <a:t>)</a:t>
+            </a:r>
+            <a:r>
+              <a:rPr lang="ko-KR" altLang="en-US" dirty="0" err="1"/>
+              <a:t>를</a:t>
+            </a:r>
+            <a:r>
+              <a:rPr lang="ko-KR" altLang="en-US" dirty="0"/>
+              <a:t> 얻을 수 있습니다</a:t>
+            </a:r>
+            <a:endParaRPr dirty="0"/>
           </a:p>
         </p:txBody>
       </p:sp>
@@ -5082,7 +5908,7 @@
           <a:p>
             <a:fld id="{C1FF6DA9-008F-8B48-92A6-B652298478BF}" type="slidenum">
               <a:rPr lang="en-US" smtClean="0"/>
-              <a:t>‹#›</a:t>
+              <a:t>2</a:t>
             </a:fld>
             <a:endParaRPr lang="en-US"/>
           </a:p>
@@ -5130,7 +5956,7 @@
 </file>
 
 <file path=ppt/slides/slide20.xml><?xml version="1.0" encoding="utf-8"?>
-<p:sld xmlns:a="http://schemas.openxmlformats.org/drawingml/2006/main" xmlns:p="http://schemas.openxmlformats.org/presentationml/2006/main" xmlns:r="http://schemas.openxmlformats.org/officeDocument/2006/relationships">
+<p:sld xmlns:a="http://schemas.openxmlformats.org/drawingml/2006/main" xmlns:r="http://schemas.openxmlformats.org/officeDocument/2006/relationships" xmlns:p="http://schemas.openxmlformats.org/presentationml/2006/main">
   <p:cSld name="md:정리#1|43b60453e5">
     <p:spTree>
       <p:nvGrpSpPr>
@@ -5138,7 +5964,14 @@
         <p:cNvGrpSpPr/>
         <p:nvPr/>
       </p:nvGrpSpPr>
-      <p:grpSpPr/>
+      <p:grpSpPr>
+        <a:xfrm>
+          <a:off x="0" y="0"/>
+          <a:ext cx="0" cy="0"/>
+          <a:chOff x="0" y="0"/>
+          <a:chExt cx="0" cy="0"/>
+        </a:xfrm>
+      </p:grpSpPr>
       <p:sp>
         <p:nvSpPr>
           <p:cNvPr id="2" name="Title 1"/>
@@ -5175,37 +6008,31 @@
           <a:bodyPr/>
           <a:lstStyle/>
           <a:p>
-            <a:pPr/>
             <a:r>
               <a:t>시뮬레이터는 같은 하루를 조건만 바꿔 여러 번 돌려 보는 장치입니다.</a:t>
             </a:r>
           </a:p>
           <a:p>
-            <a:pPr/>
             <a:r>
               <a:t>VISSIM·SUMO는 차로 단위 해상도를 위해 만들어졌고, 우리가 필요한 것은 도시 단위 범위입니다.</a:t>
             </a:r>
           </a:p>
           <a:p>
-            <a:pPr/>
             <a:r>
               <a:t>평균만 보면 41분 기다린 승객이 보이지 않습니다. 분포를 함께 봐야 합니다.</a:t>
             </a:r>
           </a:p>
           <a:p>
-            <a:pPr/>
             <a:r>
               <a:t>하남시 80대 시나리오에서 승객을 태운 차는 평균 9.9대, 빈 차는 31.3대였습니다.</a:t>
             </a:r>
           </a:p>
           <a:p>
-            <a:pPr/>
             <a:r>
               <a:t>시뮬레이터 그림의 각 상자가 2장부터 12장까지에 하나씩 대응합니다.</a:t>
             </a:r>
           </a:p>
           <a:p>
-            <a:pPr/>
             <a:r>
               <a:t>2장에서는 첫 번째 상자인 도로망 데이터를 직접 열어 봅니다.</a:t>
             </a:r>
@@ -5260,7 +6087,7 @@
           <a:p>
             <a:fld id="{C1FF6DA9-008F-8B48-92A6-B652298478BF}" type="slidenum">
               <a:rPr lang="en-US" smtClean="0"/>
-              <a:t>‹#›</a:t>
+              <a:t>20</a:t>
             </a:fld>
             <a:endParaRPr lang="en-US"/>
           </a:p>
@@ -5308,7 +6135,7 @@
 </file>
 
 <file path=ppt/slides/slide21.xml><?xml version="1.0" encoding="utf-8"?>
-<p:sld xmlns:a="http://schemas.openxmlformats.org/drawingml/2006/main" xmlns:p="http://schemas.openxmlformats.org/presentationml/2006/main" xmlns:r="http://schemas.openxmlformats.org/officeDocument/2006/relationships">
+<p:sld xmlns:a="http://schemas.openxmlformats.org/drawingml/2006/main" xmlns:r="http://schemas.openxmlformats.org/officeDocument/2006/relationships" xmlns:p="http://schemas.openxmlformats.org/presentationml/2006/main">
   <p:cSld name="md:연습문제#1|30b27075e5">
     <p:spTree>
       <p:nvGrpSpPr>
@@ -5316,7 +6143,14 @@
         <p:cNvGrpSpPr/>
         <p:nvPr/>
       </p:nvGrpSpPr>
-      <p:grpSpPr/>
+      <p:grpSpPr>
+        <a:xfrm>
+          <a:off x="0" y="0"/>
+          <a:ext cx="0" cy="0"/>
+          <a:chOff x="0" y="0"/>
+          <a:chExt cx="0" cy="0"/>
+        </a:xfrm>
+      </p:grpSpPr>
       <p:sp>
         <p:nvSpPr>
           <p:cNvPr id="2" name="Title 1"/>
@@ -5353,45 +6187,490 @@
           <a:bodyPr/>
           <a:lstStyle/>
           <a:p>
-            <a:pPr/>
-            <a:r>
-              <a:rPr b="1"/>
-              <a:t>연습 1.1 ★</a:t>
-            </a:r>
-            <a:r>
+            <a:r>
+              <a:rPr b="1" dirty="0" err="1"/>
+              <a:t>연습</a:t>
+            </a:r>
+            <a:r>
+              <a:rPr b="1" dirty="0"/>
+              <a:t> 1.1 ★</a:t>
+            </a:r>
+            <a:r>
+              <a:rPr dirty="0"/>
               <a:t> — </a:t>
             </a:r>
             <a:r>
-              <a:rPr>
+              <a:rPr dirty="0" err="1">
                 <a:latin typeface="Consolas"/>
               </a:rPr>
               <a:t>sim.passengers</a:t>
             </a:r>
             <a:r>
-              <a:t>에서 10분 넘게 기다린 승객을 골라, 호출 시각 분포를 그려 봅니다. 특정 시간대에 몰려 있나요, 저녁 내내 흩어져 있나요?</a:t>
+              <a:rPr dirty="0" err="1"/>
+              <a:t>에서</a:t>
+            </a:r>
+            <a:r>
+              <a:rPr dirty="0"/>
+              <a:t> 10분 </a:t>
+            </a:r>
+            <a:r>
+              <a:rPr dirty="0" err="1"/>
+              <a:t>넘게</a:t>
+            </a:r>
+            <a:r>
+              <a:rPr dirty="0"/>
+              <a:t> </a:t>
+            </a:r>
+            <a:r>
+              <a:rPr dirty="0" err="1"/>
+              <a:t>기다린</a:t>
+            </a:r>
+            <a:r>
+              <a:rPr dirty="0"/>
+              <a:t> </a:t>
+            </a:r>
+            <a:r>
+              <a:rPr dirty="0" err="1"/>
+              <a:t>승객을</a:t>
+            </a:r>
+            <a:r>
+              <a:rPr dirty="0"/>
+              <a:t> </a:t>
+            </a:r>
+            <a:r>
+              <a:rPr dirty="0" err="1"/>
+              <a:t>골라</a:t>
+            </a:r>
+            <a:r>
+              <a:rPr dirty="0"/>
+              <a:t>, </a:t>
+            </a:r>
+            <a:r>
+              <a:rPr dirty="0" err="1"/>
+              <a:t>호출</a:t>
+            </a:r>
+            <a:r>
+              <a:rPr dirty="0"/>
+              <a:t> </a:t>
+            </a:r>
+            <a:r>
+              <a:rPr dirty="0" err="1"/>
+              <a:t>시각</a:t>
+            </a:r>
+            <a:r>
+              <a:rPr dirty="0"/>
+              <a:t> </a:t>
+            </a:r>
+            <a:r>
+              <a:rPr dirty="0" err="1"/>
+              <a:t>분포를</a:t>
+            </a:r>
+            <a:r>
+              <a:rPr dirty="0"/>
+              <a:t> </a:t>
+            </a:r>
+            <a:r>
+              <a:rPr dirty="0" err="1"/>
+              <a:t>그려</a:t>
+            </a:r>
+            <a:r>
+              <a:rPr dirty="0"/>
+              <a:t> </a:t>
+            </a:r>
+            <a:r>
+              <a:rPr dirty="0" err="1"/>
+              <a:t>봅니다</a:t>
+            </a:r>
+            <a:r>
+              <a:rPr dirty="0"/>
+              <a:t>. </a:t>
+            </a:r>
+            <a:r>
+              <a:rPr dirty="0" err="1"/>
+              <a:t>특정</a:t>
+            </a:r>
+            <a:r>
+              <a:rPr dirty="0"/>
+              <a:t> </a:t>
+            </a:r>
+            <a:r>
+              <a:rPr dirty="0" err="1"/>
+              <a:t>시간대에</a:t>
+            </a:r>
+            <a:r>
+              <a:rPr dirty="0"/>
+              <a:t> </a:t>
+            </a:r>
+            <a:r>
+              <a:rPr dirty="0" err="1"/>
+              <a:t>몰려</a:t>
+            </a:r>
+            <a:r>
+              <a:rPr dirty="0"/>
+              <a:t> </a:t>
+            </a:r>
+            <a:r>
+              <a:rPr dirty="0" err="1"/>
+              <a:t>있나요</a:t>
+            </a:r>
+            <a:r>
+              <a:rPr dirty="0"/>
+              <a:t>, </a:t>
+            </a:r>
+            <a:r>
+              <a:rPr dirty="0" err="1"/>
+              <a:t>저녁</a:t>
+            </a:r>
+            <a:r>
+              <a:rPr dirty="0"/>
+              <a:t> </a:t>
+            </a:r>
+            <a:r>
+              <a:rPr dirty="0" err="1"/>
+              <a:t>내내</a:t>
+            </a:r>
+            <a:r>
+              <a:rPr dirty="0"/>
+              <a:t> </a:t>
+            </a:r>
+            <a:r>
+              <a:rPr dirty="0" err="1"/>
+              <a:t>흩어져</a:t>
+            </a:r>
+            <a:r>
+              <a:rPr dirty="0"/>
+              <a:t> </a:t>
+            </a:r>
+            <a:r>
+              <a:rPr dirty="0" err="1"/>
+              <a:t>있나요</a:t>
+            </a:r>
+            <a:r>
+              <a:rPr dirty="0"/>
+              <a:t>?</a:t>
             </a:r>
           </a:p>
           <a:p>
             <a:pPr lvl="1"/>
             <a:r>
-              <a:t>산출물: 히스토그램 1장, 그것을 읽은 문장 2~3줄</a:t>
-            </a:r>
-          </a:p>
-          <a:p>
-            <a:pPr/>
-            <a:r>
-              <a:rPr b="1"/>
-              <a:t>연습 1.2 ★★</a:t>
-            </a:r>
-            <a:r>
-              <a:t> — 승객·운영자·도시 관점에서 각각 하나씩, 하남시 심야 버스를 평가할 지표를 정합니다. 각 지표에 대해 (a) 어떤 데이터로 계산하는지, (b) 값이 커지면 좋은지 작아지면 좋은지, (c) 다른 두 지표와 어떻게 부딪히는지를 씁니다.</a:t>
-            </a:r>
+              <a:rPr dirty="0" err="1"/>
+              <a:t>산출물</a:t>
+            </a:r>
+            <a:r>
+              <a:rPr dirty="0"/>
+              <a:t>: </a:t>
+            </a:r>
+            <a:r>
+              <a:rPr dirty="0" err="1"/>
+              <a:t>히스토그램</a:t>
+            </a:r>
+            <a:r>
+              <a:rPr dirty="0"/>
+              <a:t> 1장, </a:t>
+            </a:r>
+            <a:r>
+              <a:rPr dirty="0" err="1"/>
+              <a:t>그것을</a:t>
+            </a:r>
+            <a:r>
+              <a:rPr dirty="0"/>
+              <a:t> </a:t>
+            </a:r>
+            <a:r>
+              <a:rPr dirty="0" err="1"/>
+              <a:t>읽은</a:t>
+            </a:r>
+            <a:r>
+              <a:rPr dirty="0"/>
+              <a:t> </a:t>
+            </a:r>
+            <a:r>
+              <a:rPr dirty="0" err="1"/>
+              <a:t>문장</a:t>
+            </a:r>
+            <a:r>
+              <a:rPr dirty="0"/>
+              <a:t> 2~3줄</a:t>
+            </a:r>
+            <a:endParaRPr lang="en-US" dirty="0"/>
           </a:p>
           <a:p>
             <a:pPr lvl="1"/>
-            <a:r>
-              <a:t>산출물: 지표 3개, 각각 세 문장</a:t>
-            </a:r>
+            <a:endParaRPr dirty="0"/>
+          </a:p>
+          <a:p>
+            <a:r>
+              <a:rPr b="1" dirty="0" err="1"/>
+              <a:t>연습</a:t>
+            </a:r>
+            <a:r>
+              <a:rPr b="1" dirty="0"/>
+              <a:t> 1.2 ★★</a:t>
+            </a:r>
+            <a:r>
+              <a:rPr dirty="0"/>
+              <a:t> — </a:t>
+            </a:r>
+            <a:r>
+              <a:rPr dirty="0" err="1"/>
+              <a:t>승객·운영자·도시</a:t>
+            </a:r>
+            <a:r>
+              <a:rPr dirty="0"/>
+              <a:t> </a:t>
+            </a:r>
+            <a:r>
+              <a:rPr dirty="0" err="1"/>
+              <a:t>관점에서</a:t>
+            </a:r>
+            <a:r>
+              <a:rPr dirty="0"/>
+              <a:t> </a:t>
+            </a:r>
+            <a:r>
+              <a:rPr dirty="0" err="1"/>
+              <a:t>각각</a:t>
+            </a:r>
+            <a:r>
+              <a:rPr dirty="0"/>
+              <a:t> </a:t>
+            </a:r>
+            <a:r>
+              <a:rPr dirty="0" err="1"/>
+              <a:t>하나씩</a:t>
+            </a:r>
+            <a:r>
+              <a:rPr dirty="0"/>
+              <a:t>, </a:t>
+            </a:r>
+            <a:r>
+              <a:rPr dirty="0" err="1"/>
+              <a:t>하남시</a:t>
+            </a:r>
+            <a:r>
+              <a:rPr dirty="0"/>
+              <a:t> </a:t>
+            </a:r>
+            <a:r>
+              <a:rPr dirty="0" err="1"/>
+              <a:t>심야</a:t>
+            </a:r>
+            <a:r>
+              <a:rPr dirty="0"/>
+              <a:t> </a:t>
+            </a:r>
+            <a:r>
+              <a:rPr dirty="0" err="1"/>
+              <a:t>버스를</a:t>
+            </a:r>
+            <a:r>
+              <a:rPr dirty="0"/>
+              <a:t> </a:t>
+            </a:r>
+            <a:r>
+              <a:rPr dirty="0" err="1"/>
+              <a:t>평가할</a:t>
+            </a:r>
+            <a:r>
+              <a:rPr dirty="0"/>
+              <a:t> </a:t>
+            </a:r>
+            <a:r>
+              <a:rPr dirty="0" err="1"/>
+              <a:t>지표를</a:t>
+            </a:r>
+            <a:r>
+              <a:rPr dirty="0"/>
+              <a:t> </a:t>
+            </a:r>
+            <a:r>
+              <a:rPr dirty="0" err="1"/>
+              <a:t>정합니다</a:t>
+            </a:r>
+            <a:r>
+              <a:rPr dirty="0"/>
+              <a:t>. </a:t>
+            </a:r>
+            <a:r>
+              <a:rPr dirty="0" err="1"/>
+              <a:t>각</a:t>
+            </a:r>
+            <a:r>
+              <a:rPr dirty="0"/>
+              <a:t> </a:t>
+            </a:r>
+            <a:r>
+              <a:rPr dirty="0" err="1"/>
+              <a:t>지표에</a:t>
+            </a:r>
+            <a:r>
+              <a:rPr dirty="0"/>
+              <a:t> </a:t>
+            </a:r>
+            <a:r>
+              <a:rPr dirty="0" err="1"/>
+              <a:t>대해</a:t>
+            </a:r>
+            <a:r>
+              <a:rPr dirty="0"/>
+              <a:t> (a) </a:t>
+            </a:r>
+            <a:r>
+              <a:rPr dirty="0" err="1"/>
+              <a:t>어떤</a:t>
+            </a:r>
+            <a:r>
+              <a:rPr dirty="0"/>
+              <a:t> </a:t>
+            </a:r>
+            <a:r>
+              <a:rPr dirty="0" err="1"/>
+              <a:t>데이터로</a:t>
+            </a:r>
+            <a:r>
+              <a:rPr dirty="0"/>
+              <a:t> </a:t>
+            </a:r>
+            <a:r>
+              <a:rPr dirty="0" err="1"/>
+              <a:t>계산하는지</a:t>
+            </a:r>
+            <a:r>
+              <a:rPr dirty="0"/>
+              <a:t>, (b) </a:t>
+            </a:r>
+            <a:r>
+              <a:rPr dirty="0" err="1"/>
+              <a:t>값이</a:t>
+            </a:r>
+            <a:r>
+              <a:rPr dirty="0"/>
+              <a:t> </a:t>
+            </a:r>
+            <a:r>
+              <a:rPr dirty="0" err="1"/>
+              <a:t>커지면</a:t>
+            </a:r>
+            <a:r>
+              <a:rPr dirty="0"/>
+              <a:t> </a:t>
+            </a:r>
+            <a:r>
+              <a:rPr dirty="0" err="1"/>
+              <a:t>좋은지</a:t>
+            </a:r>
+            <a:r>
+              <a:rPr dirty="0"/>
+              <a:t> </a:t>
+            </a:r>
+            <a:r>
+              <a:rPr dirty="0" err="1"/>
+              <a:t>작아지면</a:t>
+            </a:r>
+            <a:r>
+              <a:rPr dirty="0"/>
+              <a:t> </a:t>
+            </a:r>
+            <a:r>
+              <a:rPr dirty="0" err="1"/>
+              <a:t>좋은지</a:t>
+            </a:r>
+            <a:r>
+              <a:rPr dirty="0"/>
+              <a:t>, (c) </a:t>
+            </a:r>
+            <a:r>
+              <a:rPr dirty="0" err="1"/>
+              <a:t>다른</a:t>
+            </a:r>
+            <a:r>
+              <a:rPr dirty="0"/>
+              <a:t> </a:t>
+            </a:r>
+            <a:r>
+              <a:rPr dirty="0" err="1"/>
+              <a:t>두</a:t>
+            </a:r>
+            <a:r>
+              <a:rPr dirty="0"/>
+              <a:t> </a:t>
+            </a:r>
+            <a:r>
+              <a:rPr dirty="0" err="1"/>
+              <a:t>지표와</a:t>
+            </a:r>
+            <a:r>
+              <a:rPr dirty="0"/>
+              <a:t> </a:t>
+            </a:r>
+            <a:r>
+              <a:rPr dirty="0" err="1"/>
+              <a:t>어떻게</a:t>
+            </a:r>
+            <a:r>
+              <a:rPr dirty="0"/>
+              <a:t> </a:t>
+            </a:r>
+            <a:r>
+              <a:rPr dirty="0" err="1"/>
+              <a:t>부딪히는지를</a:t>
+            </a:r>
+            <a:r>
+              <a:rPr dirty="0"/>
+              <a:t> </a:t>
+            </a:r>
+            <a:r>
+              <a:rPr dirty="0" err="1"/>
+              <a:t>씁니다</a:t>
+            </a:r>
+            <a:r>
+              <a:rPr dirty="0"/>
+              <a:t>.</a:t>
+            </a:r>
+            <a:endParaRPr lang="en-US" dirty="0"/>
+          </a:p>
+          <a:p>
+            <a:endParaRPr dirty="0"/>
+          </a:p>
+          <a:p>
+            <a:pPr lvl="1"/>
+            <a:r>
+              <a:rPr dirty="0" err="1"/>
+              <a:t>산출물</a:t>
+            </a:r>
+            <a:r>
+              <a:rPr dirty="0"/>
+              <a:t>: </a:t>
+            </a:r>
+            <a:r>
+              <a:rPr dirty="0" err="1"/>
+              <a:t>지표</a:t>
+            </a:r>
+            <a:r>
+              <a:rPr dirty="0"/>
+              <a:t> 3개, </a:t>
+            </a:r>
+            <a:r>
+              <a:rPr dirty="0" err="1"/>
+              <a:t>각각</a:t>
+            </a:r>
+            <a:r>
+              <a:rPr dirty="0"/>
+              <a:t> </a:t>
+            </a:r>
+            <a:r>
+              <a:rPr dirty="0" err="1"/>
+              <a:t>세</a:t>
+            </a:r>
+            <a:r>
+              <a:rPr dirty="0"/>
+              <a:t> </a:t>
+            </a:r>
+            <a:r>
+              <a:rPr dirty="0" err="1"/>
+              <a:t>문장</a:t>
+            </a:r>
+            <a:endParaRPr dirty="0"/>
           </a:p>
         </p:txBody>
       </p:sp>
@@ -5443,7 +6722,7 @@
           <a:p>
             <a:fld id="{C1FF6DA9-008F-8B48-92A6-B652298478BF}" type="slidenum">
               <a:rPr lang="en-US" smtClean="0"/>
-              <a:t>‹#›</a:t>
+              <a:t>21</a:t>
             </a:fld>
             <a:endParaRPr lang="en-US"/>
           </a:p>
@@ -5491,7 +6770,7 @@
 </file>
 
 <file path=ppt/slides/slide22.xml><?xml version="1.0" encoding="utf-8"?>
-<p:sld xmlns:a="http://schemas.openxmlformats.org/drawingml/2006/main" xmlns:p="http://schemas.openxmlformats.org/presentationml/2006/main" xmlns:r="http://schemas.openxmlformats.org/officeDocument/2006/relationships">
+<p:sld xmlns:a="http://schemas.openxmlformats.org/drawingml/2006/main" xmlns:r="http://schemas.openxmlformats.org/officeDocument/2006/relationships" xmlns:p="http://schemas.openxmlformats.org/presentationml/2006/main">
   <p:cSld name="md:수요일-준비물#1|1140c5feec">
     <p:spTree>
       <p:nvGrpSpPr>
@@ -5499,7 +6778,14 @@
         <p:cNvGrpSpPr/>
         <p:nvPr/>
       </p:nvGrpSpPr>
-      <p:grpSpPr/>
+      <p:grpSpPr>
+        <a:xfrm>
+          <a:off x="0" y="0"/>
+          <a:ext cx="0" cy="0"/>
+          <a:chOff x="0" y="0"/>
+          <a:chExt cx="0" cy="0"/>
+        </a:xfrm>
+      </p:grpSpPr>
       <p:sp>
         <p:nvSpPr>
           <p:cNvPr id="2" name="Title 1"/>
@@ -5541,7 +6827,16 @@
               <a:buAutoNum type="arabicPeriod"/>
             </a:pPr>
             <a:r>
-              <a:t>Python 3.11을 설치합니다.</a:t>
+              <a:rPr dirty="0"/>
+              <a:t>Python 3.11을 </a:t>
+            </a:r>
+            <a:r>
+              <a:rPr dirty="0" err="1"/>
+              <a:t>설치합니다</a:t>
+            </a:r>
+            <a:r>
+              <a:rPr dirty="0"/>
+              <a:t>.</a:t>
             </a:r>
           </a:p>
           <a:p>
@@ -5550,16 +6845,56 @@
               <a:buAutoNum type="arabicPeriod"/>
             </a:pPr>
             <a:r>
-              <a:t>교재 저장소를 받고 </a:t>
-            </a:r>
-            <a:r>
-              <a:rPr>
+              <a:rPr dirty="0" err="1"/>
+              <a:t>교재</a:t>
+            </a:r>
+            <a:r>
+              <a:rPr dirty="0"/>
+              <a:t> </a:t>
+            </a:r>
+            <a:r>
+              <a:rPr dirty="0" err="1"/>
+              <a:t>저장소를</a:t>
+            </a:r>
+            <a:r>
+              <a:rPr dirty="0"/>
+              <a:t> </a:t>
+            </a:r>
+            <a:r>
+              <a:rPr dirty="0" err="1"/>
+              <a:t>받고</a:t>
+            </a:r>
+            <a:r>
+              <a:rPr dirty="0"/>
+              <a:t> </a:t>
+            </a:r>
+            <a:r>
+              <a:rPr dirty="0">
                 <a:latin typeface="Consolas"/>
               </a:rPr>
-              <a:t>pip install -r requirements.txt</a:t>
-            </a:r>
-            <a:r>
-              <a:t>를 실행합니다.</a:t>
+              <a:t>pip install -r </a:t>
+            </a:r>
+            <a:r>
+              <a:rPr dirty="0" err="1">
+                <a:latin typeface="Consolas"/>
+              </a:rPr>
+              <a:t>requirements.txt</a:t>
+            </a:r>
+            <a:r>
+              <a:rPr dirty="0" err="1"/>
+              <a:t>를</a:t>
+            </a:r>
+            <a:r>
+              <a:rPr dirty="0"/>
+              <a:t> </a:t>
+            </a:r>
+            <a:r>
+              <a:rPr dirty="0" err="1"/>
+              <a:t>실행합니다</a:t>
+            </a:r>
+            <a:r>
+              <a:rPr dirty="0"/>
+              <a:t>.</a:t>
             </a:r>
           </a:p>
           <a:p>
@@ -5568,33 +6903,213 @@
               <a:buAutoNum type="arabicPeriod"/>
             </a:pPr>
             <a:r>
-              <a:rPr>
+              <a:rPr dirty="0">
                 <a:latin typeface="Consolas"/>
               </a:rPr>
-              <a:t>from smartmob import Dtumos</a:t>
-            </a:r>
-            <a:r>
-              <a:t>가 오류 없이 되는지 확인합니다.</a:t>
-            </a:r>
-          </a:p>
-          <a:p>
-            <a:pPr/>
-            <a:r>
-              <a:t>더 읽을거리: Lopez et al. (2018) </a:t>
-            </a:r>
-            <a:r>
-              <a:rPr i="1"/>
+              <a:t>from </a:t>
+            </a:r>
+            <a:r>
+              <a:rPr dirty="0" err="1">
+                <a:latin typeface="Consolas"/>
+              </a:rPr>
+              <a:t>smartmob</a:t>
+            </a:r>
+            <a:r>
+              <a:rPr dirty="0">
+                <a:latin typeface="Consolas"/>
+              </a:rPr>
+              <a:t> import </a:t>
+            </a:r>
+            <a:r>
+              <a:rPr dirty="0" err="1">
+                <a:latin typeface="Consolas"/>
+              </a:rPr>
+              <a:t>Dtumos</a:t>
+            </a:r>
+            <a:r>
+              <a:rPr dirty="0" err="1"/>
+              <a:t>가</a:t>
+            </a:r>
+            <a:r>
+              <a:rPr dirty="0"/>
+              <a:t> </a:t>
+            </a:r>
+            <a:r>
+              <a:rPr dirty="0" err="1"/>
+              <a:t>오류</a:t>
+            </a:r>
+            <a:r>
+              <a:rPr dirty="0"/>
+              <a:t> </a:t>
+            </a:r>
+            <a:r>
+              <a:rPr dirty="0" err="1"/>
+              <a:t>없이</a:t>
+            </a:r>
+            <a:r>
+              <a:rPr dirty="0"/>
+              <a:t> </a:t>
+            </a:r>
+            <a:r>
+              <a:rPr dirty="0" err="1"/>
+              <a:t>되는지</a:t>
+            </a:r>
+            <a:r>
+              <a:rPr dirty="0"/>
+              <a:t> </a:t>
+            </a:r>
+            <a:r>
+              <a:rPr dirty="0" err="1"/>
+              <a:t>확인합니다</a:t>
+            </a:r>
+            <a:r>
+              <a:rPr dirty="0"/>
+              <a:t>.</a:t>
+            </a:r>
+            <a:endParaRPr lang="en-US" dirty="0"/>
+          </a:p>
+          <a:p>
+            <a:endParaRPr dirty="0"/>
+          </a:p>
+          <a:p>
+            <a:r>
+              <a:rPr dirty="0" err="1"/>
+              <a:t>더</a:t>
+            </a:r>
+            <a:r>
+              <a:rPr dirty="0"/>
+              <a:t> </a:t>
+            </a:r>
+            <a:r>
+              <a:rPr dirty="0" err="1"/>
+              <a:t>읽을거리</a:t>
+            </a:r>
+            <a:r>
+              <a:rPr dirty="0"/>
+              <a:t>: Lopez et al. (2018) </a:t>
+            </a:r>
+            <a:r>
+              <a:rPr i="1" dirty="0"/>
               <a:t>Microscopic Traffic Simulation using SUMO</a:t>
             </a:r>
             <a:r>
-              <a:t> — TraCI 부분만 읽어도 충분합니다. Horni, Nagel &amp; Axhausen (2016) </a:t>
-            </a:r>
-            <a:r>
-              <a:rPr i="1"/>
+              <a:rPr dirty="0"/>
+              <a:t> — </a:t>
+            </a:r>
+            <a:r>
+              <a:rPr dirty="0" err="1"/>
+              <a:t>TraCI</a:t>
+            </a:r>
+            <a:r>
+              <a:rPr dirty="0"/>
+              <a:t> </a:t>
+            </a:r>
+            <a:r>
+              <a:rPr dirty="0" err="1"/>
+              <a:t>부분만</a:t>
+            </a:r>
+            <a:r>
+              <a:rPr dirty="0"/>
+              <a:t> </a:t>
+            </a:r>
+            <a:r>
+              <a:rPr dirty="0" err="1"/>
+              <a:t>읽어도</a:t>
+            </a:r>
+            <a:r>
+              <a:rPr dirty="0"/>
+              <a:t> </a:t>
+            </a:r>
+            <a:r>
+              <a:rPr dirty="0" err="1"/>
+              <a:t>충분합니다</a:t>
+            </a:r>
+            <a:r>
+              <a:rPr dirty="0"/>
+              <a:t>. </a:t>
+            </a:r>
+            <a:endParaRPr lang="en-US" dirty="0"/>
+          </a:p>
+          <a:p>
+            <a:r>
+              <a:rPr dirty="0" err="1"/>
+              <a:t>Horni</a:t>
+            </a:r>
+            <a:r>
+              <a:rPr dirty="0"/>
+              <a:t>, Nagel &amp; </a:t>
+            </a:r>
+            <a:r>
+              <a:rPr dirty="0" err="1"/>
+              <a:t>Axhausen</a:t>
+            </a:r>
+            <a:r>
+              <a:rPr dirty="0"/>
+              <a:t> (2016) </a:t>
+            </a:r>
+            <a:r>
+              <a:rPr i="1" dirty="0" err="1"/>
               <a:t>MATSim</a:t>
             </a:r>
             <a:r>
-              <a:t> — 도시 전체를 에이전트 기반으로 돌리는 다른 접근입니다.</a:t>
+              <a:rPr dirty="0"/>
+              <a:t> — </a:t>
+            </a:r>
+            <a:r>
+              <a:rPr dirty="0" err="1"/>
+              <a:t>도시</a:t>
+            </a:r>
+            <a:r>
+              <a:rPr dirty="0"/>
+              <a:t> </a:t>
+            </a:r>
+            <a:r>
+              <a:rPr dirty="0" err="1"/>
+              <a:t>전체를</a:t>
+            </a:r>
+            <a:r>
+              <a:rPr dirty="0"/>
+              <a:t> </a:t>
+            </a:r>
+            <a:r>
+              <a:rPr dirty="0" err="1"/>
+              <a:t>에이전트</a:t>
+            </a:r>
+            <a:r>
+              <a:rPr dirty="0"/>
+              <a:t> </a:t>
+            </a:r>
+            <a:r>
+              <a:rPr dirty="0" err="1"/>
+              <a:t>기반으로</a:t>
+            </a:r>
+            <a:r>
+              <a:rPr dirty="0"/>
+              <a:t> </a:t>
+            </a:r>
+            <a:r>
+              <a:rPr dirty="0" err="1"/>
+              <a:t>돌리는</a:t>
+            </a:r>
+            <a:r>
+              <a:rPr dirty="0"/>
+              <a:t> </a:t>
+            </a:r>
+            <a:r>
+              <a:rPr dirty="0" err="1"/>
+              <a:t>다른</a:t>
+            </a:r>
+            <a:r>
+              <a:rPr dirty="0"/>
+              <a:t> </a:t>
+            </a:r>
+            <a:r>
+              <a:rPr dirty="0" err="1"/>
+              <a:t>접근입니다</a:t>
+            </a:r>
+            <a:r>
+              <a:rPr dirty="0"/>
+              <a:t>.</a:t>
             </a:r>
           </a:p>
         </p:txBody>
@@ -5647,7 +7162,7 @@
           <a:p>
             <a:fld id="{C1FF6DA9-008F-8B48-92A6-B652298478BF}" type="slidenum">
               <a:rPr lang="en-US" smtClean="0"/>
-              <a:t>‹#›</a:t>
+              <a:t>22</a:t>
             </a:fld>
             <a:endParaRPr lang="en-US"/>
           </a:p>
@@ -5695,7 +7210,7 @@
 </file>
 
 <file path=ppt/slides/slide23.xml><?xml version="1.0" encoding="utf-8"?>
-<p:sld xmlns:a="http://schemas.openxmlformats.org/drawingml/2006/main" xmlns:p="http://schemas.openxmlformats.org/presentationml/2006/main" xmlns:r="http://schemas.openxmlformats.org/officeDocument/2006/relationships">
+<p:sld xmlns:a="http://schemas.openxmlformats.org/drawingml/2006/main" xmlns:r="http://schemas.openxmlformats.org/officeDocument/2006/relationships" xmlns:p="http://schemas.openxmlformats.org/presentationml/2006/main">
   <p:cSld name="md:오늘-할-일#1|1c1c2b6fbb">
     <p:spTree>
       <p:nvGrpSpPr>
@@ -5703,7 +7218,14 @@
         <p:cNvGrpSpPr/>
         <p:nvPr/>
       </p:nvGrpSpPr>
-      <p:grpSpPr/>
+      <p:grpSpPr>
+        <a:xfrm>
+          <a:off x="0" y="0"/>
+          <a:ext cx="0" cy="0"/>
+          <a:chOff x="0" y="0"/>
+          <a:chExt cx="0" cy="0"/>
+        </a:xfrm>
+      </p:grpSpPr>
       <p:sp>
         <p:nvSpPr>
           <p:cNvPr id="2" name="Title 1"/>
@@ -5740,25 +7262,21 @@
           <a:bodyPr/>
           <a:lstStyle/>
           <a:p>
-            <a:pPr/>
             <a:r>
               <a:t>이 책의 코드는 전부 실행됩니다. 화면에 보이는 숫자와 그림은 여러분의 노트북에서도 똑같이 나와야 합니다.</a:t>
             </a:r>
           </a:p>
           <a:p>
-            <a:pPr/>
             <a:r>
               <a:t>그러려면 세 가지가 필요합니다. 파이썬 환경, 실습 데이터, 시뮬레이션 엔진입니다.</a:t>
             </a:r>
           </a:p>
           <a:p>
-            <a:pPr/>
             <a:r>
               <a:t>셋을 준비하고, 마지막에 하남시 택시 시뮬레이션을 한 번 돌립니다.</a:t>
             </a:r>
           </a:p>
           <a:p>
-            <a:pPr/>
             <a:r>
               <a:t>실습이 끝나면 </a:t>
             </a:r>
@@ -5822,7 +7340,7 @@
           <a:p>
             <a:fld id="{C1FF6DA9-008F-8B48-92A6-B652298478BF}" type="slidenum">
               <a:rPr lang="en-US" smtClean="0"/>
-              <a:t>‹#›</a:t>
+              <a:t>23</a:t>
             </a:fld>
             <a:endParaRPr lang="en-US"/>
           </a:p>
@@ -5870,7 +7388,7 @@
 </file>
 
 <file path=ppt/slides/slide24.xml><?xml version="1.0" encoding="utf-8"?>
-<p:sld xmlns:a="http://schemas.openxmlformats.org/drawingml/2006/main" xmlns:p="http://schemas.openxmlformats.org/presentationml/2006/main" xmlns:r="http://schemas.openxmlformats.org/officeDocument/2006/relationships">
+<p:sld xmlns:a="http://schemas.openxmlformats.org/drawingml/2006/main" xmlns:r="http://schemas.openxmlformats.org/officeDocument/2006/relationships" xmlns:p="http://schemas.openxmlformats.org/presentationml/2006/main">
   <p:cSld name="md:0.1#1|cf816f39f7">
     <p:spTree>
       <p:nvGrpSpPr>
@@ -5878,7 +7396,14 @@
         <p:cNvGrpSpPr/>
         <p:nvPr/>
       </p:nvGrpSpPr>
-      <p:grpSpPr/>
+      <p:grpSpPr>
+        <a:xfrm>
+          <a:off x="0" y="0"/>
+          <a:ext cx="0" cy="0"/>
+          <a:chOff x="0" y="0"/>
+          <a:chExt cx="0" cy="0"/>
+        </a:xfrm>
+      </p:grpSpPr>
       <p:sp>
         <p:nvSpPr>
           <p:cNvPr id="2" name="Title 1"/>
@@ -5948,7 +7473,7 @@
           <a:p>
             <a:fld id="{C1FF6DA9-008F-8B48-92A6-B652298478BF}" type="slidenum">
               <a:rPr lang="en-US" smtClean="0"/>
-              <a:t>‹#›</a:t>
+              <a:t>24</a:t>
             </a:fld>
             <a:endParaRPr lang="en-US"/>
           </a:p>
@@ -6063,7 +7588,7 @@
           </a:fontRef>
         </p:style>
         <p:txBody>
-          <a:bodyPr rtlCol="0" anchor="t" wrap="square" lIns="182880" rIns="182880" tIns="137160" bIns="137160"/>
+          <a:bodyPr wrap="square" lIns="182880" tIns="137160" rIns="182880" bIns="137160" rtlCol="0" anchor="t"/>
           <a:lstStyle/>
           <a:p>
             <a:pPr algn="l"/>
@@ -6229,7 +7754,7 @@
 </file>
 
 <file path=ppt/slides/slide25.xml><?xml version="1.0" encoding="utf-8"?>
-<p:sld xmlns:a="http://schemas.openxmlformats.org/drawingml/2006/main" xmlns:p="http://schemas.openxmlformats.org/presentationml/2006/main" xmlns:r="http://schemas.openxmlformats.org/officeDocument/2006/relationships">
+<p:sld xmlns:a="http://schemas.openxmlformats.org/drawingml/2006/main" xmlns:r="http://schemas.openxmlformats.org/officeDocument/2006/relationships" xmlns:p="http://schemas.openxmlformats.org/presentationml/2006/main">
   <p:cSld name="md:0.2#1|21428771fa">
     <p:spTree>
       <p:nvGrpSpPr>
@@ -6237,7 +7762,14 @@
         <p:cNvGrpSpPr/>
         <p:nvPr/>
       </p:nvGrpSpPr>
-      <p:grpSpPr/>
+      <p:grpSpPr>
+        <a:xfrm>
+          <a:off x="0" y="0"/>
+          <a:ext cx="0" cy="0"/>
+          <a:chOff x="0" y="0"/>
+          <a:chExt cx="0" cy="0"/>
+        </a:xfrm>
+      </p:grpSpPr>
       <p:sp>
         <p:nvSpPr>
           <p:cNvPr id="2" name="Title 1"/>
@@ -6307,7 +7839,7 @@
           <a:p>
             <a:fld id="{C1FF6DA9-008F-8B48-92A6-B652298478BF}" type="slidenum">
               <a:rPr lang="en-US" smtClean="0"/>
-              <a:t>‹#›</a:t>
+              <a:t>25</a:t>
             </a:fld>
             <a:endParaRPr lang="en-US"/>
           </a:p>
@@ -6383,7 +7915,7 @@
               <a:t>실습 도시는 </a:t>
             </a:r>
             <a:r>
-              <a:rPr b="1" sz="1800"/>
+              <a:rPr sz="1800" b="1"/>
               <a:t>하남시</a:t>
             </a:r>
             <a:r>
@@ -6446,7 +7978,7 @@
           </a:fontRef>
         </p:style>
         <p:txBody>
-          <a:bodyPr rtlCol="0" anchor="t" wrap="square" lIns="182880" rIns="182880" tIns="137160" bIns="137160"/>
+          <a:bodyPr wrap="square" lIns="182880" tIns="137160" rIns="182880" bIns="137160" rtlCol="0" anchor="t"/>
           <a:lstStyle/>
           <a:p>
             <a:pPr algn="l"/>
@@ -6462,15 +7994,12 @@
           </a:p>
           <a:p>
             <a:pPr algn="l"/>
-            <a:r>
-              <a:rPr sz="1200">
-                <a:solidFill>
-                  <a:srgbClr val="1F2937"/>
-                </a:solidFill>
-                <a:latin typeface="Consolas"/>
-              </a:rPr>
-              <a:t/>
-            </a:r>
+            <a:endParaRPr sz="1200">
+              <a:solidFill>
+                <a:srgbClr val="1F2937"/>
+              </a:solidFill>
+              <a:latin typeface="Consolas"/>
+            </a:endParaRPr>
           </a:p>
           <a:p>
             <a:pPr algn="l"/>
@@ -6519,7 +8048,7 @@
 </file>
 
 <file path=ppt/slides/slide26.xml><?xml version="1.0" encoding="utf-8"?>
-<p:sld xmlns:a="http://schemas.openxmlformats.org/drawingml/2006/main" xmlns:p="http://schemas.openxmlformats.org/presentationml/2006/main" xmlns:r="http://schemas.openxmlformats.org/officeDocument/2006/relationships">
+<p:sld xmlns:a="http://schemas.openxmlformats.org/drawingml/2006/main" xmlns:r="http://schemas.openxmlformats.org/officeDocument/2006/relationships" xmlns:p="http://schemas.openxmlformats.org/presentationml/2006/main">
   <p:cSld name="md:0.2-2#1|f0035191ae">
     <p:spTree>
       <p:nvGrpSpPr>
@@ -6527,7 +8056,14 @@
         <p:cNvGrpSpPr/>
         <p:nvPr/>
       </p:nvGrpSpPr>
-      <p:grpSpPr/>
+      <p:grpSpPr>
+        <a:xfrm>
+          <a:off x="0" y="0"/>
+          <a:ext cx="0" cy="0"/>
+          <a:chOff x="0" y="0"/>
+          <a:chExt cx="0" cy="0"/>
+        </a:xfrm>
+      </p:grpSpPr>
       <p:sp>
         <p:nvSpPr>
           <p:cNvPr id="2" name="Title 1"/>
@@ -6597,7 +8133,7 @@
           <a:p>
             <a:fld id="{C1FF6DA9-008F-8B48-92A6-B652298478BF}" type="slidenum">
               <a:rPr lang="en-US" smtClean="0"/>
-              <a:t>‹#›</a:t>
+              <a:t>26</a:t>
             </a:fld>
             <a:endParaRPr lang="en-US"/>
           </a:p>
@@ -6673,7 +8209,7 @@
           </a:fontRef>
         </p:style>
         <p:txBody>
-          <a:bodyPr rtlCol="0" anchor="t" wrap="square" lIns="182880" rIns="182880" tIns="137160" bIns="137160"/>
+          <a:bodyPr wrap="square" lIns="182880" tIns="137160" rIns="182880" bIns="137160" rtlCol="0" anchor="t"/>
           <a:lstStyle/>
           <a:p>
             <a:pPr algn="l"/>
@@ -6689,15 +8225,12 @@
           </a:p>
           <a:p>
             <a:pPr algn="l"/>
-            <a:r>
-              <a:rPr sz="1200">
-                <a:solidFill>
-                  <a:srgbClr val="1F2937"/>
-                </a:solidFill>
-                <a:latin typeface="Consolas"/>
-              </a:rPr>
-              <a:t/>
-            </a:r>
+            <a:endParaRPr sz="1200">
+              <a:solidFill>
+                <a:srgbClr val="1F2937"/>
+              </a:solidFill>
+              <a:latin typeface="Consolas"/>
+            </a:endParaRPr>
           </a:p>
           <a:p>
             <a:pPr algn="l"/>
@@ -6795,7 +8328,7 @@
 </file>
 
 <file path=ppt/slides/slide27.xml><?xml version="1.0" encoding="utf-8"?>
-<p:sld xmlns:a="http://schemas.openxmlformats.org/drawingml/2006/main" xmlns:p="http://schemas.openxmlformats.org/presentationml/2006/main" xmlns:r="http://schemas.openxmlformats.org/officeDocument/2006/relationships">
+<p:sld xmlns:a="http://schemas.openxmlformats.org/drawingml/2006/main" xmlns:r="http://schemas.openxmlformats.org/officeDocument/2006/relationships" xmlns:p="http://schemas.openxmlformats.org/presentationml/2006/main">
   <p:cSld name="md:0.3#1|2d14ba0059">
     <p:spTree>
       <p:nvGrpSpPr>
@@ -6803,7 +8336,14 @@
         <p:cNvGrpSpPr/>
         <p:nvPr/>
       </p:nvGrpSpPr>
-      <p:grpSpPr/>
+      <p:grpSpPr>
+        <a:xfrm>
+          <a:off x="0" y="0"/>
+          <a:ext cx="0" cy="0"/>
+          <a:chOff x="0" y="0"/>
+          <a:chExt cx="0" cy="0"/>
+        </a:xfrm>
+      </p:grpSpPr>
       <p:sp>
         <p:nvSpPr>
           <p:cNvPr id="2" name="Title 1"/>
@@ -6873,7 +8413,7 @@
           <a:p>
             <a:fld id="{C1FF6DA9-008F-8B48-92A6-B652298478BF}" type="slidenum">
               <a:rPr lang="en-US" smtClean="0"/>
-              <a:t>‹#›</a:t>
+              <a:t>27</a:t>
             </a:fld>
             <a:endParaRPr lang="en-US"/>
           </a:p>
@@ -6949,7 +8489,7 @@
               <a:t>최단경로나 시뮬레이션을 실제로 돌리는 것은 </a:t>
             </a:r>
             <a:r>
-              <a:rPr b="1" sz="1800"/>
+              <a:rPr sz="1800" b="1"/>
               <a:t>DTUMOS</a:t>
             </a:r>
             <a:r>
@@ -6978,14 +8518,32 @@
                 <a:tableStyleId>{5940675A-B579-460E-94D1-54222C63F5DA}</a:tableStyleId>
               </a:tblPr>
               <a:tblGrid>
-                <a:gridCol w="1675136"/>
-                <a:gridCol w="3147874"/>
-                <a:gridCol w="6271404"/>
+                <a:gridCol w="1675136">
+                  <a:extLst>
+                    <a:ext uri="{9D8B030D-6E8A-4147-A177-3AD203B41FA5}">
+                      <a16:colId xmlns:a16="http://schemas.microsoft.com/office/drawing/2014/main" val="20000"/>
+                    </a:ext>
+                  </a:extLst>
+                </a:gridCol>
+                <a:gridCol w="3147874">
+                  <a:extLst>
+                    <a:ext uri="{9D8B030D-6E8A-4147-A177-3AD203B41FA5}">
+                      <a16:colId xmlns:a16="http://schemas.microsoft.com/office/drawing/2014/main" val="20001"/>
+                    </a:ext>
+                  </a:extLst>
+                </a:gridCol>
+                <a:gridCol w="6271404">
+                  <a:extLst>
+                    <a:ext uri="{9D8B030D-6E8A-4147-A177-3AD203B41FA5}">
+                      <a16:colId xmlns:a16="http://schemas.microsoft.com/office/drawing/2014/main" val="20002"/>
+                    </a:ext>
+                  </a:extLst>
+                </a:gridCol>
               </a:tblGrid>
               <a:tr h="331978">
                 <a:tc>
                   <a:txBody>
-                    <a:bodyPr wrap="square"/>
+                    <a:bodyPr/>
                     <a:lstStyle/>
                     <a:p>
                       <a:pPr algn="ctr"/>
@@ -7003,7 +8561,7 @@
                 </a:tc>
                 <a:tc>
                   <a:txBody>
-                    <a:bodyPr wrap="square"/>
+                    <a:bodyPr/>
                     <a:lstStyle/>
                     <a:p>
                       <a:pPr algn="ctr"/>
@@ -7021,7 +8579,7 @@
                 </a:tc>
                 <a:tc>
                   <a:txBody>
-                    <a:bodyPr wrap="square"/>
+                    <a:bodyPr/>
                     <a:lstStyle/>
                     <a:p>
                       <a:pPr algn="ctr"/>
@@ -7037,11 +8595,16 @@
                     </a:solidFill>
                   </a:tcPr>
                 </a:tc>
+                <a:extLst>
+                  <a:ext uri="{0D108BD9-81ED-4DB2-BD59-A6C34878D82A}">
+                    <a16:rowId xmlns:a16="http://schemas.microsoft.com/office/drawing/2014/main" val="10000"/>
+                  </a:ext>
+                </a:extLst>
               </a:tr>
               <a:tr h="331978">
                 <a:tc>
                   <a:txBody>
-                    <a:bodyPr wrap="square"/>
+                    <a:bodyPr/>
                     <a:lstStyle/>
                     <a:p>
                       <a:r>
@@ -7054,7 +8617,7 @@
                 </a:tc>
                 <a:tc>
                   <a:txBody>
-                    <a:bodyPr wrap="square"/>
+                    <a:bodyPr/>
                     <a:lstStyle/>
                     <a:p>
                       <a:r>
@@ -7067,7 +8630,7 @@
                 </a:tc>
                 <a:tc>
                   <a:txBody>
-                    <a:bodyPr wrap="square"/>
+                    <a:bodyPr/>
                     <a:lstStyle/>
                     <a:p>
                       <a:r>
@@ -7078,11 +8641,16 @@
                   </a:txBody>
                   <a:tcPr marL="54864" marR="54864" marT="27432" marB="27432"/>
                 </a:tc>
+                <a:extLst>
+                  <a:ext uri="{0D108BD9-81ED-4DB2-BD59-A6C34878D82A}">
+                    <a16:rowId xmlns:a16="http://schemas.microsoft.com/office/drawing/2014/main" val="10001"/>
+                  </a:ext>
+                </a:extLst>
               </a:tr>
               <a:tr h="331978">
                 <a:tc>
                   <a:txBody>
-                    <a:bodyPr wrap="square"/>
+                    <a:bodyPr/>
                     <a:lstStyle/>
                     <a:p>
                       <a:r>
@@ -7095,7 +8663,7 @@
                 </a:tc>
                 <a:tc>
                   <a:txBody>
-                    <a:bodyPr wrap="square"/>
+                    <a:bodyPr/>
                     <a:lstStyle/>
                     <a:p>
                       <a:r>
@@ -7108,26 +8676,27 @@
                 </a:tc>
                 <a:tc>
                   <a:txBody>
-                    <a:bodyPr wrap="square"/>
+                    <a:bodyPr/>
                     <a:lstStyle/>
                     <a:p>
                       <a:r>
                         <a:rPr sz="1400"/>
-                        <a:t>docker compose up -d</a:t>
-                      </a:r>
-                      <a:r>
-                        <a:rPr sz="1400"/>
-                        <a:t> 후 기본값 그대로</a:t>
+                        <a:t>docker compose up -d 후 기본값 그대로</a:t>
                       </a:r>
                     </a:p>
                   </a:txBody>
                   <a:tcPr marL="54864" marR="54864" marT="27432" marB="27432"/>
                 </a:tc>
+                <a:extLst>
+                  <a:ext uri="{0D108BD9-81ED-4DB2-BD59-A6C34878D82A}">
+                    <a16:rowId xmlns:a16="http://schemas.microsoft.com/office/drawing/2014/main" val="10002"/>
+                  </a:ext>
+                </a:extLst>
               </a:tr>
               <a:tr h="331978">
                 <a:tc>
                   <a:txBody>
-                    <a:bodyPr wrap="square"/>
+                    <a:bodyPr/>
                     <a:lstStyle/>
                     <a:p>
                       <a:r>
@@ -7140,7 +8709,7 @@
                 </a:tc>
                 <a:tc>
                   <a:txBody>
-                    <a:bodyPr wrap="square"/>
+                    <a:bodyPr/>
                     <a:lstStyle/>
                     <a:p>
                       <a:r>
@@ -7153,7 +8722,7 @@
                 </a:tc>
                 <a:tc>
                   <a:txBody>
-                    <a:bodyPr wrap="square"/>
+                    <a:bodyPr/>
                     <a:lstStyle/>
                     <a:p>
                       <a:r>
@@ -7164,6 +8733,11 @@
                   </a:txBody>
                   <a:tcPr marL="54864" marR="54864" marT="27432" marB="27432"/>
                 </a:tc>
+                <a:extLst>
+                  <a:ext uri="{0D108BD9-81ED-4DB2-BD59-A6C34878D82A}">
+                    <a16:rowId xmlns:a16="http://schemas.microsoft.com/office/drawing/2014/main" val="10003"/>
+                  </a:ext>
+                </a:extLst>
               </a:tr>
             </a:tbl>
           </a:graphicData>
@@ -7227,7 +8801,7 @@
 </file>
 
 <file path=ppt/slides/slide28.xml><?xml version="1.0" encoding="utf-8"?>
-<p:sld xmlns:a="http://schemas.openxmlformats.org/drawingml/2006/main" xmlns:p="http://schemas.openxmlformats.org/presentationml/2006/main" xmlns:r="http://schemas.openxmlformats.org/officeDocument/2006/relationships">
+<p:sld xmlns:a="http://schemas.openxmlformats.org/drawingml/2006/main" xmlns:r="http://schemas.openxmlformats.org/officeDocument/2006/relationships" xmlns:p="http://schemas.openxmlformats.org/presentationml/2006/main">
   <p:cSld name="md:0.3-2#1|c2323b7d85">
     <p:spTree>
       <p:nvGrpSpPr>
@@ -7235,7 +8809,14 @@
         <p:cNvGrpSpPr/>
         <p:nvPr/>
       </p:nvGrpSpPr>
-      <p:grpSpPr/>
+      <p:grpSpPr>
+        <a:xfrm>
+          <a:off x="0" y="0"/>
+          <a:ext cx="0" cy="0"/>
+          <a:chOff x="0" y="0"/>
+          <a:chExt cx="0" cy="0"/>
+        </a:xfrm>
+      </p:grpSpPr>
       <p:sp>
         <p:nvSpPr>
           <p:cNvPr id="2" name="Title 1"/>
@@ -7305,7 +8886,7 @@
           <a:p>
             <a:fld id="{C1FF6DA9-008F-8B48-92A6-B652298478BF}" type="slidenum">
               <a:rPr lang="en-US" smtClean="0"/>
-              <a:t>‹#›</a:t>
+              <a:t>28</a:t>
             </a:fld>
             <a:endParaRPr lang="en-US"/>
           </a:p>
@@ -7381,7 +8962,7 @@
           </a:fontRef>
         </p:style>
         <p:txBody>
-          <a:bodyPr rtlCol="0" anchor="t" wrap="square" lIns="182880" rIns="182880" tIns="137160" bIns="137160"/>
+          <a:bodyPr wrap="square" lIns="182880" tIns="137160" rIns="182880" bIns="137160" rtlCol="0" anchor="t"/>
           <a:lstStyle/>
           <a:p>
             <a:pPr algn="l"/>
@@ -7397,15 +8978,12 @@
           </a:p>
           <a:p>
             <a:pPr algn="l"/>
-            <a:r>
-              <a:rPr sz="1200">
-                <a:solidFill>
-                  <a:srgbClr val="1F2937"/>
-                </a:solidFill>
-                <a:latin typeface="Consolas"/>
-              </a:rPr>
-              <a:t/>
-            </a:r>
+            <a:endParaRPr sz="1200">
+              <a:solidFill>
+                <a:srgbClr val="1F2937"/>
+              </a:solidFill>
+              <a:latin typeface="Consolas"/>
+            </a:endParaRPr>
           </a:p>
           <a:p>
             <a:pPr algn="l"/>
@@ -7523,7 +9101,7 @@
 </file>
 
 <file path=ppt/slides/slide29.xml><?xml version="1.0" encoding="utf-8"?>
-<p:sld xmlns:a="http://schemas.openxmlformats.org/drawingml/2006/main" xmlns:p="http://schemas.openxmlformats.org/presentationml/2006/main" xmlns:r="http://schemas.openxmlformats.org/officeDocument/2006/relationships">
+<p:sld xmlns:a="http://schemas.openxmlformats.org/drawingml/2006/main" xmlns:r="http://schemas.openxmlformats.org/officeDocument/2006/relationships" xmlns:p="http://schemas.openxmlformats.org/presentationml/2006/main">
   <p:cSld name="md:0.4#1|8342e6ab8e">
     <p:spTree>
       <p:nvGrpSpPr>
@@ -7531,7 +9109,14 @@
         <p:cNvGrpSpPr/>
         <p:nvPr/>
       </p:nvGrpSpPr>
-      <p:grpSpPr/>
+      <p:grpSpPr>
+        <a:xfrm>
+          <a:off x="0" y="0"/>
+          <a:ext cx="0" cy="0"/>
+          <a:chOff x="0" y="0"/>
+          <a:chExt cx="0" cy="0"/>
+        </a:xfrm>
+      </p:grpSpPr>
       <p:sp>
         <p:nvSpPr>
           <p:cNvPr id="2" name="Title 1"/>
@@ -7601,7 +9186,7 @@
           <a:p>
             <a:fld id="{C1FF6DA9-008F-8B48-92A6-B652298478BF}" type="slidenum">
               <a:rPr lang="en-US" smtClean="0"/>
-              <a:t>‹#›</a:t>
+              <a:t>29</a:t>
             </a:fld>
             <a:endParaRPr lang="en-US"/>
           </a:p>
@@ -7738,7 +9323,7 @@
           </a:fontRef>
         </p:style>
         <p:txBody>
-          <a:bodyPr rtlCol="0" anchor="t" wrap="square" lIns="182880" rIns="182880" tIns="137160" bIns="137160"/>
+          <a:bodyPr wrap="square" lIns="182880" tIns="137160" rIns="182880" bIns="137160" rtlCol="0" anchor="t"/>
           <a:lstStyle/>
           <a:p>
             <a:pPr algn="l"/>
@@ -7871,7 +9456,7 @@
 </file>
 
 <file path=ppt/slides/slide3.xml><?xml version="1.0" encoding="utf-8"?>
-<p:sld xmlns:a="http://schemas.openxmlformats.org/drawingml/2006/main" xmlns:p="http://schemas.openxmlformats.org/presentationml/2006/main" xmlns:r="http://schemas.openxmlformats.org/officeDocument/2006/relationships">
+<p:sld xmlns:a="http://schemas.openxmlformats.org/drawingml/2006/main" xmlns:r="http://schemas.openxmlformats.org/officeDocument/2006/relationships" xmlns:p="http://schemas.openxmlformats.org/presentationml/2006/main">
   <p:cSld name="md:학습-목표#1|c55e4f76ad">
     <p:spTree>
       <p:nvGrpSpPr>
@@ -7879,7 +9464,14 @@
         <p:cNvGrpSpPr/>
         <p:nvPr/>
       </p:nvGrpSpPr>
-      <p:grpSpPr/>
+      <p:grpSpPr>
+        <a:xfrm>
+          <a:off x="0" y="0"/>
+          <a:ext cx="0" cy="0"/>
+          <a:chOff x="0" y="0"/>
+          <a:chExt cx="0" cy="0"/>
+        </a:xfrm>
+      </p:grpSpPr>
       <p:sp>
         <p:nvSpPr>
           <p:cNvPr id="2" name="Title 1"/>
@@ -7916,27 +9508,311 @@
           <a:bodyPr/>
           <a:lstStyle/>
           <a:p>
-            <a:pPr/>
-            <a:r>
-              <a:t>시뮬레이션이 실제 운영과 무엇이 다른지 한 문장으로 설명합니다.</a:t>
-            </a:r>
-          </a:p>
-          <a:p>
-            <a:pPr/>
-            <a:r>
-              <a:t>VISSIM·SUMO 같은 기존 도구가 이 문제에 맞지 않는 이유를 댑니다.</a:t>
-            </a:r>
-          </a:p>
-          <a:p>
-            <a:pPr/>
-            <a:r>
-              <a:t>0장에서 돌린 결과에서 "차량을 줄여도 되는가"라는 질문을 끌어냅니다.</a:t>
-            </a:r>
-          </a:p>
-          <a:p>
-            <a:pPr/>
-            <a:r>
-              <a:t>이 책이 만들 시뮬레이터의 네 부분을 각각 몇 장에서 다루는지 압니다.</a:t>
+            <a:r>
+              <a:rPr dirty="0" err="1"/>
+              <a:t>시뮬레이션이</a:t>
+            </a:r>
+            <a:r>
+              <a:rPr dirty="0"/>
+              <a:t> </a:t>
+            </a:r>
+            <a:r>
+              <a:rPr dirty="0" err="1"/>
+              <a:t>실제</a:t>
+            </a:r>
+            <a:r>
+              <a:rPr dirty="0"/>
+              <a:t> </a:t>
+            </a:r>
+            <a:r>
+              <a:rPr dirty="0" err="1"/>
+              <a:t>운영과</a:t>
+            </a:r>
+            <a:r>
+              <a:rPr dirty="0"/>
+              <a:t> </a:t>
+            </a:r>
+            <a:r>
+              <a:rPr dirty="0" err="1"/>
+              <a:t>무엇이</a:t>
+            </a:r>
+            <a:r>
+              <a:rPr dirty="0"/>
+              <a:t> </a:t>
+            </a:r>
+            <a:r>
+              <a:rPr dirty="0" err="1"/>
+              <a:t>다른지</a:t>
+            </a:r>
+            <a:r>
+              <a:rPr dirty="0"/>
+              <a:t> </a:t>
+            </a:r>
+            <a:r>
+              <a:rPr dirty="0" err="1"/>
+              <a:t>한</a:t>
+            </a:r>
+            <a:r>
+              <a:rPr dirty="0"/>
+              <a:t> </a:t>
+            </a:r>
+            <a:r>
+              <a:rPr dirty="0" err="1"/>
+              <a:t>문장으로</a:t>
+            </a:r>
+            <a:r>
+              <a:rPr dirty="0"/>
+              <a:t> </a:t>
+            </a:r>
+            <a:r>
+              <a:rPr dirty="0" err="1"/>
+              <a:t>설명합니다</a:t>
+            </a:r>
+            <a:r>
+              <a:rPr dirty="0"/>
+              <a:t>.</a:t>
+            </a:r>
+            <a:endParaRPr lang="en-US" dirty="0"/>
+          </a:p>
+          <a:p>
+            <a:endParaRPr dirty="0"/>
+          </a:p>
+          <a:p>
+            <a:r>
+              <a:rPr dirty="0"/>
+              <a:t>VISSIM·SUMO </a:t>
+            </a:r>
+            <a:r>
+              <a:rPr dirty="0" err="1"/>
+              <a:t>같은</a:t>
+            </a:r>
+            <a:r>
+              <a:rPr dirty="0"/>
+              <a:t> </a:t>
+            </a:r>
+            <a:r>
+              <a:rPr dirty="0" err="1"/>
+              <a:t>기존</a:t>
+            </a:r>
+            <a:r>
+              <a:rPr dirty="0"/>
+              <a:t> </a:t>
+            </a:r>
+            <a:r>
+              <a:rPr dirty="0" err="1"/>
+              <a:t>도구가</a:t>
+            </a:r>
+            <a:r>
+              <a:rPr dirty="0"/>
+              <a:t> </a:t>
+            </a:r>
+            <a:r>
+              <a:rPr dirty="0" err="1"/>
+              <a:t>이</a:t>
+            </a:r>
+            <a:r>
+              <a:rPr dirty="0"/>
+              <a:t> </a:t>
+            </a:r>
+            <a:r>
+              <a:rPr dirty="0" err="1"/>
+              <a:t>문제에</a:t>
+            </a:r>
+            <a:r>
+              <a:rPr dirty="0"/>
+              <a:t> </a:t>
+            </a:r>
+            <a:r>
+              <a:rPr dirty="0" err="1"/>
+              <a:t>맞지</a:t>
+            </a:r>
+            <a:r>
+              <a:rPr dirty="0"/>
+              <a:t> </a:t>
+            </a:r>
+            <a:r>
+              <a:rPr dirty="0" err="1"/>
+              <a:t>않는</a:t>
+            </a:r>
+            <a:r>
+              <a:rPr dirty="0"/>
+              <a:t> </a:t>
+            </a:r>
+            <a:r>
+              <a:rPr dirty="0" err="1"/>
+              <a:t>이유를</a:t>
+            </a:r>
+            <a:r>
+              <a:rPr dirty="0"/>
+              <a:t> </a:t>
+            </a:r>
+            <a:r>
+              <a:rPr dirty="0" err="1"/>
+              <a:t>댑니다</a:t>
+            </a:r>
+            <a:r>
+              <a:rPr dirty="0"/>
+              <a:t>.</a:t>
+            </a:r>
+            <a:endParaRPr lang="en-US" dirty="0"/>
+          </a:p>
+          <a:p>
+            <a:endParaRPr dirty="0"/>
+          </a:p>
+          <a:p>
+            <a:r>
+              <a:rPr dirty="0"/>
+              <a:t>0장에서 </a:t>
+            </a:r>
+            <a:r>
+              <a:rPr dirty="0" err="1"/>
+              <a:t>돌린</a:t>
+            </a:r>
+            <a:r>
+              <a:rPr dirty="0"/>
+              <a:t> </a:t>
+            </a:r>
+            <a:r>
+              <a:rPr dirty="0" err="1"/>
+              <a:t>결과에서</a:t>
+            </a:r>
+            <a:r>
+              <a:rPr dirty="0"/>
+              <a:t> "</a:t>
+            </a:r>
+            <a:r>
+              <a:rPr dirty="0" err="1"/>
+              <a:t>차량을</a:t>
+            </a:r>
+            <a:r>
+              <a:rPr dirty="0"/>
+              <a:t> </a:t>
+            </a:r>
+            <a:r>
+              <a:rPr dirty="0" err="1"/>
+              <a:t>줄여도</a:t>
+            </a:r>
+            <a:r>
+              <a:rPr dirty="0"/>
+              <a:t> </a:t>
+            </a:r>
+            <a:r>
+              <a:rPr dirty="0" err="1"/>
+              <a:t>되는가"라는</a:t>
+            </a:r>
+            <a:r>
+              <a:rPr dirty="0"/>
+              <a:t> </a:t>
+            </a:r>
+            <a:r>
+              <a:rPr dirty="0" err="1"/>
+              <a:t>질문을</a:t>
+            </a:r>
+            <a:r>
+              <a:rPr dirty="0"/>
+              <a:t> </a:t>
+            </a:r>
+            <a:r>
+              <a:rPr dirty="0" err="1"/>
+              <a:t>끌어냅니다</a:t>
+            </a:r>
+            <a:r>
+              <a:rPr dirty="0"/>
+              <a:t>.</a:t>
+            </a:r>
+            <a:endParaRPr lang="en-US" dirty="0"/>
+          </a:p>
+          <a:p>
+            <a:endParaRPr dirty="0"/>
+          </a:p>
+          <a:p>
+            <a:r>
+              <a:rPr dirty="0" err="1"/>
+              <a:t>이</a:t>
+            </a:r>
+            <a:r>
+              <a:rPr dirty="0"/>
+              <a:t> </a:t>
+            </a:r>
+            <a:r>
+              <a:rPr dirty="0" err="1"/>
+              <a:t>책이</a:t>
+            </a:r>
+            <a:r>
+              <a:rPr dirty="0"/>
+              <a:t> </a:t>
+            </a:r>
+            <a:r>
+              <a:rPr dirty="0" err="1"/>
+              <a:t>만들</a:t>
+            </a:r>
+            <a:r>
+              <a:rPr dirty="0"/>
+              <a:t> </a:t>
+            </a:r>
+            <a:r>
+              <a:rPr dirty="0" err="1"/>
+              <a:t>시뮬레이터의</a:t>
+            </a:r>
+            <a:r>
+              <a:rPr dirty="0"/>
+              <a:t> </a:t>
+            </a:r>
+            <a:r>
+              <a:rPr dirty="0" err="1"/>
+              <a:t>네</a:t>
+            </a:r>
+            <a:r>
+              <a:rPr dirty="0"/>
+              <a:t> </a:t>
+            </a:r>
+            <a:r>
+              <a:rPr dirty="0" err="1"/>
+              <a:t>부분을</a:t>
+            </a:r>
+            <a:r>
+              <a:rPr dirty="0"/>
+              <a:t> </a:t>
+            </a:r>
+            <a:r>
+              <a:rPr dirty="0" err="1"/>
+              <a:t>각각</a:t>
+            </a:r>
+            <a:r>
+              <a:rPr dirty="0"/>
+              <a:t> </a:t>
+            </a:r>
+            <a:r>
+              <a:rPr dirty="0" err="1"/>
+              <a:t>몇</a:t>
+            </a:r>
+            <a:r>
+              <a:rPr dirty="0"/>
+              <a:t> </a:t>
+            </a:r>
+            <a:r>
+              <a:rPr dirty="0" err="1"/>
+              <a:t>장에서</a:t>
+            </a:r>
+            <a:r>
+              <a:rPr dirty="0"/>
+              <a:t> </a:t>
+            </a:r>
+            <a:r>
+              <a:rPr dirty="0" err="1"/>
+              <a:t>다루는지</a:t>
+            </a:r>
+            <a:r>
+              <a:rPr dirty="0"/>
+              <a:t> </a:t>
+            </a:r>
+            <a:r>
+              <a:rPr dirty="0" err="1"/>
+              <a:t>압니다</a:t>
+            </a:r>
+            <a:r>
+              <a:rPr dirty="0"/>
+              <a:t>.</a:t>
             </a:r>
           </a:p>
         </p:txBody>
@@ -7989,7 +9865,7 @@
           <a:p>
             <a:fld id="{C1FF6DA9-008F-8B48-92A6-B652298478BF}" type="slidenum">
               <a:rPr lang="en-US" smtClean="0"/>
-              <a:t>‹#›</a:t>
+              <a:t>3</a:t>
             </a:fld>
             <a:endParaRPr lang="en-US"/>
           </a:p>
@@ -8037,7 +9913,7 @@
 </file>
 
 <file path=ppt/slides/slide30.xml><?xml version="1.0" encoding="utf-8"?>
-<p:sld xmlns:a="http://schemas.openxmlformats.org/drawingml/2006/main" xmlns:p="http://schemas.openxmlformats.org/presentationml/2006/main" xmlns:r="http://schemas.openxmlformats.org/officeDocument/2006/relationships">
+<p:sld xmlns:a="http://schemas.openxmlformats.org/drawingml/2006/main" xmlns:r="http://schemas.openxmlformats.org/officeDocument/2006/relationships" xmlns:p="http://schemas.openxmlformats.org/presentationml/2006/main">
   <p:cSld name="md:0.4-2#1|e407ede122">
     <p:spTree>
       <p:nvGrpSpPr>
@@ -8045,7 +9921,14 @@
         <p:cNvGrpSpPr/>
         <p:nvPr/>
       </p:nvGrpSpPr>
-      <p:grpSpPr/>
+      <p:grpSpPr>
+        <a:xfrm>
+          <a:off x="0" y="0"/>
+          <a:ext cx="0" cy="0"/>
+          <a:chOff x="0" y="0"/>
+          <a:chExt cx="0" cy="0"/>
+        </a:xfrm>
+      </p:grpSpPr>
       <p:sp>
         <p:nvSpPr>
           <p:cNvPr id="2" name="Title 1"/>
@@ -8115,7 +9998,7 @@
           <a:p>
             <a:fld id="{C1FF6DA9-008F-8B48-92A6-B652298478BF}" type="slidenum">
               <a:rPr lang="en-US" smtClean="0"/>
-              <a:t>‹#›</a:t>
+              <a:t>30</a:t>
             </a:fld>
             <a:endParaRPr lang="en-US"/>
           </a:p>
@@ -8173,14 +10056,32 @@
                 <a:tableStyleId>{5940675A-B579-460E-94D1-54222C63F5DA}</a:tableStyleId>
               </a:tblPr>
               <a:tblGrid>
-                <a:gridCol w="2937183"/>
-                <a:gridCol w="1402704"/>
-                <a:gridCol w="6754527"/>
+                <a:gridCol w="2937183">
+                  <a:extLst>
+                    <a:ext uri="{9D8B030D-6E8A-4147-A177-3AD203B41FA5}">
+                      <a16:colId xmlns:a16="http://schemas.microsoft.com/office/drawing/2014/main" val="20000"/>
+                    </a:ext>
+                  </a:extLst>
+                </a:gridCol>
+                <a:gridCol w="1402704">
+                  <a:extLst>
+                    <a:ext uri="{9D8B030D-6E8A-4147-A177-3AD203B41FA5}">
+                      <a16:colId xmlns:a16="http://schemas.microsoft.com/office/drawing/2014/main" val="20001"/>
+                    </a:ext>
+                  </a:extLst>
+                </a:gridCol>
+                <a:gridCol w="6754527">
+                  <a:extLst>
+                    <a:ext uri="{9D8B030D-6E8A-4147-A177-3AD203B41FA5}">
+                      <a16:colId xmlns:a16="http://schemas.microsoft.com/office/drawing/2014/main" val="20002"/>
+                    </a:ext>
+                  </a:extLst>
+                </a:gridCol>
               </a:tblGrid>
               <a:tr h="331978">
                 <a:tc>
                   <a:txBody>
-                    <a:bodyPr wrap="square"/>
+                    <a:bodyPr/>
                     <a:lstStyle/>
                     <a:p>
                       <a:pPr algn="ctr"/>
@@ -8198,7 +10099,7 @@
                 </a:tc>
                 <a:tc>
                   <a:txBody>
-                    <a:bodyPr wrap="square"/>
+                    <a:bodyPr/>
                     <a:lstStyle/>
                     <a:p>
                       <a:pPr algn="ctr"/>
@@ -8216,7 +10117,7 @@
                 </a:tc>
                 <a:tc>
                   <a:txBody>
-                    <a:bodyPr wrap="square"/>
+                    <a:bodyPr/>
                     <a:lstStyle/>
                     <a:p>
                       <a:pPr algn="ctr"/>
@@ -8232,11 +10133,16 @@
                     </a:solidFill>
                   </a:tcPr>
                 </a:tc>
+                <a:extLst>
+                  <a:ext uri="{0D108BD9-81ED-4DB2-BD59-A6C34878D82A}">
+                    <a16:rowId xmlns:a16="http://schemas.microsoft.com/office/drawing/2014/main" val="10000"/>
+                  </a:ext>
+                </a:extLst>
               </a:tr>
               <a:tr h="331978">
                 <a:tc>
                   <a:txBody>
-                    <a:bodyPr wrap="square"/>
+                    <a:bodyPr/>
                     <a:lstStyle/>
                     <a:p>
                       <a:r>
@@ -8249,7 +10155,7 @@
                 </a:tc>
                 <a:tc>
                   <a:txBody>
-                    <a:bodyPr wrap="square"/>
+                    <a:bodyPr/>
                     <a:lstStyle/>
                     <a:p>
                       <a:r>
@@ -8262,7 +10168,7 @@
                 </a:tc>
                 <a:tc>
                   <a:txBody>
-                    <a:bodyPr wrap="square"/>
+                    <a:bodyPr/>
                     <a:lstStyle/>
                     <a:p>
                       <a:r>
@@ -8273,11 +10179,16 @@
                   </a:txBody>
                   <a:tcPr marL="54864" marR="54864" marT="27432" marB="27432"/>
                 </a:tc>
+                <a:extLst>
+                  <a:ext uri="{0D108BD9-81ED-4DB2-BD59-A6C34878D82A}">
+                    <a16:rowId xmlns:a16="http://schemas.microsoft.com/office/drawing/2014/main" val="10001"/>
+                  </a:ext>
+                </a:extLst>
               </a:tr>
               <a:tr h="331978">
                 <a:tc>
                   <a:txBody>
-                    <a:bodyPr wrap="square"/>
+                    <a:bodyPr/>
                     <a:lstStyle/>
                     <a:p>
                       <a:r>
@@ -8290,7 +10201,7 @@
                 </a:tc>
                 <a:tc>
                   <a:txBody>
-                    <a:bodyPr wrap="square"/>
+                    <a:bodyPr/>
                     <a:lstStyle/>
                     <a:p>
                       <a:r>
@@ -8303,7 +10214,7 @@
                 </a:tc>
                 <a:tc>
                   <a:txBody>
-                    <a:bodyPr wrap="square"/>
+                    <a:bodyPr/>
                     <a:lstStyle/>
                     <a:p>
                       <a:r>
@@ -8314,11 +10225,16 @@
                   </a:txBody>
                   <a:tcPr marL="54864" marR="54864" marT="27432" marB="27432"/>
                 </a:tc>
+                <a:extLst>
+                  <a:ext uri="{0D108BD9-81ED-4DB2-BD59-A6C34878D82A}">
+                    <a16:rowId xmlns:a16="http://schemas.microsoft.com/office/drawing/2014/main" val="10002"/>
+                  </a:ext>
+                </a:extLst>
               </a:tr>
               <a:tr h="331978">
                 <a:tc>
                   <a:txBody>
-                    <a:bodyPr wrap="square"/>
+                    <a:bodyPr/>
                     <a:lstStyle/>
                     <a:p>
                       <a:r>
@@ -8331,7 +10247,7 @@
                 </a:tc>
                 <a:tc>
                   <a:txBody>
-                    <a:bodyPr wrap="square"/>
+                    <a:bodyPr/>
                     <a:lstStyle/>
                     <a:p>
                       <a:r>
@@ -8344,7 +10260,7 @@
                 </a:tc>
                 <a:tc>
                   <a:txBody>
-                    <a:bodyPr wrap="square"/>
+                    <a:bodyPr/>
                     <a:lstStyle/>
                     <a:p>
                       <a:r>
@@ -8355,6 +10271,11 @@
                   </a:txBody>
                   <a:tcPr marL="54864" marR="54864" marT="27432" marB="27432"/>
                 </a:tc>
+                <a:extLst>
+                  <a:ext uri="{0D108BD9-81ED-4DB2-BD59-A6C34878D82A}">
+                    <a16:rowId xmlns:a16="http://schemas.microsoft.com/office/drawing/2014/main" val="10003"/>
+                  </a:ext>
+                </a:extLst>
               </a:tr>
             </a:tbl>
           </a:graphicData>
@@ -8424,7 +10345,7 @@
 </file>
 
 <file path=ppt/slides/slide31.xml><?xml version="1.0" encoding="utf-8"?>
-<p:sld xmlns:a="http://schemas.openxmlformats.org/drawingml/2006/main" xmlns:p="http://schemas.openxmlformats.org/presentationml/2006/main" xmlns:r="http://schemas.openxmlformats.org/officeDocument/2006/relationships">
+<p:sld xmlns:a="http://schemas.openxmlformats.org/drawingml/2006/main" xmlns:r="http://schemas.openxmlformats.org/officeDocument/2006/relationships" xmlns:p="http://schemas.openxmlformats.org/presentationml/2006/main">
   <p:cSld name="md:0.5#1|d9959f3c33">
     <p:spTree>
       <p:nvGrpSpPr>
@@ -8432,7 +10353,14 @@
         <p:cNvGrpSpPr/>
         <p:nvPr/>
       </p:nvGrpSpPr>
-      <p:grpSpPr/>
+      <p:grpSpPr>
+        <a:xfrm>
+          <a:off x="0" y="0"/>
+          <a:ext cx="0" cy="0"/>
+          <a:chOff x="0" y="0"/>
+          <a:chExt cx="0" cy="0"/>
+        </a:xfrm>
+      </p:grpSpPr>
       <p:sp>
         <p:nvSpPr>
           <p:cNvPr id="2" name="Title 1"/>
@@ -8474,7 +10402,6 @@
           <a:bodyPr/>
           <a:lstStyle/>
           <a:p>
-            <a:pPr/>
             <a:r>
               <a:rPr>
                 <a:latin typeface="Consolas"/>
@@ -8495,13 +10422,11 @@
             </a:r>
           </a:p>
           <a:p>
-            <a:pPr/>
             <a:r>
               <a:t>운행 중 차량과 대기 중 차량은 거울처럼 움직입니다. 둘을 더하면 대부분의 시간에 80이 됩니다.</a:t>
             </a:r>
           </a:p>
           <a:p>
-            <a:pPr/>
             <a:r>
               <a:t>마지막 30분쯤에서 합이 80보다 작아지고, 대기 승객 수는 오히려 늘어납니다.</a:t>
             </a:r>
@@ -8556,7 +10481,7 @@
           <a:p>
             <a:fld id="{C1FF6DA9-008F-8B48-92A6-B652298478BF}" type="slidenum">
               <a:rPr lang="en-US" smtClean="0"/>
-              <a:t>‹#›</a:t>
+              <a:t>31</a:t>
             </a:fld>
             <a:endParaRPr lang="en-US"/>
           </a:p>
@@ -8662,7 +10587,7 @@
 </file>
 
 <file path=ppt/slides/slide32.xml><?xml version="1.0" encoding="utf-8"?>
-<p:sld xmlns:a="http://schemas.openxmlformats.org/drawingml/2006/main" xmlns:p="http://schemas.openxmlformats.org/presentationml/2006/main" xmlns:r="http://schemas.openxmlformats.org/officeDocument/2006/relationships">
+<p:sld xmlns:a="http://schemas.openxmlformats.org/drawingml/2006/main" xmlns:r="http://schemas.openxmlformats.org/officeDocument/2006/relationships" xmlns:p="http://schemas.openxmlformats.org/presentationml/2006/main">
   <p:cSld name="md:0.5-2#1|5f174b60be">
     <p:spTree>
       <p:nvGrpSpPr>
@@ -8670,7 +10595,14 @@
         <p:cNvGrpSpPr/>
         <p:nvPr/>
       </p:nvGrpSpPr>
-      <p:grpSpPr/>
+      <p:grpSpPr>
+        <a:xfrm>
+          <a:off x="0" y="0"/>
+          <a:ext cx="0" cy="0"/>
+          <a:chOff x="0" y="0"/>
+          <a:chExt cx="0" cy="0"/>
+        </a:xfrm>
+      </p:grpSpPr>
       <p:sp>
         <p:nvSpPr>
           <p:cNvPr id="2" name="Title 1"/>
@@ -8740,7 +10672,7 @@
           <a:p>
             <a:fld id="{C1FF6DA9-008F-8B48-92A6-B652298478BF}" type="slidenum">
               <a:rPr lang="en-US" smtClean="0"/>
-              <a:t>‹#›</a:t>
+              <a:t>32</a:t>
             </a:fld>
             <a:endParaRPr lang="en-US"/>
           </a:p>
@@ -8816,7 +10748,7 @@
           </a:fontRef>
         </p:style>
         <p:txBody>
-          <a:bodyPr rtlCol="0" anchor="t" wrap="square" lIns="182880" rIns="182880" tIns="137160" bIns="137160"/>
+          <a:bodyPr wrap="square" lIns="182880" tIns="137160" rIns="182880" bIns="137160" rtlCol="0" anchor="t"/>
           <a:lstStyle/>
           <a:p>
             <a:pPr algn="l"/>
@@ -8952,7 +10884,7 @@
 </file>
 
 <file path=ppt/slides/slide33.xml><?xml version="1.0" encoding="utf-8"?>
-<p:sld xmlns:a="http://schemas.openxmlformats.org/drawingml/2006/main" xmlns:p="http://schemas.openxmlformats.org/presentationml/2006/main" xmlns:r="http://schemas.openxmlformats.org/officeDocument/2006/relationships">
+<p:sld xmlns:a="http://schemas.openxmlformats.org/drawingml/2006/main" xmlns:r="http://schemas.openxmlformats.org/officeDocument/2006/relationships" xmlns:p="http://schemas.openxmlformats.org/presentationml/2006/main">
   <p:cSld name="md:정리와-연습#1|ef36bf8b3e">
     <p:spTree>
       <p:nvGrpSpPr>
@@ -8960,7 +10892,14 @@
         <p:cNvGrpSpPr/>
         <p:nvPr/>
       </p:nvGrpSpPr>
-      <p:grpSpPr/>
+      <p:grpSpPr>
+        <a:xfrm>
+          <a:off x="0" y="0"/>
+          <a:ext cx="0" cy="0"/>
+          <a:chOff x="0" y="0"/>
+          <a:chExt cx="0" cy="0"/>
+        </a:xfrm>
+      </p:grpSpPr>
       <p:sp>
         <p:nvSpPr>
           <p:cNvPr id="2" name="Title 1"/>
@@ -8997,7 +10936,6 @@
           <a:bodyPr/>
           <a:lstStyle/>
           <a:p>
-            <a:pPr/>
             <a:r>
               <a:rPr>
                 <a:latin typeface="Consolas"/>
@@ -9018,7 +10956,6 @@
             </a:r>
           </a:p>
           <a:p>
-            <a:pPr/>
             <a:r>
               <a:rPr>
                 <a:latin typeface="Consolas"/>
@@ -9048,7 +10985,6 @@
             </a:r>
           </a:p>
           <a:p>
-            <a:pPr/>
             <a:r>
               <a:rPr>
                 <a:latin typeface="Consolas"/>
@@ -9069,7 +11005,6 @@
             </a:r>
           </a:p>
           <a:p>
-            <a:pPr/>
             <a:r>
               <a:rPr b="1"/>
               <a:t>연습 0.1 ★</a:t>
@@ -9106,7 +11041,6 @@
             </a:r>
           </a:p>
           <a:p>
-            <a:pPr/>
             <a:r>
               <a:t>다음 주: 이 계산이 서 있는 바닥, 도로망 데이터를 직접 엽니다 (교재 2장).</a:t>
             </a:r>
@@ -9161,7 +11095,7 @@
           <a:p>
             <a:fld id="{C1FF6DA9-008F-8B48-92A6-B652298478BF}" type="slidenum">
               <a:rPr lang="en-US" smtClean="0"/>
-              <a:t>‹#›</a:t>
+              <a:t>33</a:t>
             </a:fld>
             <a:endParaRPr lang="en-US"/>
           </a:p>
@@ -9209,7 +11143,7 @@
 </file>
 
 <file path=ppt/slides/slide4.xml><?xml version="1.0" encoding="utf-8"?>
-<p:sld xmlns:a="http://schemas.openxmlformats.org/drawingml/2006/main" xmlns:p="http://schemas.openxmlformats.org/presentationml/2006/main" xmlns:r="http://schemas.openxmlformats.org/officeDocument/2006/relationships">
+<p:sld xmlns:a="http://schemas.openxmlformats.org/drawingml/2006/main" xmlns:r="http://schemas.openxmlformats.org/officeDocument/2006/relationships" xmlns:p="http://schemas.openxmlformats.org/presentationml/2006/main">
   <p:cSld name="md:1.1#1|8dcf1619e2">
     <p:spTree>
       <p:nvGrpSpPr>
@@ -9217,7 +11151,14 @@
         <p:cNvGrpSpPr/>
         <p:nvPr/>
       </p:nvGrpSpPr>
-      <p:grpSpPr/>
+      <p:grpSpPr>
+        <a:xfrm>
+          <a:off x="0" y="0"/>
+          <a:ext cx="0" cy="0"/>
+          <a:chOff x="0" y="0"/>
+          <a:chExt cx="0" cy="0"/>
+        </a:xfrm>
+      </p:grpSpPr>
       <p:sp>
         <p:nvSpPr>
           <p:cNvPr id="2" name="Title 1"/>
@@ -9254,45 +11195,476 @@
           <a:bodyPr/>
           <a:lstStyle/>
           <a:p>
-            <a:pPr/>
-            <a:r>
-              <a:t>모빌리티 시스템은 사람과 물건을 옮기는 장치 전부입니다. 지하철과 버스, 택시, 자전거와 전동킥보드, 배달 오토바이, 그리고 두 발까지 포함합니다.</a:t>
-            </a:r>
-          </a:p>
-          <a:p>
-            <a:pPr/>
-            <a:r>
-              <a:t>무엇이 좋은 시스템인지는 누구에게 묻느냐에 따라 다릅니다.</a:t>
-            </a:r>
+            <a:r>
+              <a:rPr dirty="0" err="1"/>
+              <a:t>모빌리티</a:t>
+            </a:r>
+            <a:r>
+              <a:rPr dirty="0"/>
+              <a:t> </a:t>
+            </a:r>
+            <a:r>
+              <a:rPr dirty="0" err="1"/>
+              <a:t>시스템은</a:t>
+            </a:r>
+            <a:r>
+              <a:rPr dirty="0"/>
+              <a:t> </a:t>
+            </a:r>
+            <a:r>
+              <a:rPr dirty="0" err="1"/>
+              <a:t>사람과</a:t>
+            </a:r>
+            <a:r>
+              <a:rPr dirty="0"/>
+              <a:t> </a:t>
+            </a:r>
+            <a:r>
+              <a:rPr dirty="0" err="1"/>
+              <a:t>물건을</a:t>
+            </a:r>
+            <a:r>
+              <a:rPr dirty="0"/>
+              <a:t> </a:t>
+            </a:r>
+            <a:r>
+              <a:rPr dirty="0" err="1"/>
+              <a:t>옮기는</a:t>
+            </a:r>
+            <a:r>
+              <a:rPr dirty="0"/>
+              <a:t> </a:t>
+            </a:r>
+            <a:r>
+              <a:rPr dirty="0" err="1"/>
+              <a:t>장치</a:t>
+            </a:r>
+            <a:r>
+              <a:rPr dirty="0"/>
+              <a:t> </a:t>
+            </a:r>
+            <a:r>
+              <a:rPr dirty="0" err="1"/>
+              <a:t>전부입니다</a:t>
+            </a:r>
+            <a:r>
+              <a:rPr dirty="0"/>
+              <a:t>. </a:t>
+            </a:r>
+            <a:r>
+              <a:rPr dirty="0" err="1"/>
+              <a:t>지하철과</a:t>
+            </a:r>
+            <a:r>
+              <a:rPr dirty="0"/>
+              <a:t> </a:t>
+            </a:r>
+            <a:r>
+              <a:rPr dirty="0" err="1"/>
+              <a:t>버스</a:t>
+            </a:r>
+            <a:r>
+              <a:rPr dirty="0"/>
+              <a:t>, </a:t>
+            </a:r>
+            <a:r>
+              <a:rPr dirty="0" err="1"/>
+              <a:t>택시</a:t>
+            </a:r>
+            <a:r>
+              <a:rPr dirty="0"/>
+              <a:t>, </a:t>
+            </a:r>
+            <a:r>
+              <a:rPr dirty="0" err="1"/>
+              <a:t>자전거와</a:t>
+            </a:r>
+            <a:r>
+              <a:rPr dirty="0"/>
+              <a:t> </a:t>
+            </a:r>
+            <a:r>
+              <a:rPr dirty="0" err="1"/>
+              <a:t>전동킥보드</a:t>
+            </a:r>
+            <a:r>
+              <a:rPr dirty="0"/>
+              <a:t>, </a:t>
+            </a:r>
+            <a:r>
+              <a:rPr dirty="0" err="1"/>
+              <a:t>배달</a:t>
+            </a:r>
+            <a:r>
+              <a:rPr dirty="0"/>
+              <a:t> </a:t>
+            </a:r>
+            <a:r>
+              <a:rPr dirty="0" err="1"/>
+              <a:t>오토바이</a:t>
+            </a:r>
+            <a:r>
+              <a:rPr dirty="0"/>
+              <a:t>, </a:t>
+            </a:r>
+            <a:r>
+              <a:rPr dirty="0" err="1"/>
+              <a:t>그리고</a:t>
+            </a:r>
+            <a:r>
+              <a:rPr dirty="0"/>
+              <a:t> </a:t>
+            </a:r>
+            <a:r>
+              <a:rPr dirty="0" err="1"/>
+              <a:t>두</a:t>
+            </a:r>
+            <a:r>
+              <a:rPr dirty="0"/>
+              <a:t> </a:t>
+            </a:r>
+            <a:r>
+              <a:rPr dirty="0" err="1"/>
+              <a:t>발까지</a:t>
+            </a:r>
+            <a:r>
+              <a:rPr dirty="0"/>
+              <a:t> </a:t>
+            </a:r>
+            <a:r>
+              <a:rPr dirty="0" err="1"/>
+              <a:t>포함합니다</a:t>
+            </a:r>
+            <a:r>
+              <a:rPr dirty="0"/>
+              <a:t>.</a:t>
+            </a:r>
+            <a:endParaRPr lang="en-US" dirty="0"/>
+          </a:p>
+          <a:p>
+            <a:endParaRPr dirty="0"/>
+          </a:p>
+          <a:p>
+            <a:r>
+              <a:rPr dirty="0" err="1"/>
+              <a:t>무엇이</a:t>
+            </a:r>
+            <a:r>
+              <a:rPr dirty="0"/>
+              <a:t> </a:t>
+            </a:r>
+            <a:r>
+              <a:rPr dirty="0" err="1"/>
+              <a:t>좋은</a:t>
+            </a:r>
+            <a:r>
+              <a:rPr dirty="0"/>
+              <a:t> </a:t>
+            </a:r>
+            <a:r>
+              <a:rPr dirty="0" err="1"/>
+              <a:t>시스템인지는</a:t>
+            </a:r>
+            <a:r>
+              <a:rPr dirty="0"/>
+              <a:t> </a:t>
+            </a:r>
+            <a:r>
+              <a:rPr dirty="0" err="1"/>
+              <a:t>누구에게</a:t>
+            </a:r>
+            <a:r>
+              <a:rPr dirty="0"/>
+              <a:t> </a:t>
+            </a:r>
+            <a:r>
+              <a:rPr dirty="0" err="1"/>
+              <a:t>묻느냐에</a:t>
+            </a:r>
+            <a:r>
+              <a:rPr dirty="0"/>
+              <a:t> </a:t>
+            </a:r>
+            <a:r>
+              <a:rPr dirty="0" err="1"/>
+              <a:t>따라</a:t>
+            </a:r>
+            <a:r>
+              <a:rPr dirty="0"/>
+              <a:t> </a:t>
+            </a:r>
+            <a:r>
+              <a:rPr dirty="0" err="1"/>
+              <a:t>다릅니다</a:t>
+            </a:r>
+            <a:r>
+              <a:rPr dirty="0"/>
+              <a:t>.</a:t>
+            </a:r>
+            <a:endParaRPr lang="en-US" dirty="0"/>
+          </a:p>
+          <a:p>
+            <a:endParaRPr dirty="0"/>
           </a:p>
           <a:p>
             <a:pPr lvl="1"/>
             <a:r>
-              <a:rPr b="1"/>
+              <a:rPr b="1" dirty="0" err="1"/>
               <a:t>승객</a:t>
             </a:r>
             <a:r>
-              <a:t>은 빨리 오고 빨리 가기를 바랍니다. 대기시간과 통행시간이 짧아야 합니다.</a:t>
+              <a:rPr dirty="0" err="1"/>
+              <a:t>은</a:t>
+            </a:r>
+            <a:r>
+              <a:rPr dirty="0"/>
+              <a:t> </a:t>
+            </a:r>
+            <a:r>
+              <a:rPr dirty="0" err="1"/>
+              <a:t>빨리</a:t>
+            </a:r>
+            <a:r>
+              <a:rPr dirty="0"/>
+              <a:t> </a:t>
+            </a:r>
+            <a:r>
+              <a:rPr dirty="0" err="1"/>
+              <a:t>오고</a:t>
+            </a:r>
+            <a:r>
+              <a:rPr dirty="0"/>
+              <a:t> </a:t>
+            </a:r>
+            <a:r>
+              <a:rPr dirty="0" err="1"/>
+              <a:t>빨리</a:t>
+            </a:r>
+            <a:r>
+              <a:rPr dirty="0"/>
+              <a:t> </a:t>
+            </a:r>
+            <a:r>
+              <a:rPr dirty="0" err="1"/>
+              <a:t>가기를</a:t>
+            </a:r>
+            <a:r>
+              <a:rPr dirty="0"/>
+              <a:t> </a:t>
+            </a:r>
+            <a:r>
+              <a:rPr dirty="0" err="1"/>
+              <a:t>바랍니다</a:t>
+            </a:r>
+            <a:r>
+              <a:rPr dirty="0"/>
+              <a:t>. </a:t>
+            </a:r>
+            <a:r>
+              <a:rPr dirty="0" err="1"/>
+              <a:t>대기시간과</a:t>
+            </a:r>
+            <a:r>
+              <a:rPr dirty="0"/>
+              <a:t> </a:t>
+            </a:r>
+            <a:r>
+              <a:rPr dirty="0" err="1"/>
+              <a:t>통행시간이</a:t>
+            </a:r>
+            <a:r>
+              <a:rPr dirty="0"/>
+              <a:t> </a:t>
+            </a:r>
+            <a:r>
+              <a:rPr dirty="0" err="1"/>
+              <a:t>짧아야</a:t>
+            </a:r>
+            <a:r>
+              <a:rPr dirty="0"/>
+              <a:t> </a:t>
+            </a:r>
+            <a:r>
+              <a:rPr dirty="0" err="1"/>
+              <a:t>합니다</a:t>
+            </a:r>
+            <a:r>
+              <a:rPr dirty="0"/>
+              <a:t>.</a:t>
             </a:r>
           </a:p>
           <a:p>
             <a:pPr lvl="1"/>
             <a:r>
-              <a:rPr b="1"/>
+              <a:rPr b="1" dirty="0" err="1"/>
               <a:t>운영자</a:t>
             </a:r>
             <a:r>
-              <a:t>는 차를 놀리고 싶지 않습니다. 차량 한 대가 하루에 몇 명을 태웠는지가 중요합니다.</a:t>
+              <a:rPr dirty="0" err="1"/>
+              <a:t>는</a:t>
+            </a:r>
+            <a:r>
+              <a:rPr dirty="0"/>
+              <a:t> </a:t>
+            </a:r>
+            <a:r>
+              <a:rPr dirty="0" err="1"/>
+              <a:t>차를</a:t>
+            </a:r>
+            <a:r>
+              <a:rPr dirty="0"/>
+              <a:t> </a:t>
+            </a:r>
+            <a:r>
+              <a:rPr dirty="0" err="1"/>
+              <a:t>놀리고</a:t>
+            </a:r>
+            <a:r>
+              <a:rPr dirty="0"/>
+              <a:t> </a:t>
+            </a:r>
+            <a:r>
+              <a:rPr dirty="0" err="1"/>
+              <a:t>싶지</a:t>
+            </a:r>
+            <a:r>
+              <a:rPr dirty="0"/>
+              <a:t> </a:t>
+            </a:r>
+            <a:r>
+              <a:rPr dirty="0" err="1"/>
+              <a:t>않습니다</a:t>
+            </a:r>
+            <a:r>
+              <a:rPr dirty="0"/>
+              <a:t>. </a:t>
+            </a:r>
+            <a:r>
+              <a:rPr dirty="0" err="1"/>
+              <a:t>차량</a:t>
+            </a:r>
+            <a:r>
+              <a:rPr dirty="0"/>
+              <a:t> </a:t>
+            </a:r>
+            <a:r>
+              <a:rPr dirty="0" err="1"/>
+              <a:t>한</a:t>
+            </a:r>
+            <a:r>
+              <a:rPr dirty="0"/>
+              <a:t> </a:t>
+            </a:r>
+            <a:r>
+              <a:rPr dirty="0" err="1"/>
+              <a:t>대가</a:t>
+            </a:r>
+            <a:r>
+              <a:rPr dirty="0"/>
+              <a:t> </a:t>
+            </a:r>
+            <a:r>
+              <a:rPr dirty="0" err="1"/>
+              <a:t>하루에</a:t>
+            </a:r>
+            <a:r>
+              <a:rPr dirty="0"/>
+              <a:t> </a:t>
+            </a:r>
+            <a:r>
+              <a:rPr dirty="0" err="1"/>
+              <a:t>몇</a:t>
+            </a:r>
+            <a:r>
+              <a:rPr dirty="0"/>
+              <a:t> </a:t>
+            </a:r>
+            <a:r>
+              <a:rPr dirty="0" err="1"/>
+              <a:t>명을</a:t>
+            </a:r>
+            <a:r>
+              <a:rPr dirty="0"/>
+              <a:t> </a:t>
+            </a:r>
+            <a:r>
+              <a:rPr dirty="0" err="1"/>
+              <a:t>태웠는지가</a:t>
+            </a:r>
+            <a:r>
+              <a:rPr dirty="0"/>
+              <a:t> </a:t>
+            </a:r>
+            <a:r>
+              <a:rPr dirty="0" err="1"/>
+              <a:t>중요합니다</a:t>
+            </a:r>
+            <a:r>
+              <a:rPr dirty="0"/>
+              <a:t>.</a:t>
             </a:r>
           </a:p>
           <a:p>
             <a:pPr lvl="1"/>
             <a:r>
-              <a:rPr b="1"/>
+              <a:rPr b="1" dirty="0" err="1"/>
               <a:t>도시</a:t>
             </a:r>
             <a:r>
-              <a:t>는 도로가 막히지 않고 배기가스가 적기를 바랍니다.</a:t>
+              <a:rPr dirty="0" err="1"/>
+              <a:t>는</a:t>
+            </a:r>
+            <a:r>
+              <a:rPr dirty="0"/>
+              <a:t> </a:t>
+            </a:r>
+            <a:r>
+              <a:rPr dirty="0" err="1"/>
+              <a:t>도로가</a:t>
+            </a:r>
+            <a:r>
+              <a:rPr dirty="0"/>
+              <a:t> </a:t>
+            </a:r>
+            <a:r>
+              <a:rPr dirty="0" err="1"/>
+              <a:t>막히지</a:t>
+            </a:r>
+            <a:r>
+              <a:rPr dirty="0"/>
+              <a:t> </a:t>
+            </a:r>
+            <a:r>
+              <a:rPr dirty="0" err="1"/>
+              <a:t>않고</a:t>
+            </a:r>
+            <a:r>
+              <a:rPr dirty="0"/>
+              <a:t> </a:t>
+            </a:r>
+            <a:r>
+              <a:rPr dirty="0" err="1"/>
+              <a:t>배기가스가</a:t>
+            </a:r>
+            <a:r>
+              <a:rPr dirty="0"/>
+              <a:t> </a:t>
+            </a:r>
+            <a:r>
+              <a:rPr dirty="0" err="1"/>
+              <a:t>적기를</a:t>
+            </a:r>
+            <a:r>
+              <a:rPr dirty="0"/>
+              <a:t> </a:t>
+            </a:r>
+            <a:r>
+              <a:rPr dirty="0" err="1"/>
+              <a:t>바랍니다</a:t>
+            </a:r>
+            <a:r>
+              <a:rPr dirty="0"/>
+              <a:t>.</a:t>
             </a:r>
           </a:p>
         </p:txBody>
@@ -9345,7 +11717,7 @@
           <a:p>
             <a:fld id="{C1FF6DA9-008F-8B48-92A6-B652298478BF}" type="slidenum">
               <a:rPr lang="en-US" smtClean="0"/>
-              <a:t>‹#›</a:t>
+              <a:t>4</a:t>
             </a:fld>
             <a:endParaRPr lang="en-US"/>
           </a:p>
@@ -9393,7 +11765,7 @@
 </file>
 
 <file path=ppt/slides/slide5.xml><?xml version="1.0" encoding="utf-8"?>
-<p:sld xmlns:a="http://schemas.openxmlformats.org/drawingml/2006/main" xmlns:p="http://schemas.openxmlformats.org/presentationml/2006/main" xmlns:r="http://schemas.openxmlformats.org/officeDocument/2006/relationships">
+<p:sld xmlns:a="http://schemas.openxmlformats.org/drawingml/2006/main" xmlns:r="http://schemas.openxmlformats.org/officeDocument/2006/relationships" xmlns:p="http://schemas.openxmlformats.org/presentationml/2006/main">
   <p:cSld name="md:1.1-2#1|459374b563">
     <p:spTree>
       <p:nvGrpSpPr>
@@ -9401,7 +11773,14 @@
         <p:cNvGrpSpPr/>
         <p:nvPr/>
       </p:nvGrpSpPr>
-      <p:grpSpPr/>
+      <p:grpSpPr>
+        <a:xfrm>
+          <a:off x="0" y="0"/>
+          <a:ext cx="0" cy="0"/>
+          <a:chOff x="0" y="0"/>
+          <a:chExt cx="0" cy="0"/>
+        </a:xfrm>
+      </p:grpSpPr>
       <p:sp>
         <p:nvSpPr>
           <p:cNvPr id="2" name="Title 1"/>
@@ -9471,7 +11850,7 @@
           <a:p>
             <a:fld id="{C1FF6DA9-008F-8B48-92A6-B652298478BF}" type="slidenum">
               <a:rPr lang="en-US" smtClean="0"/>
-              <a:t>‹#›</a:t>
+              <a:t>5</a:t>
             </a:fld>
             <a:endParaRPr lang="en-US"/>
           </a:p>
@@ -9600,14 +11979,32 @@
                 <a:tableStyleId>{5940675A-B579-460E-94D1-54222C63F5DA}</a:tableStyleId>
               </a:tblPr>
               <a:tblGrid>
-                <a:gridCol w="1558630"/>
-                <a:gridCol w="4828505"/>
-                <a:gridCol w="4707279"/>
+                <a:gridCol w="1558630">
+                  <a:extLst>
+                    <a:ext uri="{9D8B030D-6E8A-4147-A177-3AD203B41FA5}">
+                      <a16:colId xmlns:a16="http://schemas.microsoft.com/office/drawing/2014/main" val="20000"/>
+                    </a:ext>
+                  </a:extLst>
+                </a:gridCol>
+                <a:gridCol w="4828505">
+                  <a:extLst>
+                    <a:ext uri="{9D8B030D-6E8A-4147-A177-3AD203B41FA5}">
+                      <a16:colId xmlns:a16="http://schemas.microsoft.com/office/drawing/2014/main" val="20001"/>
+                    </a:ext>
+                  </a:extLst>
+                </a:gridCol>
+                <a:gridCol w="4707279">
+                  <a:extLst>
+                    <a:ext uri="{9D8B030D-6E8A-4147-A177-3AD203B41FA5}">
+                      <a16:colId xmlns:a16="http://schemas.microsoft.com/office/drawing/2014/main" val="20002"/>
+                    </a:ext>
+                  </a:extLst>
+                </a:gridCol>
               </a:tblGrid>
               <a:tr h="331978">
                 <a:tc>
                   <a:txBody>
-                    <a:bodyPr wrap="square"/>
+                    <a:bodyPr/>
                     <a:lstStyle/>
                     <a:p>
                       <a:pPr algn="ctr"/>
@@ -9625,7 +12022,7 @@
                 </a:tc>
                 <a:tc>
                   <a:txBody>
-                    <a:bodyPr wrap="square"/>
+                    <a:bodyPr/>
                     <a:lstStyle/>
                     <a:p>
                       <a:pPr algn="ctr"/>
@@ -9643,7 +12040,7 @@
                 </a:tc>
                 <a:tc>
                   <a:txBody>
-                    <a:bodyPr wrap="square"/>
+                    <a:bodyPr/>
                     <a:lstStyle/>
                     <a:p>
                       <a:pPr algn="ctr"/>
@@ -9659,11 +12056,16 @@
                     </a:solidFill>
                   </a:tcPr>
                 </a:tc>
+                <a:extLst>
+                  <a:ext uri="{0D108BD9-81ED-4DB2-BD59-A6C34878D82A}">
+                    <a16:rowId xmlns:a16="http://schemas.microsoft.com/office/drawing/2014/main" val="10000"/>
+                  </a:ext>
+                </a:extLst>
               </a:tr>
               <a:tr h="331978">
                 <a:tc>
                   <a:txBody>
-                    <a:bodyPr wrap="square"/>
+                    <a:bodyPr/>
                     <a:lstStyle/>
                     <a:p>
                       <a:r>
@@ -9676,7 +12078,7 @@
                 </a:tc>
                 <a:tc>
                   <a:txBody>
-                    <a:bodyPr wrap="square"/>
+                    <a:bodyPr/>
                     <a:lstStyle/>
                     <a:p>
                       <a:r>
@@ -9689,7 +12091,7 @@
                 </a:tc>
                 <a:tc>
                   <a:txBody>
-                    <a:bodyPr wrap="square"/>
+                    <a:bodyPr/>
                     <a:lstStyle/>
                     <a:p>
                       <a:r>
@@ -9700,11 +12102,16 @@
                   </a:txBody>
                   <a:tcPr marL="54864" marR="54864" marT="27432" marB="27432"/>
                 </a:tc>
+                <a:extLst>
+                  <a:ext uri="{0D108BD9-81ED-4DB2-BD59-A6C34878D82A}">
+                    <a16:rowId xmlns:a16="http://schemas.microsoft.com/office/drawing/2014/main" val="10001"/>
+                  </a:ext>
+                </a:extLst>
               </a:tr>
               <a:tr h="331978">
                 <a:tc>
                   <a:txBody>
-                    <a:bodyPr wrap="square"/>
+                    <a:bodyPr/>
                     <a:lstStyle/>
                     <a:p>
                       <a:r>
@@ -9717,7 +12124,7 @@
                 </a:tc>
                 <a:tc>
                   <a:txBody>
-                    <a:bodyPr wrap="square"/>
+                    <a:bodyPr/>
                     <a:lstStyle/>
                     <a:p>
                       <a:r>
@@ -9730,7 +12137,7 @@
                 </a:tc>
                 <a:tc>
                   <a:txBody>
-                    <a:bodyPr wrap="square"/>
+                    <a:bodyPr/>
                     <a:lstStyle/>
                     <a:p>
                       <a:r>
@@ -9741,11 +12148,16 @@
                   </a:txBody>
                   <a:tcPr marL="54864" marR="54864" marT="27432" marB="27432"/>
                 </a:tc>
+                <a:extLst>
+                  <a:ext uri="{0D108BD9-81ED-4DB2-BD59-A6C34878D82A}">
+                    <a16:rowId xmlns:a16="http://schemas.microsoft.com/office/drawing/2014/main" val="10002"/>
+                  </a:ext>
+                </a:extLst>
               </a:tr>
               <a:tr h="331978">
                 <a:tc>
                   <a:txBody>
-                    <a:bodyPr wrap="square"/>
+                    <a:bodyPr/>
                     <a:lstStyle/>
                     <a:p>
                       <a:r>
@@ -9758,7 +12170,7 @@
                 </a:tc>
                 <a:tc>
                   <a:txBody>
-                    <a:bodyPr wrap="square"/>
+                    <a:bodyPr/>
                     <a:lstStyle/>
                     <a:p>
                       <a:r>
@@ -9771,7 +12183,7 @@
                 </a:tc>
                 <a:tc>
                   <a:txBody>
-                    <a:bodyPr wrap="square"/>
+                    <a:bodyPr/>
                     <a:lstStyle/>
                     <a:p>
                       <a:r>
@@ -9782,6 +12194,11 @@
                   </a:txBody>
                   <a:tcPr marL="54864" marR="54864" marT="27432" marB="27432"/>
                 </a:tc>
+                <a:extLst>
+                  <a:ext uri="{0D108BD9-81ED-4DB2-BD59-A6C34878D82A}">
+                    <a16:rowId xmlns:a16="http://schemas.microsoft.com/office/drawing/2014/main" val="10003"/>
+                  </a:ext>
+                </a:extLst>
               </a:tr>
             </a:tbl>
           </a:graphicData>
@@ -9796,7 +12213,7 @@
 </file>
 
 <file path=ppt/slides/slide6.xml><?xml version="1.0" encoding="utf-8"?>
-<p:sld xmlns:a="http://schemas.openxmlformats.org/drawingml/2006/main" xmlns:p="http://schemas.openxmlformats.org/presentationml/2006/main" xmlns:r="http://schemas.openxmlformats.org/officeDocument/2006/relationships">
+<p:sld xmlns:a="http://schemas.openxmlformats.org/drawingml/2006/main" xmlns:r="http://schemas.openxmlformats.org/officeDocument/2006/relationships" xmlns:p="http://schemas.openxmlformats.org/presentationml/2006/main">
   <p:cSld name="md:1.2#1|1221f5f44b">
     <p:spTree>
       <p:nvGrpSpPr>
@@ -9804,7 +12221,14 @@
         <p:cNvGrpSpPr/>
         <p:nvPr/>
       </p:nvGrpSpPr>
-      <p:grpSpPr/>
+      <p:grpSpPr>
+        <a:xfrm>
+          <a:off x="0" y="0"/>
+          <a:ext cx="0" cy="0"/>
+          <a:chOff x="0" y="0"/>
+          <a:chExt cx="0" cy="0"/>
+        </a:xfrm>
+      </p:grpSpPr>
       <p:sp>
         <p:nvSpPr>
           <p:cNvPr id="2" name="Title 1"/>
@@ -9841,40 +12265,461 @@
           <a:bodyPr/>
           <a:lstStyle/>
           <a:p>
-            <a:pPr/>
-            <a:r>
-              <a:t>가장 확실한 답은 실제로 20대를 한 달 굴려 보는 것입니다. 그런데 한 달을 굴려도 얻는 것은 시나리오 하나입니다.</a:t>
-            </a:r>
-          </a:p>
-          <a:p>
-            <a:pPr/>
-            <a:r>
-              <a:t>다음 질문에는 여전히 답할 수 없습니다.</a:t>
+            <a:r>
+              <a:rPr dirty="0" err="1"/>
+              <a:t>가장</a:t>
+            </a:r>
+            <a:r>
+              <a:rPr dirty="0"/>
+              <a:t> </a:t>
+            </a:r>
+            <a:r>
+              <a:rPr dirty="0" err="1"/>
+              <a:t>확실한</a:t>
+            </a:r>
+            <a:r>
+              <a:rPr dirty="0"/>
+              <a:t> </a:t>
+            </a:r>
+            <a:r>
+              <a:rPr dirty="0" err="1"/>
+              <a:t>답은</a:t>
+            </a:r>
+            <a:r>
+              <a:rPr dirty="0"/>
+              <a:t> </a:t>
+            </a:r>
+            <a:r>
+              <a:rPr dirty="0" err="1"/>
+              <a:t>실제로</a:t>
+            </a:r>
+            <a:r>
+              <a:rPr dirty="0"/>
+              <a:t> 20대를 </a:t>
+            </a:r>
+            <a:r>
+              <a:rPr dirty="0" err="1"/>
+              <a:t>한</a:t>
+            </a:r>
+            <a:r>
+              <a:rPr dirty="0"/>
+              <a:t> </a:t>
+            </a:r>
+            <a:r>
+              <a:rPr dirty="0" err="1"/>
+              <a:t>달</a:t>
+            </a:r>
+            <a:r>
+              <a:rPr dirty="0"/>
+              <a:t> </a:t>
+            </a:r>
+            <a:r>
+              <a:rPr dirty="0" err="1"/>
+              <a:t>굴려</a:t>
+            </a:r>
+            <a:r>
+              <a:rPr dirty="0"/>
+              <a:t> </a:t>
+            </a:r>
+            <a:r>
+              <a:rPr dirty="0" err="1"/>
+              <a:t>보는</a:t>
+            </a:r>
+            <a:r>
+              <a:rPr dirty="0"/>
+              <a:t> </a:t>
+            </a:r>
+            <a:r>
+              <a:rPr dirty="0" err="1"/>
+              <a:t>것입니다</a:t>
+            </a:r>
+            <a:r>
+              <a:rPr dirty="0"/>
+              <a:t>. </a:t>
+            </a:r>
+            <a:r>
+              <a:rPr dirty="0" err="1"/>
+              <a:t>그런데</a:t>
+            </a:r>
+            <a:r>
+              <a:rPr dirty="0"/>
+              <a:t> </a:t>
+            </a:r>
+            <a:r>
+              <a:rPr dirty="0" err="1"/>
+              <a:t>한</a:t>
+            </a:r>
+            <a:r>
+              <a:rPr dirty="0"/>
+              <a:t> </a:t>
+            </a:r>
+            <a:r>
+              <a:rPr dirty="0" err="1"/>
+              <a:t>달을</a:t>
+            </a:r>
+            <a:r>
+              <a:rPr dirty="0"/>
+              <a:t> </a:t>
+            </a:r>
+            <a:r>
+              <a:rPr dirty="0" err="1"/>
+              <a:t>굴려도</a:t>
+            </a:r>
+            <a:r>
+              <a:rPr dirty="0"/>
+              <a:t> </a:t>
+            </a:r>
+            <a:r>
+              <a:rPr dirty="0" err="1"/>
+              <a:t>얻는</a:t>
+            </a:r>
+            <a:r>
+              <a:rPr dirty="0"/>
+              <a:t> </a:t>
+            </a:r>
+            <a:r>
+              <a:rPr dirty="0" err="1"/>
+              <a:t>것은</a:t>
+            </a:r>
+            <a:r>
+              <a:rPr dirty="0"/>
+              <a:t> </a:t>
+            </a:r>
+            <a:r>
+              <a:rPr dirty="0" err="1"/>
+              <a:t>시나리오</a:t>
+            </a:r>
+            <a:r>
+              <a:rPr dirty="0"/>
+              <a:t> </a:t>
+            </a:r>
+            <a:r>
+              <a:rPr dirty="0" err="1"/>
+              <a:t>하나입니다</a:t>
+            </a:r>
+            <a:r>
+              <a:rPr dirty="0"/>
+              <a:t>.</a:t>
+            </a:r>
+            <a:endParaRPr lang="en-US" dirty="0"/>
+          </a:p>
+          <a:p>
+            <a:endParaRPr dirty="0"/>
+          </a:p>
+          <a:p>
+            <a:r>
+              <a:rPr dirty="0" err="1"/>
+              <a:t>다음</a:t>
+            </a:r>
+            <a:r>
+              <a:rPr dirty="0"/>
+              <a:t> </a:t>
+            </a:r>
+            <a:r>
+              <a:rPr dirty="0" err="1"/>
+              <a:t>질문에는</a:t>
+            </a:r>
+            <a:r>
+              <a:rPr dirty="0"/>
+              <a:t> </a:t>
+            </a:r>
+            <a:r>
+              <a:rPr dirty="0" err="1"/>
+              <a:t>여전히</a:t>
+            </a:r>
+            <a:r>
+              <a:rPr dirty="0"/>
+              <a:t> </a:t>
+            </a:r>
+            <a:r>
+              <a:rPr dirty="0" err="1"/>
+              <a:t>답할</a:t>
+            </a:r>
+            <a:r>
+              <a:rPr dirty="0"/>
+              <a:t> </a:t>
+            </a:r>
+            <a:r>
+              <a:rPr dirty="0" err="1"/>
+              <a:t>수</a:t>
+            </a:r>
+            <a:r>
+              <a:rPr dirty="0"/>
+              <a:t> </a:t>
+            </a:r>
+            <a:r>
+              <a:rPr dirty="0" err="1"/>
+              <a:t>없습니다</a:t>
+            </a:r>
+            <a:r>
+              <a:rPr dirty="0"/>
+              <a:t>.</a:t>
             </a:r>
           </a:p>
           <a:p>
             <a:pPr lvl="1"/>
             <a:r>
-              <a:t>10대였으면 어땠을까</a:t>
-            </a:r>
+              <a:rPr lang="en-US" altLang="ko-KR" dirty="0"/>
+              <a:t>1.</a:t>
+            </a:r>
+            <a:r>
+              <a:rPr lang="ko-KR" altLang="en-US" dirty="0"/>
+              <a:t> </a:t>
+            </a:r>
+            <a:r>
+              <a:rPr dirty="0"/>
+              <a:t>10대였으면 </a:t>
+            </a:r>
+            <a:r>
+              <a:rPr dirty="0" err="1"/>
+              <a:t>어땠을까</a:t>
+            </a:r>
+            <a:endParaRPr dirty="0"/>
           </a:p>
           <a:p>
             <a:pPr lvl="1"/>
             <a:r>
-              <a:t>차고지를 두 곳으로 나눴으면</a:t>
-            </a:r>
+              <a:rPr lang="en-US" altLang="ko-KR" dirty="0"/>
+              <a:t>2.</a:t>
+            </a:r>
+            <a:r>
+              <a:rPr lang="ko-KR" altLang="en-US" dirty="0"/>
+              <a:t> </a:t>
+            </a:r>
+            <a:r>
+              <a:rPr dirty="0" err="1"/>
+              <a:t>차고지를</a:t>
+            </a:r>
+            <a:r>
+              <a:rPr dirty="0"/>
+              <a:t> </a:t>
+            </a:r>
+            <a:r>
+              <a:rPr dirty="0" err="1"/>
+              <a:t>두</a:t>
+            </a:r>
+            <a:r>
+              <a:rPr dirty="0"/>
+              <a:t> </a:t>
+            </a:r>
+            <a:r>
+              <a:rPr dirty="0" err="1"/>
+              <a:t>곳으로</a:t>
+            </a:r>
+            <a:r>
+              <a:rPr dirty="0"/>
+              <a:t> </a:t>
+            </a:r>
+            <a:r>
+              <a:rPr dirty="0" err="1"/>
+              <a:t>나눴으면</a:t>
+            </a:r>
+            <a:endParaRPr dirty="0"/>
           </a:p>
           <a:p>
             <a:pPr lvl="1"/>
             <a:r>
-              <a:t>가까운 차 대신 빨리 도착할 차를 보냈으면</a:t>
-            </a:r>
-          </a:p>
-          <a:p>
-            <a:pPr/>
-            <a:r>
-              <a:t>대안끼리 비교하려면 같은 한 달을 조건만 바꿔 다시 살아야 합니다. 도시에는 그런 되감기 버튼이 없습니다.</a:t>
-            </a:r>
+              <a:rPr lang="en-US" altLang="ko-KR" dirty="0"/>
+              <a:t>3.</a:t>
+            </a:r>
+            <a:r>
+              <a:rPr lang="ko-KR" altLang="en-US" dirty="0"/>
+              <a:t> </a:t>
+            </a:r>
+            <a:r>
+              <a:rPr dirty="0" err="1"/>
+              <a:t>가까운</a:t>
+            </a:r>
+            <a:r>
+              <a:rPr dirty="0"/>
+              <a:t> </a:t>
+            </a:r>
+            <a:r>
+              <a:rPr dirty="0" err="1"/>
+              <a:t>차</a:t>
+            </a:r>
+            <a:r>
+              <a:rPr dirty="0"/>
+              <a:t> </a:t>
+            </a:r>
+            <a:r>
+              <a:rPr dirty="0" err="1"/>
+              <a:t>대신</a:t>
+            </a:r>
+            <a:r>
+              <a:rPr dirty="0"/>
+              <a:t> </a:t>
+            </a:r>
+            <a:r>
+              <a:rPr dirty="0" err="1"/>
+              <a:t>빨리</a:t>
+            </a:r>
+            <a:r>
+              <a:rPr dirty="0"/>
+              <a:t> </a:t>
+            </a:r>
+            <a:r>
+              <a:rPr dirty="0" err="1"/>
+              <a:t>도착할</a:t>
+            </a:r>
+            <a:r>
+              <a:rPr dirty="0"/>
+              <a:t> </a:t>
+            </a:r>
+            <a:r>
+              <a:rPr dirty="0" err="1"/>
+              <a:t>차를</a:t>
+            </a:r>
+            <a:r>
+              <a:rPr dirty="0"/>
+              <a:t> </a:t>
+            </a:r>
+            <a:r>
+              <a:rPr dirty="0" err="1"/>
+              <a:t>보냈으면</a:t>
+            </a:r>
+            <a:endParaRPr dirty="0"/>
+          </a:p>
+          <a:p>
+            <a:endParaRPr lang="en-US" dirty="0"/>
+          </a:p>
+          <a:p>
+            <a:r>
+              <a:rPr dirty="0" err="1"/>
+              <a:t>대안끼리</a:t>
+            </a:r>
+            <a:r>
+              <a:rPr dirty="0"/>
+              <a:t> </a:t>
+            </a:r>
+            <a:r>
+              <a:rPr dirty="0" err="1"/>
+              <a:t>비교하려면</a:t>
+            </a:r>
+            <a:r>
+              <a:rPr dirty="0"/>
+              <a:t> </a:t>
+            </a:r>
+            <a:r>
+              <a:rPr dirty="0" err="1"/>
+              <a:t>같은</a:t>
+            </a:r>
+            <a:r>
+              <a:rPr dirty="0"/>
+              <a:t> </a:t>
+            </a:r>
+            <a:r>
+              <a:rPr dirty="0" err="1"/>
+              <a:t>한</a:t>
+            </a:r>
+            <a:r>
+              <a:rPr dirty="0"/>
+              <a:t> </a:t>
+            </a:r>
+            <a:r>
+              <a:rPr dirty="0" err="1"/>
+              <a:t>달을</a:t>
+            </a:r>
+            <a:r>
+              <a:rPr dirty="0"/>
+              <a:t> </a:t>
+            </a:r>
+            <a:r>
+              <a:rPr dirty="0" err="1"/>
+              <a:t>조건만</a:t>
+            </a:r>
+            <a:r>
+              <a:rPr dirty="0"/>
+              <a:t> </a:t>
+            </a:r>
+            <a:r>
+              <a:rPr dirty="0" err="1"/>
+              <a:t>바꿔</a:t>
+            </a:r>
+            <a:r>
+              <a:rPr dirty="0"/>
+              <a:t> </a:t>
+            </a:r>
+            <a:r>
+              <a:rPr dirty="0" err="1"/>
+              <a:t>다시</a:t>
+            </a:r>
+            <a:r>
+              <a:rPr dirty="0"/>
+              <a:t> </a:t>
+            </a:r>
+            <a:r>
+              <a:rPr dirty="0" err="1"/>
+              <a:t>살아야</a:t>
+            </a:r>
+            <a:r>
+              <a:rPr dirty="0"/>
+              <a:t> </a:t>
+            </a:r>
+            <a:r>
+              <a:rPr dirty="0" err="1"/>
+              <a:t>합니다</a:t>
+            </a:r>
+            <a:r>
+              <a:rPr dirty="0"/>
+              <a:t>. </a:t>
+            </a:r>
+            <a:r>
+              <a:rPr dirty="0" err="1"/>
+              <a:t>도시에는</a:t>
+            </a:r>
+            <a:r>
+              <a:rPr dirty="0"/>
+              <a:t> </a:t>
+            </a:r>
+            <a:r>
+              <a:rPr dirty="0" err="1"/>
+              <a:t>그런</a:t>
+            </a:r>
+            <a:r>
+              <a:rPr dirty="0"/>
+              <a:t> </a:t>
+            </a:r>
+            <a:r>
+              <a:rPr dirty="0" err="1"/>
+              <a:t>되감기</a:t>
+            </a:r>
+            <a:r>
+              <a:rPr dirty="0"/>
+              <a:t> </a:t>
+            </a:r>
+            <a:r>
+              <a:rPr dirty="0" err="1"/>
+              <a:t>버튼이</a:t>
+            </a:r>
+            <a:r>
+              <a:rPr dirty="0"/>
+              <a:t> </a:t>
+            </a:r>
+            <a:r>
+              <a:rPr dirty="0" err="1"/>
+              <a:t>없습니다</a:t>
+            </a:r>
+            <a:r>
+              <a:rPr dirty="0"/>
+              <a:t>.</a:t>
+            </a:r>
+            <a:endParaRPr lang="en-US" dirty="0"/>
+          </a:p>
+          <a:p>
+            <a:r>
+              <a:rPr lang="ko-KR" altLang="en-US" dirty="0"/>
+              <a:t>다양한 시나리오를 설정하고</a:t>
+            </a:r>
+            <a:r>
+              <a:rPr lang="en-US" altLang="ko-KR" dirty="0"/>
+              <a:t>,</a:t>
+            </a:r>
+            <a:r>
+              <a:rPr lang="ko-KR" altLang="en-US" dirty="0"/>
+              <a:t> 시나리오의 효과를 평가할 수 있는 것이 시뮬레이션의 가장 큰 장점입니다</a:t>
+            </a:r>
+            <a:endParaRPr dirty="0"/>
           </a:p>
         </p:txBody>
       </p:sp>
@@ -9926,7 +12771,7 @@
           <a:p>
             <a:fld id="{C1FF6DA9-008F-8B48-92A6-B652298478BF}" type="slidenum">
               <a:rPr lang="en-US" smtClean="0"/>
-              <a:t>‹#›</a:t>
+              <a:t>6</a:t>
             </a:fld>
             <a:endParaRPr lang="en-US"/>
           </a:p>
@@ -9974,7 +12819,7 @@
 </file>
 
 <file path=ppt/slides/slide7.xml><?xml version="1.0" encoding="utf-8"?>
-<p:sld xmlns:a="http://schemas.openxmlformats.org/drawingml/2006/main" xmlns:p="http://schemas.openxmlformats.org/presentationml/2006/main" xmlns:r="http://schemas.openxmlformats.org/officeDocument/2006/relationships">
+<p:sld xmlns:a="http://schemas.openxmlformats.org/drawingml/2006/main" xmlns:r="http://schemas.openxmlformats.org/officeDocument/2006/relationships" xmlns:p="http://schemas.openxmlformats.org/presentationml/2006/main">
   <p:cSld name="md:1.2-2#1|53d6a28335">
     <p:spTree>
       <p:nvGrpSpPr>
@@ -9982,7 +12827,14 @@
         <p:cNvGrpSpPr/>
         <p:nvPr/>
       </p:nvGrpSpPr>
-      <p:grpSpPr/>
+      <p:grpSpPr>
+        <a:xfrm>
+          <a:off x="0" y="0"/>
+          <a:ext cx="0" cy="0"/>
+          <a:chOff x="0" y="0"/>
+          <a:chExt cx="0" cy="0"/>
+        </a:xfrm>
+      </p:grpSpPr>
       <p:sp>
         <p:nvSpPr>
           <p:cNvPr id="2" name="Title 1"/>
@@ -10019,19 +12871,16 @@
           <a:bodyPr/>
           <a:lstStyle/>
           <a:p>
-            <a:pPr/>
             <a:r>
               <a:t>도로망 위에 차량과 승객을 올려놓고 시간을 1분씩 밀면서, 몇 시 몇 분에 어떤 차가 어느 지점에 있었고 누구를 태웠는지를 전부 기록합니다.</a:t>
             </a:r>
           </a:p>
           <a:p>
-            <a:pPr/>
             <a:r>
               <a:t>차량 수를 10대로 바꿔 다시 돌리면, 같은 수요와 같은 도로망 위에서 두 조건의 평균 대기시간을 나란히 놓고 비교할 수 있습니다.</a:t>
             </a:r>
           </a:p>
           <a:p>
-            <a:pPr/>
             <a:r>
               <a:t>실제 운영과의 차이는 이것 하나입니다. 같은 하루를 조건만 바꿔 여러 번 살 수 있습니다.</a:t>
             </a:r>
@@ -10086,7 +12935,7 @@
           <a:p>
             <a:fld id="{C1FF6DA9-008F-8B48-92A6-B652298478BF}" type="slidenum">
               <a:rPr lang="en-US" smtClean="0"/>
-              <a:t>‹#›</a:t>
+              <a:t>7</a:t>
             </a:fld>
             <a:endParaRPr lang="en-US"/>
           </a:p>
@@ -10134,7 +12983,7 @@
 </file>
 
 <file path=ppt/slides/slide8.xml><?xml version="1.0" encoding="utf-8"?>
-<p:sld xmlns:a="http://schemas.openxmlformats.org/drawingml/2006/main" xmlns:p="http://schemas.openxmlformats.org/presentationml/2006/main" xmlns:r="http://schemas.openxmlformats.org/officeDocument/2006/relationships">
+<p:sld xmlns:a="http://schemas.openxmlformats.org/drawingml/2006/main" xmlns:r="http://schemas.openxmlformats.org/officeDocument/2006/relationships" xmlns:p="http://schemas.openxmlformats.org/presentationml/2006/main">
   <p:cSld name="md:1.2-3#1|f7993befc0">
     <p:spTree>
       <p:nvGrpSpPr>
@@ -10142,7 +12991,14 @@
         <p:cNvGrpSpPr/>
         <p:nvPr/>
       </p:nvGrpSpPr>
-      <p:grpSpPr/>
+      <p:grpSpPr>
+        <a:xfrm>
+          <a:off x="0" y="0"/>
+          <a:ext cx="0" cy="0"/>
+          <a:chOff x="0" y="0"/>
+          <a:chExt cx="0" cy="0"/>
+        </a:xfrm>
+      </p:grpSpPr>
       <p:sp>
         <p:nvSpPr>
           <p:cNvPr id="2" name="Title 1"/>
@@ -10155,12 +13011,60 @@
         </p:nvSpPr>
         <p:spPr/>
         <p:txBody>
-          <a:bodyPr/>
-          <a:lstStyle/>
-          <a:p>
-            <a:r>
-              <a:t>1.2 이미 있는 도구를 쓰면 되지 않는가</a:t>
-            </a:r>
+          <a:bodyPr>
+            <a:normAutofit/>
+          </a:bodyPr>
+          <a:lstStyle/>
+          <a:p>
+            <a:r>
+              <a:rPr sz="3200" dirty="0"/>
+              <a:t>1.2 </a:t>
+            </a:r>
+            <a:r>
+              <a:rPr sz="3200" dirty="0" err="1"/>
+              <a:t>이미</a:t>
+            </a:r>
+            <a:r>
+              <a:rPr sz="3200" dirty="0"/>
+              <a:t> </a:t>
+            </a:r>
+            <a:r>
+              <a:rPr sz="3200" dirty="0" err="1"/>
+              <a:t>있는</a:t>
+            </a:r>
+            <a:r>
+              <a:rPr sz="3200" dirty="0"/>
+              <a:t> </a:t>
+            </a:r>
+            <a:r>
+              <a:rPr sz="3200" dirty="0" err="1"/>
+              <a:t>도구를</a:t>
+            </a:r>
+            <a:r>
+              <a:rPr sz="3200" dirty="0"/>
+              <a:t> </a:t>
+            </a:r>
+            <a:r>
+              <a:rPr sz="3200" dirty="0" err="1"/>
+              <a:t>쓰면</a:t>
+            </a:r>
+            <a:r>
+              <a:rPr sz="3200" dirty="0"/>
+              <a:t> </a:t>
+            </a:r>
+            <a:r>
+              <a:rPr sz="3200" dirty="0" err="1"/>
+              <a:t>되지</a:t>
+            </a:r>
+            <a:r>
+              <a:rPr sz="3200" dirty="0"/>
+              <a:t> </a:t>
+            </a:r>
+            <a:r>
+              <a:rPr sz="3200" dirty="0" err="1"/>
+              <a:t>않는가</a:t>
+            </a:r>
+            <a:endParaRPr sz="3200" dirty="0"/>
           </a:p>
         </p:txBody>
       </p:sp>
@@ -10184,15 +13088,255 @@
           <a:bodyPr/>
           <a:lstStyle/>
           <a:p>
-            <a:pPr/>
-            <a:r>
-              <a:t>교통 시뮬레이터는 이미 여럿 있습니다. 쓰지 않는 이유는 성능이 나빠서가 아니라, 각 도구가 답하도록 만들어진 질문이 우리 질문과 다르기 때문입니다.</a:t>
-            </a:r>
-          </a:p>
-          <a:p>
-            <a:pPr/>
-            <a:r>
-              <a:t>화면 전체가 교차로 하나입니다. 차로 단위로 그리고, 차량마다 위치를 개별로 계산합니다.</a:t>
+            <a:r>
+              <a:rPr dirty="0" err="1"/>
+              <a:t>교통</a:t>
+            </a:r>
+            <a:r>
+              <a:rPr dirty="0"/>
+              <a:t> </a:t>
+            </a:r>
+            <a:r>
+              <a:rPr dirty="0" err="1"/>
+              <a:t>시뮬레이터는</a:t>
+            </a:r>
+            <a:r>
+              <a:rPr dirty="0"/>
+              <a:t> </a:t>
+            </a:r>
+            <a:r>
+              <a:rPr dirty="0" err="1"/>
+              <a:t>이미</a:t>
+            </a:r>
+            <a:r>
+              <a:rPr dirty="0"/>
+              <a:t> </a:t>
+            </a:r>
+            <a:r>
+              <a:rPr dirty="0" err="1"/>
+              <a:t>여럿</a:t>
+            </a:r>
+            <a:r>
+              <a:rPr dirty="0"/>
+              <a:t> </a:t>
+            </a:r>
+            <a:r>
+              <a:rPr dirty="0" err="1"/>
+              <a:t>있습니다</a:t>
+            </a:r>
+            <a:r>
+              <a:rPr dirty="0"/>
+              <a:t>. </a:t>
+            </a:r>
+            <a:r>
+              <a:rPr dirty="0" err="1"/>
+              <a:t>쓰지</a:t>
+            </a:r>
+            <a:r>
+              <a:rPr dirty="0"/>
+              <a:t> </a:t>
+            </a:r>
+            <a:r>
+              <a:rPr dirty="0" err="1"/>
+              <a:t>않는</a:t>
+            </a:r>
+            <a:r>
+              <a:rPr dirty="0"/>
+              <a:t> </a:t>
+            </a:r>
+            <a:r>
+              <a:rPr dirty="0" err="1"/>
+              <a:t>이유는</a:t>
+            </a:r>
+            <a:r>
+              <a:rPr dirty="0"/>
+              <a:t> </a:t>
+            </a:r>
+            <a:r>
+              <a:rPr dirty="0" err="1"/>
+              <a:t>성능이</a:t>
+            </a:r>
+            <a:r>
+              <a:rPr dirty="0"/>
+              <a:t> </a:t>
+            </a:r>
+            <a:r>
+              <a:rPr dirty="0" err="1"/>
+              <a:t>나빠서가</a:t>
+            </a:r>
+            <a:r>
+              <a:rPr dirty="0"/>
+              <a:t> </a:t>
+            </a:r>
+            <a:r>
+              <a:rPr dirty="0" err="1"/>
+              <a:t>아니라</a:t>
+            </a:r>
+            <a:r>
+              <a:rPr dirty="0"/>
+              <a:t>, </a:t>
+            </a:r>
+            <a:r>
+              <a:rPr dirty="0" err="1"/>
+              <a:t>각</a:t>
+            </a:r>
+            <a:r>
+              <a:rPr dirty="0"/>
+              <a:t> </a:t>
+            </a:r>
+            <a:r>
+              <a:rPr dirty="0" err="1"/>
+              <a:t>도구가</a:t>
+            </a:r>
+            <a:r>
+              <a:rPr dirty="0"/>
+              <a:t> </a:t>
+            </a:r>
+            <a:r>
+              <a:rPr dirty="0" err="1"/>
+              <a:t>답하도록</a:t>
+            </a:r>
+            <a:r>
+              <a:rPr dirty="0"/>
+              <a:t> </a:t>
+            </a:r>
+            <a:r>
+              <a:rPr dirty="0" err="1"/>
+              <a:t>만들어진</a:t>
+            </a:r>
+            <a:r>
+              <a:rPr dirty="0"/>
+              <a:t> </a:t>
+            </a:r>
+            <a:r>
+              <a:rPr dirty="0" err="1"/>
+              <a:t>질문이</a:t>
+            </a:r>
+            <a:r>
+              <a:rPr dirty="0"/>
+              <a:t> </a:t>
+            </a:r>
+            <a:r>
+              <a:rPr dirty="0" err="1"/>
+              <a:t>우리</a:t>
+            </a:r>
+            <a:r>
+              <a:rPr dirty="0"/>
+              <a:t> </a:t>
+            </a:r>
+            <a:r>
+              <a:rPr dirty="0" err="1"/>
+              <a:t>질문과</a:t>
+            </a:r>
+            <a:r>
+              <a:rPr dirty="0"/>
+              <a:t> </a:t>
+            </a:r>
+            <a:r>
+              <a:rPr dirty="0" err="1"/>
+              <a:t>다르기</a:t>
+            </a:r>
+            <a:r>
+              <a:rPr dirty="0"/>
+              <a:t> </a:t>
+            </a:r>
+            <a:r>
+              <a:rPr dirty="0" err="1"/>
+              <a:t>때문입니다</a:t>
+            </a:r>
+            <a:r>
+              <a:rPr dirty="0"/>
+              <a:t>.</a:t>
+            </a:r>
+          </a:p>
+          <a:p>
+            <a:r>
+              <a:rPr dirty="0" err="1"/>
+              <a:t>화면</a:t>
+            </a:r>
+            <a:r>
+              <a:rPr dirty="0"/>
+              <a:t> </a:t>
+            </a:r>
+            <a:r>
+              <a:rPr dirty="0" err="1"/>
+              <a:t>전체가</a:t>
+            </a:r>
+            <a:r>
+              <a:rPr dirty="0"/>
+              <a:t> </a:t>
+            </a:r>
+            <a:r>
+              <a:rPr dirty="0" err="1"/>
+              <a:t>교차로</a:t>
+            </a:r>
+            <a:r>
+              <a:rPr dirty="0"/>
+              <a:t> </a:t>
+            </a:r>
+            <a:r>
+              <a:rPr dirty="0" err="1"/>
+              <a:t>하나입니다</a:t>
+            </a:r>
+            <a:r>
+              <a:rPr dirty="0"/>
+              <a:t>. </a:t>
+            </a:r>
+            <a:r>
+              <a:rPr dirty="0" err="1"/>
+              <a:t>차로</a:t>
+            </a:r>
+            <a:r>
+              <a:rPr dirty="0"/>
+              <a:t> </a:t>
+            </a:r>
+            <a:r>
+              <a:rPr dirty="0" err="1"/>
+              <a:t>단위로</a:t>
+            </a:r>
+            <a:r>
+              <a:rPr dirty="0"/>
+              <a:t> </a:t>
+            </a:r>
+            <a:r>
+              <a:rPr dirty="0" err="1"/>
+              <a:t>그리고</a:t>
+            </a:r>
+            <a:r>
+              <a:rPr dirty="0"/>
+              <a:t>, </a:t>
+            </a:r>
+            <a:r>
+              <a:rPr dirty="0" err="1"/>
+              <a:t>차량마다</a:t>
+            </a:r>
+            <a:r>
+              <a:rPr dirty="0"/>
+              <a:t> </a:t>
+            </a:r>
+            <a:r>
+              <a:rPr dirty="0" err="1"/>
+              <a:t>위치를</a:t>
+            </a:r>
+            <a:r>
+              <a:rPr dirty="0"/>
+              <a:t> </a:t>
+            </a:r>
+            <a:r>
+              <a:rPr dirty="0" err="1"/>
+              <a:t>개별로</a:t>
+            </a:r>
+            <a:r>
+              <a:rPr dirty="0"/>
+              <a:t> </a:t>
+            </a:r>
+            <a:r>
+              <a:rPr dirty="0" err="1"/>
+              <a:t>계산합니다</a:t>
+            </a:r>
+            <a:r>
+              <a:rPr dirty="0"/>
+              <a:t>.</a:t>
             </a:r>
           </a:p>
         </p:txBody>
@@ -10245,7 +13389,7 @@
           <a:p>
             <a:fld id="{C1FF6DA9-008F-8B48-92A6-B652298478BF}" type="slidenum">
               <a:rPr lang="en-US" smtClean="0"/>
-              <a:t>‹#›</a:t>
+              <a:t>8</a:t>
             </a:fld>
             <a:endParaRPr lang="en-US"/>
           </a:p>
@@ -10351,7 +13495,7 @@
 </file>
 
 <file path=ppt/slides/slide9.xml><?xml version="1.0" encoding="utf-8"?>
-<p:sld xmlns:a="http://schemas.openxmlformats.org/drawingml/2006/main" xmlns:p="http://schemas.openxmlformats.org/presentationml/2006/main" xmlns:r="http://schemas.openxmlformats.org/officeDocument/2006/relationships">
+<p:sld xmlns:a="http://schemas.openxmlformats.org/drawingml/2006/main" xmlns:r="http://schemas.openxmlformats.org/officeDocument/2006/relationships" xmlns:p="http://schemas.openxmlformats.org/presentationml/2006/main">
   <p:cSld name="md:1.2-4#1|1d6cba9d12">
     <p:spTree>
       <p:nvGrpSpPr>
@@ -10359,7 +13503,14 @@
         <p:cNvGrpSpPr/>
         <p:nvPr/>
       </p:nvGrpSpPr>
-      <p:grpSpPr/>
+      <p:grpSpPr>
+        <a:xfrm>
+          <a:off x="0" y="0"/>
+          <a:ext cx="0" cy="0"/>
+          <a:chOff x="0" y="0"/>
+          <a:chExt cx="0" cy="0"/>
+        </a:xfrm>
+      </p:grpSpPr>
       <p:sp>
         <p:nvSpPr>
           <p:cNvPr id="2" name="Title 1"/>
@@ -10401,27 +13552,515 @@
           <a:bodyPr/>
           <a:lstStyle/>
           <a:p>
-            <a:pPr/>
-            <a:r>
-              <a:t>VISSIM(독일 PTV)과 AIMSUN(스페인 TSS)은 미시 교통류 시뮬레이터입니다. 차량 한 대의 차간거리와 차로 변경을 초 단위로 계산합니다.</a:t>
-            </a:r>
-          </a:p>
-          <a:p>
-            <a:pPr/>
-            <a:r>
-              <a:t>그래서 "이 교차로의 좌회전 신호를 5초 늘리면 대기행렬이 몇 미터 줄어드는가" 같은 질문에 강합니다.</a:t>
-            </a:r>
-          </a:p>
-          <a:p>
-            <a:pPr/>
-            <a:r>
-              <a:t>대신 계산량이 그 정밀도를 따라 늘어납니다. 교차로 수십 개짜리 구역을 넘어 도시 하나의 하루를 통째로 돌리는 용도가 아닙니다.</a:t>
-            </a:r>
-          </a:p>
-          <a:p>
-            <a:pPr/>
-            <a:r>
-              <a:t>둘 다 상용 라이선스가 필요합니다. 수강생이 각자 노트북에서 값을 바꿔 가며 반복 실험하기 어렵습니다.</a:t>
+            <a:r>
+              <a:rPr dirty="0"/>
+              <a:t>VISSIM(</a:t>
+            </a:r>
+            <a:r>
+              <a:rPr dirty="0" err="1"/>
+              <a:t>독일</a:t>
+            </a:r>
+            <a:r>
+              <a:rPr dirty="0"/>
+              <a:t> PTV)</a:t>
+            </a:r>
+            <a:r>
+              <a:rPr dirty="0" err="1"/>
+              <a:t>과</a:t>
+            </a:r>
+            <a:r>
+              <a:rPr dirty="0"/>
+              <a:t> AIMSUN(</a:t>
+            </a:r>
+            <a:r>
+              <a:rPr dirty="0" err="1"/>
+              <a:t>스페인</a:t>
+            </a:r>
+            <a:r>
+              <a:rPr dirty="0"/>
+              <a:t> TSS)</a:t>
+            </a:r>
+            <a:r>
+              <a:rPr dirty="0" err="1"/>
+              <a:t>은</a:t>
+            </a:r>
+            <a:r>
+              <a:rPr dirty="0"/>
+              <a:t> </a:t>
+            </a:r>
+            <a:r>
+              <a:rPr dirty="0" err="1"/>
+              <a:t>미시</a:t>
+            </a:r>
+            <a:r>
+              <a:rPr dirty="0"/>
+              <a:t> </a:t>
+            </a:r>
+            <a:r>
+              <a:rPr dirty="0" err="1"/>
+              <a:t>교통류</a:t>
+            </a:r>
+            <a:r>
+              <a:rPr dirty="0"/>
+              <a:t> </a:t>
+            </a:r>
+            <a:r>
+              <a:rPr dirty="0" err="1"/>
+              <a:t>시뮬레이터입니다</a:t>
+            </a:r>
+            <a:r>
+              <a:rPr dirty="0"/>
+              <a:t>. </a:t>
+            </a:r>
+            <a:r>
+              <a:rPr dirty="0" err="1"/>
+              <a:t>차량</a:t>
+            </a:r>
+            <a:r>
+              <a:rPr dirty="0"/>
+              <a:t> </a:t>
+            </a:r>
+            <a:r>
+              <a:rPr dirty="0" err="1"/>
+              <a:t>한</a:t>
+            </a:r>
+            <a:r>
+              <a:rPr dirty="0"/>
+              <a:t> </a:t>
+            </a:r>
+            <a:r>
+              <a:rPr dirty="0" err="1"/>
+              <a:t>대의</a:t>
+            </a:r>
+            <a:r>
+              <a:rPr dirty="0"/>
+              <a:t> </a:t>
+            </a:r>
+            <a:r>
+              <a:rPr dirty="0" err="1"/>
+              <a:t>차간거리와</a:t>
+            </a:r>
+            <a:r>
+              <a:rPr dirty="0"/>
+              <a:t> </a:t>
+            </a:r>
+            <a:r>
+              <a:rPr dirty="0" err="1"/>
+              <a:t>차로</a:t>
+            </a:r>
+            <a:r>
+              <a:rPr dirty="0"/>
+              <a:t> </a:t>
+            </a:r>
+            <a:r>
+              <a:rPr dirty="0" err="1"/>
+              <a:t>변경을</a:t>
+            </a:r>
+            <a:r>
+              <a:rPr dirty="0"/>
+              <a:t> </a:t>
+            </a:r>
+            <a:r>
+              <a:rPr dirty="0" err="1"/>
+              <a:t>초</a:t>
+            </a:r>
+            <a:r>
+              <a:rPr dirty="0"/>
+              <a:t> </a:t>
+            </a:r>
+            <a:r>
+              <a:rPr dirty="0" err="1"/>
+              <a:t>단위로</a:t>
+            </a:r>
+            <a:r>
+              <a:rPr dirty="0"/>
+              <a:t> </a:t>
+            </a:r>
+            <a:r>
+              <a:rPr dirty="0" err="1"/>
+              <a:t>계산합니다</a:t>
+            </a:r>
+            <a:r>
+              <a:rPr dirty="0"/>
+              <a:t>.</a:t>
+            </a:r>
+            <a:endParaRPr lang="en-US" dirty="0"/>
+          </a:p>
+          <a:p>
+            <a:endParaRPr dirty="0"/>
+          </a:p>
+          <a:p>
+            <a:r>
+              <a:rPr dirty="0" err="1"/>
+              <a:t>그래서</a:t>
+            </a:r>
+            <a:r>
+              <a:rPr dirty="0"/>
+              <a:t> "</a:t>
+            </a:r>
+            <a:r>
+              <a:rPr dirty="0" err="1"/>
+              <a:t>이</a:t>
+            </a:r>
+            <a:r>
+              <a:rPr dirty="0"/>
+              <a:t> </a:t>
+            </a:r>
+            <a:r>
+              <a:rPr dirty="0" err="1"/>
+              <a:t>교차로의</a:t>
+            </a:r>
+            <a:r>
+              <a:rPr dirty="0"/>
+              <a:t> </a:t>
+            </a:r>
+            <a:r>
+              <a:rPr dirty="0" err="1"/>
+              <a:t>좌회전</a:t>
+            </a:r>
+            <a:r>
+              <a:rPr dirty="0"/>
+              <a:t> </a:t>
+            </a:r>
+            <a:r>
+              <a:rPr dirty="0" err="1"/>
+              <a:t>신호를</a:t>
+            </a:r>
+            <a:r>
+              <a:rPr dirty="0"/>
+              <a:t> 5초 </a:t>
+            </a:r>
+            <a:r>
+              <a:rPr dirty="0" err="1"/>
+              <a:t>늘리면</a:t>
+            </a:r>
+            <a:r>
+              <a:rPr dirty="0"/>
+              <a:t> </a:t>
+            </a:r>
+            <a:r>
+              <a:rPr dirty="0" err="1"/>
+              <a:t>대기행렬이</a:t>
+            </a:r>
+            <a:r>
+              <a:rPr dirty="0"/>
+              <a:t> </a:t>
+            </a:r>
+            <a:r>
+              <a:rPr dirty="0" err="1"/>
+              <a:t>몇</a:t>
+            </a:r>
+            <a:r>
+              <a:rPr dirty="0"/>
+              <a:t> </a:t>
+            </a:r>
+            <a:r>
+              <a:rPr dirty="0" err="1"/>
+              <a:t>미터</a:t>
+            </a:r>
+            <a:r>
+              <a:rPr dirty="0"/>
+              <a:t> </a:t>
+            </a:r>
+            <a:r>
+              <a:rPr dirty="0" err="1"/>
+              <a:t>줄어드는가</a:t>
+            </a:r>
+            <a:r>
+              <a:rPr dirty="0"/>
+              <a:t>" </a:t>
+            </a:r>
+            <a:r>
+              <a:rPr dirty="0" err="1"/>
+              <a:t>같은</a:t>
+            </a:r>
+            <a:r>
+              <a:rPr dirty="0"/>
+              <a:t> </a:t>
+            </a:r>
+            <a:r>
+              <a:rPr dirty="0" err="1"/>
+              <a:t>질문에</a:t>
+            </a:r>
+            <a:r>
+              <a:rPr dirty="0"/>
+              <a:t> </a:t>
+            </a:r>
+            <a:r>
+              <a:rPr dirty="0" err="1"/>
+              <a:t>강합니다</a:t>
+            </a:r>
+            <a:r>
+              <a:rPr dirty="0"/>
+              <a:t>.</a:t>
+            </a:r>
+            <a:endParaRPr lang="en-US" dirty="0"/>
+          </a:p>
+          <a:p>
+            <a:endParaRPr dirty="0"/>
+          </a:p>
+          <a:p>
+            <a:r>
+              <a:rPr dirty="0" err="1"/>
+              <a:t>대신</a:t>
+            </a:r>
+            <a:r>
+              <a:rPr dirty="0"/>
+              <a:t> </a:t>
+            </a:r>
+            <a:r>
+              <a:rPr dirty="0" err="1"/>
+              <a:t>계산량이</a:t>
+            </a:r>
+            <a:r>
+              <a:rPr dirty="0"/>
+              <a:t> </a:t>
+            </a:r>
+            <a:r>
+              <a:rPr dirty="0" err="1"/>
+              <a:t>그</a:t>
+            </a:r>
+            <a:r>
+              <a:rPr dirty="0"/>
+              <a:t> </a:t>
+            </a:r>
+            <a:r>
+              <a:rPr dirty="0" err="1"/>
+              <a:t>정밀도를</a:t>
+            </a:r>
+            <a:r>
+              <a:rPr dirty="0"/>
+              <a:t> </a:t>
+            </a:r>
+            <a:r>
+              <a:rPr dirty="0" err="1"/>
+              <a:t>따라</a:t>
+            </a:r>
+            <a:r>
+              <a:rPr dirty="0"/>
+              <a:t> </a:t>
+            </a:r>
+            <a:r>
+              <a:rPr dirty="0" err="1"/>
+              <a:t>늘어납니다</a:t>
+            </a:r>
+            <a:r>
+              <a:rPr dirty="0"/>
+              <a:t>. </a:t>
+            </a:r>
+            <a:r>
+              <a:rPr dirty="0" err="1"/>
+              <a:t>교차로</a:t>
+            </a:r>
+            <a:r>
+              <a:rPr dirty="0"/>
+              <a:t> </a:t>
+            </a:r>
+            <a:r>
+              <a:rPr dirty="0" err="1"/>
+              <a:t>수십</a:t>
+            </a:r>
+            <a:r>
+              <a:rPr dirty="0"/>
+              <a:t> </a:t>
+            </a:r>
+            <a:r>
+              <a:rPr dirty="0" err="1"/>
+              <a:t>개짜리</a:t>
+            </a:r>
+            <a:r>
+              <a:rPr dirty="0"/>
+              <a:t> </a:t>
+            </a:r>
+            <a:r>
+              <a:rPr dirty="0" err="1"/>
+              <a:t>구역을</a:t>
+            </a:r>
+            <a:r>
+              <a:rPr dirty="0"/>
+              <a:t> </a:t>
+            </a:r>
+            <a:r>
+              <a:rPr dirty="0" err="1"/>
+              <a:t>넘어</a:t>
+            </a:r>
+            <a:r>
+              <a:rPr dirty="0"/>
+              <a:t> </a:t>
+            </a:r>
+            <a:r>
+              <a:rPr dirty="0" err="1"/>
+              <a:t>도시</a:t>
+            </a:r>
+            <a:r>
+              <a:rPr dirty="0"/>
+              <a:t> </a:t>
+            </a:r>
+            <a:r>
+              <a:rPr dirty="0" err="1"/>
+              <a:t>하나의</a:t>
+            </a:r>
+            <a:r>
+              <a:rPr dirty="0"/>
+              <a:t> </a:t>
+            </a:r>
+            <a:r>
+              <a:rPr dirty="0" err="1"/>
+              <a:t>하루를</a:t>
+            </a:r>
+            <a:r>
+              <a:rPr dirty="0"/>
+              <a:t> </a:t>
+            </a:r>
+            <a:r>
+              <a:rPr dirty="0" err="1"/>
+              <a:t>통째로</a:t>
+            </a:r>
+            <a:r>
+              <a:rPr dirty="0"/>
+              <a:t> </a:t>
+            </a:r>
+            <a:r>
+              <a:rPr dirty="0" err="1"/>
+              <a:t>돌리는</a:t>
+            </a:r>
+            <a:r>
+              <a:rPr dirty="0"/>
+              <a:t> </a:t>
+            </a:r>
+            <a:r>
+              <a:rPr dirty="0" err="1"/>
+              <a:t>용도가</a:t>
+            </a:r>
+            <a:r>
+              <a:rPr dirty="0"/>
+              <a:t> </a:t>
+            </a:r>
+            <a:r>
+              <a:rPr dirty="0" err="1"/>
+              <a:t>아닙니다</a:t>
+            </a:r>
+            <a:r>
+              <a:rPr dirty="0"/>
+              <a:t>.</a:t>
+            </a:r>
+            <a:endParaRPr lang="en-US" dirty="0"/>
+          </a:p>
+          <a:p>
+            <a:endParaRPr dirty="0"/>
+          </a:p>
+          <a:p>
+            <a:r>
+              <a:rPr dirty="0" err="1"/>
+              <a:t>둘</a:t>
+            </a:r>
+            <a:r>
+              <a:rPr dirty="0"/>
+              <a:t> </a:t>
+            </a:r>
+            <a:r>
+              <a:rPr dirty="0" err="1"/>
+              <a:t>다</a:t>
+            </a:r>
+            <a:r>
+              <a:rPr dirty="0"/>
+              <a:t> </a:t>
+            </a:r>
+            <a:r>
+              <a:rPr dirty="0" err="1"/>
+              <a:t>상용</a:t>
+            </a:r>
+            <a:r>
+              <a:rPr dirty="0"/>
+              <a:t> </a:t>
+            </a:r>
+            <a:r>
+              <a:rPr dirty="0" err="1"/>
+              <a:t>라이선스가</a:t>
+            </a:r>
+            <a:r>
+              <a:rPr dirty="0"/>
+              <a:t> </a:t>
+            </a:r>
+            <a:r>
+              <a:rPr dirty="0" err="1"/>
+              <a:t>필요합니다</a:t>
+            </a:r>
+            <a:r>
+              <a:rPr dirty="0"/>
+              <a:t>. </a:t>
+            </a:r>
+            <a:r>
+              <a:rPr dirty="0" err="1"/>
+              <a:t>수강생이</a:t>
+            </a:r>
+            <a:r>
+              <a:rPr dirty="0"/>
+              <a:t> </a:t>
+            </a:r>
+            <a:r>
+              <a:rPr dirty="0" err="1"/>
+              <a:t>각자</a:t>
+            </a:r>
+            <a:r>
+              <a:rPr dirty="0"/>
+              <a:t> </a:t>
+            </a:r>
+            <a:r>
+              <a:rPr dirty="0" err="1"/>
+              <a:t>노트북에서</a:t>
+            </a:r>
+            <a:r>
+              <a:rPr dirty="0"/>
+              <a:t> </a:t>
+            </a:r>
+            <a:r>
+              <a:rPr dirty="0" err="1"/>
+              <a:t>값을</a:t>
+            </a:r>
+            <a:r>
+              <a:rPr dirty="0"/>
+              <a:t> </a:t>
+            </a:r>
+            <a:r>
+              <a:rPr dirty="0" err="1"/>
+              <a:t>바꿔</a:t>
+            </a:r>
+            <a:r>
+              <a:rPr dirty="0"/>
+              <a:t> </a:t>
+            </a:r>
+            <a:r>
+              <a:rPr dirty="0" err="1"/>
+              <a:t>가며</a:t>
+            </a:r>
+            <a:r>
+              <a:rPr dirty="0"/>
+              <a:t> </a:t>
+            </a:r>
+            <a:r>
+              <a:rPr dirty="0" err="1"/>
+              <a:t>반복</a:t>
+            </a:r>
+            <a:r>
+              <a:rPr dirty="0"/>
+              <a:t> </a:t>
+            </a:r>
+            <a:r>
+              <a:rPr dirty="0" err="1"/>
+              <a:t>실험하기</a:t>
+            </a:r>
+            <a:r>
+              <a:rPr dirty="0"/>
+              <a:t> </a:t>
+            </a:r>
+            <a:r>
+              <a:rPr dirty="0" err="1"/>
+              <a:t>어렵습니다</a:t>
+            </a:r>
+            <a:r>
+              <a:rPr dirty="0"/>
+              <a:t>.</a:t>
             </a:r>
           </a:p>
         </p:txBody>
@@ -10474,7 +14113,7 @@
           <a:p>
             <a:fld id="{C1FF6DA9-008F-8B48-92A6-B652298478BF}" type="slidenum">
               <a:rPr lang="en-US" smtClean="0"/>
-              <a:t>‹#›</a:t>
+              <a:t>9</a:t>
             </a:fld>
             <a:endParaRPr lang="en-US"/>
           </a:p>
@@ -10814,7 +14453,7 @@
 </file>
 
 <file path=ppt/theme/theme2.xml><?xml version="1.0" encoding="utf-8"?>
-<a:theme xmlns:a="http://schemas.openxmlformats.org/drawingml/2006/main" name="Office Theme">
+<a:theme xmlns:a="http://schemas.openxmlformats.org/drawingml/2006/main" name="Office 테마">
   <a:themeElements>
     <a:clrScheme name="Office">
       <a:dk1>
@@ -10824,44 +14463,44 @@
         <a:sysClr val="window" lastClr="FFFFFF"/>
       </a:lt1>
       <a:dk2>
-        <a:srgbClr val="1F497D"/>
+        <a:srgbClr val="0E2841"/>
       </a:dk2>
       <a:lt2>
-        <a:srgbClr val="EEECE1"/>
+        <a:srgbClr val="E8E8E8"/>
       </a:lt2>
       <a:accent1>
-        <a:srgbClr val="4F81BD"/>
+        <a:srgbClr val="156082"/>
       </a:accent1>
       <a:accent2>
-        <a:srgbClr val="C0504D"/>
+        <a:srgbClr val="E97132"/>
       </a:accent2>
       <a:accent3>
-        <a:srgbClr val="9BBB59"/>
+        <a:srgbClr val="196B24"/>
       </a:accent3>
       <a:accent4>
-        <a:srgbClr val="8064A2"/>
+        <a:srgbClr val="0F9ED5"/>
       </a:accent4>
       <a:accent5>
-        <a:srgbClr val="4BACC6"/>
+        <a:srgbClr val="A02B93"/>
       </a:accent5>
       <a:accent6>
-        <a:srgbClr val="F79646"/>
+        <a:srgbClr val="4EA72E"/>
       </a:accent6>
       <a:hlink>
-        <a:srgbClr val="0000FF"/>
+        <a:srgbClr val="467886"/>
       </a:hlink>
       <a:folHlink>
-        <a:srgbClr val="800080"/>
+        <a:srgbClr val="96607D"/>
       </a:folHlink>
     </a:clrScheme>
     <a:fontScheme name="Office">
       <a:majorFont>
-        <a:latin typeface="Calibri"/>
+        <a:latin typeface="맑은 고딕" panose="02110004020202020204"/>
         <a:ea typeface=""/>
         <a:cs typeface=""/>
-        <a:font script="Jpan" typeface="ＭＳ Ｐゴシック"/>
+        <a:font script="Jpan" typeface="游ゴシック Light"/>
         <a:font script="Hang" typeface="맑은 고딕"/>
-        <a:font script="Hans" typeface="宋体"/>
+        <a:font script="Hans" typeface="等线 Light"/>
         <a:font script="Hant" typeface="新細明體"/>
         <a:font script="Arab" typeface="Times New Roman"/>
         <a:font script="Hebr" typeface="Times New Roman"/>
@@ -10889,14 +14528,31 @@
         <a:font script="Viet" typeface="Times New Roman"/>
         <a:font script="Uigh" typeface="Microsoft Uighur"/>
         <a:font script="Geor" typeface="Sylfaen"/>
+        <a:font script="Armn" typeface="Arial"/>
+        <a:font script="Bugi" typeface="Leelawadee UI"/>
+        <a:font script="Bopo" typeface="Microsoft JhengHei"/>
+        <a:font script="Java" typeface="Javanese Text"/>
+        <a:font script="Lisu" typeface="Segoe UI"/>
+        <a:font script="Mymr" typeface="Myanmar Text"/>
+        <a:font script="Nkoo" typeface="Ebrima"/>
+        <a:font script="Olck" typeface="Nirmala UI"/>
+        <a:font script="Osma" typeface="Ebrima"/>
+        <a:font script="Phag" typeface="Phagspa"/>
+        <a:font script="Syrn" typeface="Estrangelo Edessa"/>
+        <a:font script="Syrj" typeface="Estrangelo Edessa"/>
+        <a:font script="Syre" typeface="Estrangelo Edessa"/>
+        <a:font script="Sora" typeface="Nirmala UI"/>
+        <a:font script="Tale" typeface="Microsoft Tai Le"/>
+        <a:font script="Talu" typeface="Microsoft New Tai Lue"/>
+        <a:font script="Tfng" typeface="Ebrima"/>
       </a:majorFont>
       <a:minorFont>
-        <a:latin typeface="Calibri"/>
+        <a:latin typeface="맑은 고딕" panose="02110004020202020204"/>
         <a:ea typeface=""/>
         <a:cs typeface=""/>
-        <a:font script="Jpan" typeface="ＭＳ Ｐゴシック"/>
+        <a:font script="Jpan" typeface="游ゴシック"/>
         <a:font script="Hang" typeface="맑은 고딕"/>
-        <a:font script="Hans" typeface="宋体"/>
+        <a:font script="Hans" typeface="等线"/>
         <a:font script="Hant" typeface="新細明體"/>
         <a:font script="Arab" typeface="Arial"/>
         <a:font script="Hebr" typeface="Arial"/>
@@ -10924,6 +14580,23 @@
         <a:font script="Viet" typeface="Arial"/>
         <a:font script="Uigh" typeface="Microsoft Uighur"/>
         <a:font script="Geor" typeface="Sylfaen"/>
+        <a:font script="Armn" typeface="Arial"/>
+        <a:font script="Bugi" typeface="Leelawadee UI"/>
+        <a:font script="Bopo" typeface="Microsoft JhengHei"/>
+        <a:font script="Java" typeface="Javanese Text"/>
+        <a:font script="Lisu" typeface="Segoe UI"/>
+        <a:font script="Mymr" typeface="Myanmar Text"/>
+        <a:font script="Nkoo" typeface="Ebrima"/>
+        <a:font script="Olck" typeface="Nirmala UI"/>
+        <a:font script="Osma" typeface="Ebrima"/>
+        <a:font script="Phag" typeface="Phagspa"/>
+        <a:font script="Syrn" typeface="Estrangelo Edessa"/>
+        <a:font script="Syrj" typeface="Estrangelo Edessa"/>
+        <a:font script="Syre" typeface="Estrangelo Edessa"/>
+        <a:font script="Sora" typeface="Nirmala UI"/>
+        <a:font script="Tale" typeface="Microsoft Tai Le"/>
+        <a:font script="Talu" typeface="Microsoft New Tai Lue"/>
+        <a:font script="Tfng" typeface="Ebrima"/>
       </a:minorFont>
     </a:fontScheme>
     <a:fmtScheme name="Office">
@@ -10935,180 +14608,136 @@
           <a:gsLst>
             <a:gs pos="0">
               <a:schemeClr val="phClr">
-                <a:tint val="50000"/>
-                <a:satMod val="300000"/>
+                <a:lumMod val="110000"/>
+                <a:satMod val="105000"/>
+                <a:tint val="67000"/>
               </a:schemeClr>
             </a:gs>
-            <a:gs pos="35000">
+            <a:gs pos="50000">
               <a:schemeClr val="phClr">
-                <a:tint val="37000"/>
-                <a:satMod val="300000"/>
+                <a:lumMod val="105000"/>
+                <a:satMod val="103000"/>
+                <a:tint val="73000"/>
               </a:schemeClr>
             </a:gs>
             <a:gs pos="100000">
               <a:schemeClr val="phClr">
-                <a:tint val="15000"/>
-                <a:satMod val="350000"/>
+                <a:lumMod val="105000"/>
+                <a:satMod val="109000"/>
+                <a:tint val="81000"/>
               </a:schemeClr>
             </a:gs>
           </a:gsLst>
-          <a:lin ang="16200000" scaled="1"/>
+          <a:lin ang="5400000" scaled="0"/>
         </a:gradFill>
         <a:gradFill rotWithShape="1">
           <a:gsLst>
             <a:gs pos="0">
               <a:schemeClr val="phClr">
-                <a:tint val="100000"/>
+                <a:satMod val="103000"/>
+                <a:lumMod val="102000"/>
+                <a:tint val="94000"/>
+              </a:schemeClr>
+            </a:gs>
+            <a:gs pos="50000">
+              <a:schemeClr val="phClr">
+                <a:satMod val="110000"/>
+                <a:lumMod val="100000"/>
                 <a:shade val="100000"/>
-                <a:satMod val="130000"/>
               </a:schemeClr>
             </a:gs>
             <a:gs pos="100000">
               <a:schemeClr val="phClr">
-                <a:tint val="50000"/>
-                <a:shade val="100000"/>
-                <a:satMod val="350000"/>
+                <a:lumMod val="99000"/>
+                <a:satMod val="120000"/>
+                <a:shade val="78000"/>
               </a:schemeClr>
             </a:gs>
           </a:gsLst>
-          <a:lin ang="16200000" scaled="0"/>
+          <a:lin ang="5400000" scaled="0"/>
         </a:gradFill>
       </a:fillStyleLst>
       <a:lnStyleLst>
-        <a:ln w="9525" cap="flat" cmpd="sng" algn="ctr">
+        <a:ln w="12700" cap="flat" cmpd="sng" algn="ctr">
           <a:solidFill>
-            <a:schemeClr val="phClr">
-              <a:shade val="95000"/>
-              <a:satMod val="105000"/>
-            </a:schemeClr>
+            <a:schemeClr val="phClr"/>
           </a:solidFill>
           <a:prstDash val="solid"/>
+          <a:miter lim="800000"/>
+        </a:ln>
+        <a:ln w="19050" cap="flat" cmpd="sng" algn="ctr">
+          <a:solidFill>
+            <a:schemeClr val="phClr"/>
+          </a:solidFill>
+          <a:prstDash val="solid"/>
+          <a:miter lim="800000"/>
         </a:ln>
         <a:ln w="25400" cap="flat" cmpd="sng" algn="ctr">
           <a:solidFill>
             <a:schemeClr val="phClr"/>
           </a:solidFill>
           <a:prstDash val="solid"/>
-        </a:ln>
-        <a:ln w="38100" cap="flat" cmpd="sng" algn="ctr">
-          <a:solidFill>
-            <a:schemeClr val="phClr"/>
-          </a:solidFill>
-          <a:prstDash val="solid"/>
+          <a:miter lim="800000"/>
         </a:ln>
       </a:lnStyleLst>
       <a:effectStyleLst>
         <a:effectStyle>
+          <a:effectLst/>
+        </a:effectStyle>
+        <a:effectStyle>
+          <a:effectLst/>
+        </a:effectStyle>
+        <a:effectStyle>
           <a:effectLst>
-            <a:outerShdw blurRad="40000" dist="20000" dir="5400000" rotWithShape="0">
+            <a:outerShdw blurRad="57150" dist="19050" dir="5400000" algn="ctr" rotWithShape="0">
               <a:srgbClr val="000000">
-                <a:alpha val="38000"/>
+                <a:alpha val="63000"/>
               </a:srgbClr>
             </a:outerShdw>
           </a:effectLst>
-        </a:effectStyle>
-        <a:effectStyle>
-          <a:effectLst>
-            <a:outerShdw blurRad="40000" dist="23000" dir="5400000" rotWithShape="0">
-              <a:srgbClr val="000000">
-                <a:alpha val="35000"/>
-              </a:srgbClr>
-            </a:outerShdw>
-          </a:effectLst>
-        </a:effectStyle>
-        <a:effectStyle>
-          <a:effectLst>
-            <a:outerShdw blurRad="40000" dist="23000" dir="5400000" rotWithShape="0">
-              <a:srgbClr val="000000">
-                <a:alpha val="35000"/>
-              </a:srgbClr>
-            </a:outerShdw>
-          </a:effectLst>
-          <a:scene3d>
-            <a:camera prst="orthographicFront">
-              <a:rot lat="0" lon="0" rev="0"/>
-            </a:camera>
-            <a:lightRig rig="threePt" dir="t">
-              <a:rot lat="0" lon="0" rev="1200000"/>
-            </a:lightRig>
-          </a:scene3d>
-          <a:sp3d>
-            <a:bevelT w="63500" h="25400"/>
-          </a:sp3d>
         </a:effectStyle>
       </a:effectStyleLst>
       <a:bgFillStyleLst>
         <a:solidFill>
           <a:schemeClr val="phClr"/>
         </a:solidFill>
+        <a:solidFill>
+          <a:schemeClr val="phClr">
+            <a:tint val="95000"/>
+            <a:satMod val="170000"/>
+          </a:schemeClr>
+        </a:solidFill>
         <a:gradFill rotWithShape="1">
           <a:gsLst>
             <a:gs pos="0">
               <a:schemeClr val="phClr">
-                <a:tint val="40000"/>
-                <a:satMod val="350000"/>
+                <a:tint val="93000"/>
+                <a:satMod val="150000"/>
+                <a:shade val="98000"/>
+                <a:lumMod val="102000"/>
               </a:schemeClr>
             </a:gs>
-            <a:gs pos="40000">
+            <a:gs pos="50000">
               <a:schemeClr val="phClr">
-                <a:tint val="45000"/>
-                <a:shade val="99000"/>
-                <a:satMod val="350000"/>
+                <a:tint val="98000"/>
+                <a:satMod val="130000"/>
+                <a:shade val="90000"/>
+                <a:lumMod val="103000"/>
               </a:schemeClr>
             </a:gs>
             <a:gs pos="100000">
               <a:schemeClr val="phClr">
-                <a:shade val="20000"/>
-                <a:satMod val="255000"/>
+                <a:shade val="63000"/>
+                <a:satMod val="120000"/>
               </a:schemeClr>
             </a:gs>
           </a:gsLst>
-          <a:path path="circle">
-            <a:fillToRect l="50000" t="-80000" r="50000" b="180000"/>
-          </a:path>
-        </a:gradFill>
-        <a:gradFill rotWithShape="1">
-          <a:gsLst>
-            <a:gs pos="0">
-              <a:schemeClr val="phClr">
-                <a:tint val="80000"/>
-                <a:satMod val="300000"/>
-              </a:schemeClr>
-            </a:gs>
-            <a:gs pos="100000">
-              <a:schemeClr val="phClr">
-                <a:shade val="30000"/>
-                <a:satMod val="200000"/>
-              </a:schemeClr>
-            </a:gs>
-          </a:gsLst>
-          <a:path path="circle">
-            <a:fillToRect l="50000" t="50000" r="50000" b="50000"/>
-          </a:path>
+          <a:lin ang="5400000" scaled="0"/>
         </a:gradFill>
       </a:bgFillStyleLst>
     </a:fmtScheme>
   </a:themeElements>
   <a:objectDefaults>
-    <a:spDef>
-      <a:spPr/>
-      <a:bodyPr/>
-      <a:lstStyle/>
-      <a:style>
-        <a:lnRef idx="1">
-          <a:schemeClr val="accent1"/>
-        </a:lnRef>
-        <a:fillRef idx="3">
-          <a:schemeClr val="accent1"/>
-        </a:fillRef>
-        <a:effectRef idx="2">
-          <a:schemeClr val="accent1"/>
-        </a:effectRef>
-        <a:fontRef idx="minor">
-          <a:schemeClr val="lt1"/>
-        </a:fontRef>
-      </a:style>
-    </a:spDef>
     <a:lnDef>
       <a:spPr/>
       <a:bodyPr/>
@@ -11130,5 +14759,10 @@
     </a:lnDef>
   </a:objectDefaults>
   <a:extraClrSchemeLst/>
+  <a:extLst>
+    <a:ext uri="{05A4C25C-085E-4340-85A3-A5531E510DB2}">
+      <thm15:themeFamily xmlns:thm15="http://schemas.microsoft.com/office/thememl/2012/main" name="Office Theme" id="{2E142A2C-CD16-42D6-873A-C26D2A0506FA}" vid="{1BDDFF52-6CD6-40A5-AB3C-68EB2F1E4D0A}"/>
+    </a:ext>
+  </a:extLst>
 </a:theme>
 </file>